--- a/Docs/Sandeep_Airline.pptx
+++ b/Docs/Sandeep_Airline.pptx
@@ -6,13 +6,14 @@
   </p:sldMasterIdLst>
   <p:sldIdLst>
     <p:sldId id="256" r:id="rId2"/>
-    <p:sldId id="257" r:id="rId3"/>
-    <p:sldId id="260" r:id="rId4"/>
-    <p:sldId id="258" r:id="rId5"/>
-    <p:sldId id="262" r:id="rId6"/>
-    <p:sldId id="261" r:id="rId7"/>
-    <p:sldId id="259" r:id="rId8"/>
-    <p:sldId id="263" r:id="rId9"/>
+    <p:sldId id="264" r:id="rId3"/>
+    <p:sldId id="257" r:id="rId4"/>
+    <p:sldId id="260" r:id="rId5"/>
+    <p:sldId id="258" r:id="rId6"/>
+    <p:sldId id="262" r:id="rId7"/>
+    <p:sldId id="261" r:id="rId8"/>
+    <p:sldId id="259" r:id="rId9"/>
+    <p:sldId id="263" r:id="rId10"/>
   </p:sldIdLst>
   <p:sldSz cx="12192000" cy="6858000"/>
   <p:notesSz cx="6858000" cy="9144000"/>
@@ -268,7 +269,7 @@
           <a:p>
             <a:fld id="{0604A735-111B-41A7-BB6A-2E504CF1DEB5}" type="datetimeFigureOut">
               <a:rPr lang="en-IN" smtClean="0"/>
-              <a:t>20-08-2026</a:t>
+              <a:t>21-08-2026</a:t>
             </a:fld>
             <a:endParaRPr lang="en-IN"/>
           </a:p>
@@ -468,7 +469,7 @@
           <a:p>
             <a:fld id="{0604A735-111B-41A7-BB6A-2E504CF1DEB5}" type="datetimeFigureOut">
               <a:rPr lang="en-IN" smtClean="0"/>
-              <a:t>20-08-2026</a:t>
+              <a:t>21-08-2026</a:t>
             </a:fld>
             <a:endParaRPr lang="en-IN"/>
           </a:p>
@@ -678,7 +679,7 @@
           <a:p>
             <a:fld id="{0604A735-111B-41A7-BB6A-2E504CF1DEB5}" type="datetimeFigureOut">
               <a:rPr lang="en-IN" smtClean="0"/>
-              <a:t>20-08-2026</a:t>
+              <a:t>21-08-2026</a:t>
             </a:fld>
             <a:endParaRPr lang="en-IN"/>
           </a:p>
@@ -878,7 +879,7 @@
           <a:p>
             <a:fld id="{0604A735-111B-41A7-BB6A-2E504CF1DEB5}" type="datetimeFigureOut">
               <a:rPr lang="en-IN" smtClean="0"/>
-              <a:t>20-08-2026</a:t>
+              <a:t>21-08-2026</a:t>
             </a:fld>
             <a:endParaRPr lang="en-IN"/>
           </a:p>
@@ -1154,7 +1155,7 @@
           <a:p>
             <a:fld id="{0604A735-111B-41A7-BB6A-2E504CF1DEB5}" type="datetimeFigureOut">
               <a:rPr lang="en-IN" smtClean="0"/>
-              <a:t>20-08-2026</a:t>
+              <a:t>21-08-2026</a:t>
             </a:fld>
             <a:endParaRPr lang="en-IN"/>
           </a:p>
@@ -1422,7 +1423,7 @@
           <a:p>
             <a:fld id="{0604A735-111B-41A7-BB6A-2E504CF1DEB5}" type="datetimeFigureOut">
               <a:rPr lang="en-IN" smtClean="0"/>
-              <a:t>20-08-2026</a:t>
+              <a:t>21-08-2026</a:t>
             </a:fld>
             <a:endParaRPr lang="en-IN"/>
           </a:p>
@@ -1837,7 +1838,7 @@
           <a:p>
             <a:fld id="{0604A735-111B-41A7-BB6A-2E504CF1DEB5}" type="datetimeFigureOut">
               <a:rPr lang="en-IN" smtClean="0"/>
-              <a:t>20-08-2026</a:t>
+              <a:t>21-08-2026</a:t>
             </a:fld>
             <a:endParaRPr lang="en-IN"/>
           </a:p>
@@ -1979,7 +1980,7 @@
           <a:p>
             <a:fld id="{0604A735-111B-41A7-BB6A-2E504CF1DEB5}" type="datetimeFigureOut">
               <a:rPr lang="en-IN" smtClean="0"/>
-              <a:t>20-08-2026</a:t>
+              <a:t>21-08-2026</a:t>
             </a:fld>
             <a:endParaRPr lang="en-IN"/>
           </a:p>
@@ -2092,7 +2093,7 @@
           <a:p>
             <a:fld id="{0604A735-111B-41A7-BB6A-2E504CF1DEB5}" type="datetimeFigureOut">
               <a:rPr lang="en-IN" smtClean="0"/>
-              <a:t>20-08-2026</a:t>
+              <a:t>21-08-2026</a:t>
             </a:fld>
             <a:endParaRPr lang="en-IN"/>
           </a:p>
@@ -2405,7 +2406,7 @@
           <a:p>
             <a:fld id="{0604A735-111B-41A7-BB6A-2E504CF1DEB5}" type="datetimeFigureOut">
               <a:rPr lang="en-IN" smtClean="0"/>
-              <a:t>20-08-2026</a:t>
+              <a:t>21-08-2026</a:t>
             </a:fld>
             <a:endParaRPr lang="en-IN"/>
           </a:p>
@@ -2694,7 +2695,7 @@
           <a:p>
             <a:fld id="{0604A735-111B-41A7-BB6A-2E504CF1DEB5}" type="datetimeFigureOut">
               <a:rPr lang="en-IN" smtClean="0"/>
-              <a:t>20-08-2026</a:t>
+              <a:t>21-08-2026</a:t>
             </a:fld>
             <a:endParaRPr lang="en-IN"/>
           </a:p>
@@ -2937,7 +2938,7 @@
           <a:p>
             <a:fld id="{0604A735-111B-41A7-BB6A-2E504CF1DEB5}" type="datetimeFigureOut">
               <a:rPr lang="en-IN" smtClean="0"/>
-              <a:t>20-08-2026</a:t>
+              <a:t>21-08-2026</a:t>
             </a:fld>
             <a:endParaRPr lang="en-IN"/>
           </a:p>
@@ -3436,611 +3437,214 @@
       </p:grpSpPr>
       <p:sp>
         <p:nvSpPr>
-          <p:cNvPr id="3" name="Text 0">
-            <a:extLst>
-              <a:ext uri="{FF2B5EF4-FFF2-40B4-BE49-F238E27FC236}">
-                <a16:creationId xmlns:a16="http://schemas.microsoft.com/office/drawing/2014/main" id="{E85E3550-F367-1339-F290-FE229BC389CE}"/>
-              </a:ext>
-            </a:extLst>
-          </p:cNvPr>
-          <p:cNvSpPr/>
-          <p:nvPr/>
-        </p:nvSpPr>
-        <p:spPr>
-          <a:xfrm>
-            <a:off x="640080" y="457200"/>
-            <a:ext cx="9144000" cy="640080"/>
+          <p:cNvPr id="3" name="TextBox 2">
+            <a:extLst>
+              <a:ext uri="{FF2B5EF4-FFF2-40B4-BE49-F238E27FC236}">
+                <a16:creationId xmlns:a16="http://schemas.microsoft.com/office/drawing/2014/main" id="{C8971D6A-1B00-F276-C1BC-5E7CEE77A5C0}"/>
+              </a:ext>
+            </a:extLst>
+          </p:cNvPr>
+          <p:cNvSpPr txBox="1"/>
+          <p:nvPr/>
+        </p:nvSpPr>
+        <p:spPr>
+          <a:xfrm>
+            <a:off x="664234" y="508959"/>
+            <a:ext cx="10929668" cy="4770537"/>
           </a:xfrm>
           <a:prstGeom prst="rect">
             <a:avLst/>
           </a:prstGeom>
           <a:noFill/>
-          <a:ln/>
-        </p:spPr>
-        <p:txBody>
-          <a:bodyPr wrap="square" rtlCol="0" anchor="ctr"/>
-          <a:lstStyle/>
-          <a:p>
-            <a:pPr marL="0" indent="0" algn="ctr">
-              <a:buNone/>
-            </a:pPr>
-            <a:r>
-              <a:rPr lang="en-US" sz="3200" b="1" dirty="0">
-                <a:solidFill>
-                  <a:srgbClr val="0B1F3A"/>
-                </a:solidFill>
-                <a:latin typeface="Cambria" pitchFamily="34" charset="0"/>
-                <a:ea typeface="Cambria" pitchFamily="34" charset="-122"/>
-                <a:cs typeface="Cambria" pitchFamily="34" charset="-120"/>
-              </a:rPr>
-              <a:t>The Business Solution</a:t>
-            </a:r>
-            <a:endParaRPr lang="en-US" sz="3200" dirty="0"/>
-          </a:p>
-        </p:txBody>
-      </p:sp>
-      <p:sp>
-        <p:nvSpPr>
-          <p:cNvPr id="5" name="Text 1">
-            <a:extLst>
-              <a:ext uri="{FF2B5EF4-FFF2-40B4-BE49-F238E27FC236}">
-                <a16:creationId xmlns:a16="http://schemas.microsoft.com/office/drawing/2014/main" id="{53C719B3-12F8-A9CA-647D-E52E136CF3F6}"/>
-              </a:ext>
-            </a:extLst>
-          </p:cNvPr>
-          <p:cNvSpPr/>
-          <p:nvPr/>
-        </p:nvSpPr>
-        <p:spPr>
-          <a:xfrm>
-            <a:off x="640080" y="1097280"/>
-            <a:ext cx="10515600" cy="457200"/>
-          </a:xfrm>
-          <a:prstGeom prst="rect">
-            <a:avLst/>
-          </a:prstGeom>
-          <a:noFill/>
-          <a:ln/>
-        </p:spPr>
-        <p:txBody>
-          <a:bodyPr wrap="square" rtlCol="0" anchor="ctr"/>
-          <a:lstStyle/>
-          <a:p>
-            <a:pPr marL="0" indent="0">
-              <a:buNone/>
-            </a:pPr>
-            <a:endParaRPr lang="en-US" sz="1400" dirty="0"/>
-          </a:p>
-        </p:txBody>
-      </p:sp>
-      <p:sp>
-        <p:nvSpPr>
-          <p:cNvPr id="7" name="Shape 2">
-            <a:extLst>
-              <a:ext uri="{FF2B5EF4-FFF2-40B4-BE49-F238E27FC236}">
-                <a16:creationId xmlns:a16="http://schemas.microsoft.com/office/drawing/2014/main" id="{02F43C39-F739-5094-1803-D1878F7F6D56}"/>
-              </a:ext>
-            </a:extLst>
-          </p:cNvPr>
-          <p:cNvSpPr/>
-          <p:nvPr/>
-        </p:nvSpPr>
-        <p:spPr>
-          <a:xfrm>
-            <a:off x="640080" y="1874520"/>
-            <a:ext cx="5212080" cy="4206240"/>
-          </a:xfrm>
-          <a:prstGeom prst="roundRect">
-            <a:avLst>
-              <a:gd name="adj" fmla="val 2174"/>
-            </a:avLst>
-          </a:prstGeom>
-          <a:solidFill>
-            <a:srgbClr val="0B1F3A"/>
-          </a:solidFill>
-          <a:ln/>
-        </p:spPr>
-      </p:sp>
-      <p:sp>
-        <p:nvSpPr>
-          <p:cNvPr id="13" name="Text 5">
-            <a:extLst>
-              <a:ext uri="{FF2B5EF4-FFF2-40B4-BE49-F238E27FC236}">
-                <a16:creationId xmlns:a16="http://schemas.microsoft.com/office/drawing/2014/main" id="{67463A36-712B-957E-0935-AB3AA8BC5C5E}"/>
-              </a:ext>
-            </a:extLst>
-          </p:cNvPr>
-          <p:cNvSpPr/>
-          <p:nvPr/>
-        </p:nvSpPr>
-        <p:spPr>
-          <a:xfrm>
-            <a:off x="1691640" y="2167128"/>
-            <a:ext cx="4114800" cy="594360"/>
-          </a:xfrm>
-          <a:prstGeom prst="rect">
-            <a:avLst/>
-          </a:prstGeom>
-          <a:noFill/>
-          <a:ln/>
-        </p:spPr>
-        <p:txBody>
-          <a:bodyPr wrap="square" rtlCol="0" anchor="ctr"/>
-          <a:lstStyle/>
-          <a:p>
-            <a:pPr marL="0" indent="0">
-              <a:buNone/>
-            </a:pPr>
-            <a:r>
-              <a:rPr lang="en-US" sz="1600" b="1" dirty="0">
-                <a:solidFill>
-                  <a:srgbClr val="FFFFFF"/>
-                </a:solidFill>
-                <a:latin typeface="Calibri" pitchFamily="34" charset="0"/>
-                <a:ea typeface="Calibri" pitchFamily="34" charset="-122"/>
-                <a:cs typeface="Calibri" pitchFamily="34" charset="-120"/>
-              </a:rPr>
-              <a:t>Passengers &amp; Travel Agents</a:t>
-            </a:r>
-            <a:endParaRPr lang="en-US" sz="1600" dirty="0"/>
-          </a:p>
-        </p:txBody>
-      </p:sp>
-      <p:sp>
-        <p:nvSpPr>
-          <p:cNvPr id="15" name="Text 6">
-            <a:extLst>
-              <a:ext uri="{FF2B5EF4-FFF2-40B4-BE49-F238E27FC236}">
-                <a16:creationId xmlns:a16="http://schemas.microsoft.com/office/drawing/2014/main" id="{462B7A5C-8396-162F-FBA5-781EAAD39A82}"/>
-              </a:ext>
-            </a:extLst>
-          </p:cNvPr>
-          <p:cNvSpPr/>
-          <p:nvPr/>
-        </p:nvSpPr>
-        <p:spPr>
-          <a:xfrm>
-            <a:off x="960120" y="2926080"/>
-            <a:ext cx="4572000" cy="2926080"/>
-          </a:xfrm>
-          <a:prstGeom prst="rect">
-            <a:avLst/>
-          </a:prstGeom>
-          <a:noFill/>
-          <a:ln/>
-        </p:spPr>
-        <p:txBody>
-          <a:bodyPr wrap="square" rtlCol="0" anchor="ctr"/>
-          <a:lstStyle/>
-          <a:p>
-            <a:pPr marL="177800" indent="-177800">
-              <a:lnSpc>
-                <a:spcPct val="115000"/>
-              </a:lnSpc>
-              <a:spcAft>
-                <a:spcPts val="1000"/>
-              </a:spcAft>
-              <a:buSzPct val="100000"/>
-              <a:buChar char="●"/>
-            </a:pPr>
-            <a:r>
-              <a:rPr lang="en-US" sz="1300" dirty="0">
-                <a:solidFill>
-                  <a:srgbClr val="CADCFC"/>
-                </a:solidFill>
-                <a:latin typeface="Calibri" pitchFamily="34" charset="0"/>
-                <a:ea typeface="Calibri" pitchFamily="34" charset="-122"/>
-                <a:cs typeface="Calibri" pitchFamily="34" charset="-120"/>
-              </a:rPr>
-              <a:t>Frictionless flight search &amp; discovery</a:t>
-            </a:r>
-            <a:endParaRPr lang="en-US" sz="1300" dirty="0"/>
-          </a:p>
-          <a:p>
-            <a:pPr marL="177800" indent="-177800">
-              <a:lnSpc>
-                <a:spcPct val="115000"/>
-              </a:lnSpc>
-              <a:spcAft>
-                <a:spcPts val="1000"/>
-              </a:spcAft>
-              <a:buSzPct val="100000"/>
-              <a:buChar char="●"/>
-            </a:pPr>
-            <a:r>
-              <a:rPr lang="en-US" sz="1300" dirty="0">
-                <a:solidFill>
-                  <a:srgbClr val="CADCFC"/>
-                </a:solidFill>
-                <a:latin typeface="Calibri" pitchFamily="34" charset="0"/>
-                <a:ea typeface="Calibri" pitchFamily="34" charset="-122"/>
-                <a:cs typeface="Calibri" pitchFamily="34" charset="-120"/>
-              </a:rPr>
-              <a:t>Seat selection across cabin classes</a:t>
-            </a:r>
-            <a:endParaRPr lang="en-US" sz="1300" dirty="0"/>
-          </a:p>
-          <a:p>
-            <a:pPr marL="177800" indent="-177800">
-              <a:lnSpc>
-                <a:spcPct val="115000"/>
-              </a:lnSpc>
-              <a:spcAft>
-                <a:spcPts val="1000"/>
-              </a:spcAft>
-              <a:buSzPct val="100000"/>
-              <a:buChar char="●"/>
-            </a:pPr>
-            <a:r>
-              <a:rPr lang="en-US" sz="1300" dirty="0">
-                <a:solidFill>
-                  <a:srgbClr val="CADCFC"/>
-                </a:solidFill>
-                <a:latin typeface="Calibri" pitchFamily="34" charset="0"/>
-                <a:ea typeface="Calibri" pitchFamily="34" charset="-122"/>
-                <a:cs typeface="Calibri" pitchFamily="34" charset="-120"/>
-              </a:rPr>
-              <a:t>Instant booking with automated PNR</a:t>
-            </a:r>
-            <a:endParaRPr lang="en-US" sz="1300" dirty="0"/>
-          </a:p>
-          <a:p>
-            <a:pPr marL="177800" indent="-177800">
-              <a:lnSpc>
-                <a:spcPct val="115000"/>
-              </a:lnSpc>
-              <a:spcAft>
-                <a:spcPts val="1000"/>
-              </a:spcAft>
-              <a:buSzPct val="100000"/>
-              <a:buChar char="●"/>
-            </a:pPr>
-            <a:r>
-              <a:rPr lang="en-US" sz="1300" dirty="0">
-                <a:solidFill>
-                  <a:srgbClr val="CADCFC"/>
-                </a:solidFill>
-                <a:latin typeface="Calibri" pitchFamily="34" charset="0"/>
-                <a:ea typeface="Calibri" pitchFamily="34" charset="-122"/>
-                <a:cs typeface="Calibri" pitchFamily="34" charset="-120"/>
-              </a:rPr>
-              <a:t>Razorpay payment processing</a:t>
-            </a:r>
-            <a:endParaRPr lang="en-US" sz="1300" dirty="0"/>
-          </a:p>
-          <a:p>
-            <a:pPr marL="177800" indent="-177800">
-              <a:lnSpc>
-                <a:spcPct val="115000"/>
-              </a:lnSpc>
-              <a:spcAft>
-                <a:spcPts val="1000"/>
-              </a:spcAft>
-              <a:buSzPct val="100000"/>
-              <a:buChar char="●"/>
-            </a:pPr>
-            <a:r>
-              <a:rPr lang="en-US" sz="1300" dirty="0">
-                <a:solidFill>
-                  <a:srgbClr val="CADCFC"/>
-                </a:solidFill>
-                <a:latin typeface="Calibri" pitchFamily="34" charset="0"/>
-                <a:ea typeface="Calibri" pitchFamily="34" charset="-122"/>
-                <a:cs typeface="Calibri" pitchFamily="34" charset="-120"/>
-              </a:rPr>
-              <a:t>Digital check-in with QR boarding passes</a:t>
-            </a:r>
-            <a:endParaRPr lang="en-US" sz="1300" dirty="0"/>
-          </a:p>
-          <a:p>
-            <a:pPr marL="177800" indent="-177800">
-              <a:lnSpc>
-                <a:spcPct val="115000"/>
-              </a:lnSpc>
-              <a:spcAft>
-                <a:spcPts val="1000"/>
-              </a:spcAft>
-              <a:buSzPct val="100000"/>
-              <a:buChar char="●"/>
-            </a:pPr>
-            <a:r>
-              <a:rPr lang="en-US" sz="1300" dirty="0">
-                <a:solidFill>
-                  <a:srgbClr val="CADCFC"/>
-                </a:solidFill>
-                <a:latin typeface="Calibri" pitchFamily="34" charset="0"/>
-                <a:ea typeface="Calibri" pitchFamily="34" charset="-122"/>
-                <a:cs typeface="Calibri" pitchFamily="34" charset="-120"/>
-              </a:rPr>
-              <a:t>Self-service companion passenger profiles</a:t>
-            </a:r>
-            <a:endParaRPr lang="en-US" sz="1300" dirty="0"/>
-          </a:p>
-        </p:txBody>
-      </p:sp>
-      <p:sp>
-        <p:nvSpPr>
-          <p:cNvPr id="17" name="Shape 7">
-            <a:extLst>
-              <a:ext uri="{FF2B5EF4-FFF2-40B4-BE49-F238E27FC236}">
-                <a16:creationId xmlns:a16="http://schemas.microsoft.com/office/drawing/2014/main" id="{9193D177-4310-F28C-7DCD-7E9C3D324F38}"/>
-              </a:ext>
-            </a:extLst>
-          </p:cNvPr>
-          <p:cNvSpPr/>
-          <p:nvPr/>
-        </p:nvSpPr>
-        <p:spPr>
-          <a:xfrm>
-            <a:off x="6126480" y="1874520"/>
-            <a:ext cx="5212080" cy="4206240"/>
-          </a:xfrm>
-          <a:prstGeom prst="roundRect">
-            <a:avLst>
-              <a:gd name="adj" fmla="val 2174"/>
-            </a:avLst>
-          </a:prstGeom>
-          <a:solidFill>
-            <a:srgbClr val="EEF3FC"/>
-          </a:solidFill>
-          <a:ln/>
-        </p:spPr>
-      </p:sp>
-      <p:sp>
-        <p:nvSpPr>
-          <p:cNvPr id="21" name="Text 9">
-            <a:extLst>
-              <a:ext uri="{FF2B5EF4-FFF2-40B4-BE49-F238E27FC236}">
-                <a16:creationId xmlns:a16="http://schemas.microsoft.com/office/drawing/2014/main" id="{926DD7B1-8DB8-5786-53CE-2A944243D5A9}"/>
-              </a:ext>
-            </a:extLst>
-          </p:cNvPr>
-          <p:cNvSpPr/>
-          <p:nvPr/>
-        </p:nvSpPr>
-        <p:spPr>
-          <a:xfrm>
-            <a:off x="6446520" y="2194560"/>
-            <a:ext cx="566928" cy="566928"/>
-          </a:xfrm>
-          <a:prstGeom prst="rect">
-            <a:avLst/>
-          </a:prstGeom>
-          <a:noFill/>
-          <a:ln/>
-        </p:spPr>
-        <p:txBody>
-          <a:bodyPr wrap="square" rtlCol="0" anchor="ctr"/>
-          <a:lstStyle/>
-          <a:p>
-            <a:pPr marL="0" indent="0" algn="ctr">
-              <a:buNone/>
-            </a:pPr>
-            <a:endParaRPr lang="en-US" sz="2200" dirty="0"/>
-          </a:p>
-        </p:txBody>
-      </p:sp>
-      <p:sp>
-        <p:nvSpPr>
-          <p:cNvPr id="23" name="Text 10">
-            <a:extLst>
-              <a:ext uri="{FF2B5EF4-FFF2-40B4-BE49-F238E27FC236}">
-                <a16:creationId xmlns:a16="http://schemas.microsoft.com/office/drawing/2014/main" id="{E5D41643-4B41-20B3-D088-774D4A7EC7BB}"/>
-              </a:ext>
-            </a:extLst>
-          </p:cNvPr>
-          <p:cNvSpPr/>
-          <p:nvPr/>
-        </p:nvSpPr>
-        <p:spPr>
-          <a:xfrm>
-            <a:off x="7178040" y="2167128"/>
-            <a:ext cx="4114800" cy="594360"/>
-          </a:xfrm>
-          <a:prstGeom prst="rect">
-            <a:avLst/>
-          </a:prstGeom>
-          <a:noFill/>
-          <a:ln/>
-        </p:spPr>
-        <p:txBody>
-          <a:bodyPr wrap="square" rtlCol="0" anchor="ctr"/>
-          <a:lstStyle/>
-          <a:p>
-            <a:pPr marL="0" indent="0">
-              <a:buNone/>
-            </a:pPr>
-            <a:r>
-              <a:rPr lang="en-US" sz="1600" b="1" dirty="0">
-                <a:solidFill>
-                  <a:srgbClr val="0B1F3A"/>
-                </a:solidFill>
-                <a:latin typeface="Calibri" pitchFamily="34" charset="0"/>
-                <a:ea typeface="Calibri" pitchFamily="34" charset="-122"/>
-                <a:cs typeface="Calibri" pitchFamily="34" charset="-120"/>
-              </a:rPr>
-              <a:t>Backoffice Staff &amp; Executives</a:t>
-            </a:r>
-            <a:endParaRPr lang="en-US" sz="1600" dirty="0"/>
-          </a:p>
-        </p:txBody>
-      </p:sp>
-      <p:sp>
-        <p:nvSpPr>
-          <p:cNvPr id="25" name="Text 11">
-            <a:extLst>
-              <a:ext uri="{FF2B5EF4-FFF2-40B4-BE49-F238E27FC236}">
-                <a16:creationId xmlns:a16="http://schemas.microsoft.com/office/drawing/2014/main" id="{DA322D84-BF96-7FD3-ABAB-643E7E33D960}"/>
-              </a:ext>
-            </a:extLst>
-          </p:cNvPr>
-          <p:cNvSpPr/>
-          <p:nvPr/>
-        </p:nvSpPr>
-        <p:spPr>
-          <a:xfrm>
-            <a:off x="6446520" y="2926080"/>
-            <a:ext cx="4572000" cy="2926080"/>
-          </a:xfrm>
-          <a:prstGeom prst="rect">
-            <a:avLst/>
-          </a:prstGeom>
-          <a:noFill/>
-          <a:ln/>
-        </p:spPr>
-        <p:txBody>
-          <a:bodyPr wrap="square" rtlCol="0" anchor="ctr"/>
-          <a:lstStyle/>
-          <a:p>
-            <a:pPr marL="177800" indent="-177800">
-              <a:lnSpc>
-                <a:spcPct val="115000"/>
-              </a:lnSpc>
-              <a:spcAft>
-                <a:spcPts val="1000"/>
-              </a:spcAft>
-              <a:buSzPct val="100000"/>
-              <a:buChar char="●"/>
-            </a:pPr>
-            <a:r>
-              <a:rPr lang="en-US" sz="1300" dirty="0">
-                <a:solidFill>
-                  <a:srgbClr val="1A2233"/>
-                </a:solidFill>
-                <a:latin typeface="Calibri" pitchFamily="34" charset="0"/>
-                <a:ea typeface="Calibri" pitchFamily="34" charset="-122"/>
-                <a:cs typeface="Calibri" pitchFamily="34" charset="-120"/>
-              </a:rPr>
-              <a:t>Granular RBAC administration</a:t>
-            </a:r>
-            <a:endParaRPr lang="en-US" sz="1300" dirty="0"/>
-          </a:p>
-          <a:p>
-            <a:pPr marL="177800" indent="-177800">
-              <a:lnSpc>
-                <a:spcPct val="115000"/>
-              </a:lnSpc>
-              <a:spcAft>
-                <a:spcPts val="1000"/>
-              </a:spcAft>
-              <a:buSzPct val="100000"/>
-              <a:buChar char="●"/>
-            </a:pPr>
-            <a:r>
-              <a:rPr lang="en-US" sz="1300" dirty="0">
-                <a:solidFill>
-                  <a:srgbClr val="1A2233"/>
-                </a:solidFill>
-                <a:latin typeface="Calibri" pitchFamily="34" charset="0"/>
-                <a:ea typeface="Calibri" pitchFamily="34" charset="-122"/>
-                <a:cs typeface="Calibri" pitchFamily="34" charset="-120"/>
-              </a:rPr>
-              <a:t>SuperAdmins, HR, Financial Admins</a:t>
-            </a:r>
-            <a:endParaRPr lang="en-US" sz="1300" dirty="0"/>
-          </a:p>
-          <a:p>
-            <a:pPr marL="177800" indent="-177800">
-              <a:lnSpc>
-                <a:spcPct val="115000"/>
-              </a:lnSpc>
-              <a:spcAft>
-                <a:spcPts val="1000"/>
-              </a:spcAft>
-              <a:buSzPct val="100000"/>
-              <a:buChar char="●"/>
-            </a:pPr>
-            <a:r>
-              <a:rPr lang="en-US" sz="1300" dirty="0">
-                <a:solidFill>
-                  <a:srgbClr val="1A2233"/>
-                </a:solidFill>
-                <a:latin typeface="Calibri" pitchFamily="34" charset="0"/>
-                <a:ea typeface="Calibri" pitchFamily="34" charset="-122"/>
-                <a:cs typeface="Calibri" pitchFamily="34" charset="-120"/>
-              </a:rPr>
-              <a:t>Ground Staff &amp; Station Managers</a:t>
-            </a:r>
-            <a:endParaRPr lang="en-US" sz="1300" dirty="0"/>
-          </a:p>
-          <a:p>
-            <a:pPr marL="177800" indent="-177800">
-              <a:lnSpc>
-                <a:spcPct val="115000"/>
-              </a:lnSpc>
-              <a:spcAft>
-                <a:spcPts val="1000"/>
-              </a:spcAft>
-              <a:buSzPct val="100000"/>
-              <a:buChar char="●"/>
-            </a:pPr>
-            <a:r>
-              <a:rPr lang="en-US" sz="1300" dirty="0">
-                <a:solidFill>
-                  <a:srgbClr val="1A2233"/>
-                </a:solidFill>
-                <a:latin typeface="Calibri" pitchFamily="34" charset="0"/>
-                <a:ea typeface="Calibri" pitchFamily="34" charset="-122"/>
-                <a:cs typeface="Calibri" pitchFamily="34" charset="-120"/>
-              </a:rPr>
-              <a:t>Real-time flight scheduling</a:t>
-            </a:r>
-            <a:endParaRPr lang="en-US" sz="1300" dirty="0"/>
-          </a:p>
-          <a:p>
-            <a:pPr marL="177800" indent="-177800">
-              <a:lnSpc>
-                <a:spcPct val="115000"/>
-              </a:lnSpc>
-              <a:spcAft>
-                <a:spcPts val="1000"/>
-              </a:spcAft>
-              <a:buSzPct val="100000"/>
-              <a:buChar char="●"/>
-            </a:pPr>
-            <a:r>
-              <a:rPr lang="en-US" sz="1300" dirty="0">
-                <a:solidFill>
-                  <a:srgbClr val="1A2233"/>
-                </a:solidFill>
-                <a:latin typeface="Calibri" pitchFamily="34" charset="0"/>
-                <a:ea typeface="Calibri" pitchFamily="34" charset="-122"/>
-                <a:cs typeface="Calibri" pitchFamily="34" charset="-120"/>
-              </a:rPr>
-              <a:t>Seat inventory &amp; manifest tracking</a:t>
-            </a:r>
-            <a:endParaRPr lang="en-US" sz="1300" dirty="0"/>
-          </a:p>
-          <a:p>
-            <a:pPr marL="177800" indent="-177800">
-              <a:lnSpc>
-                <a:spcPct val="115000"/>
-              </a:lnSpc>
-              <a:spcAft>
-                <a:spcPts val="1000"/>
-              </a:spcAft>
-              <a:buSzPct val="100000"/>
-              <a:buChar char="●"/>
-            </a:pPr>
-            <a:r>
-              <a:rPr lang="en-US" sz="1300" dirty="0">
-                <a:solidFill>
-                  <a:srgbClr val="1A2233"/>
-                </a:solidFill>
-                <a:latin typeface="Calibri" pitchFamily="34" charset="0"/>
-                <a:ea typeface="Calibri" pitchFamily="34" charset="-122"/>
-                <a:cs typeface="Calibri" pitchFamily="34" charset="-120"/>
-              </a:rPr>
-              <a:t>Financial reporting &amp; audit trails</a:t>
-            </a:r>
-            <a:endParaRPr lang="en-US" sz="1300" dirty="0"/>
+        </p:spPr>
+        <p:txBody>
+          <a:bodyPr wrap="square">
+            <a:spAutoFit/>
+          </a:bodyPr>
+          <a:lstStyle/>
+          <a:p>
+            <a:pPr indent="0" algn="ctr">
+              <a:buNone/>
+            </a:pPr>
+            <a:r>
+              <a:rPr lang="en-IN" sz="3200" b="1" i="0" dirty="0">
+                <a:solidFill>
+                  <a:srgbClr val="1F2328"/>
+                </a:solidFill>
+                <a:effectLst/>
+                <a:latin typeface="-apple-system"/>
+              </a:rPr>
+              <a:t>The Business Problem</a:t>
+            </a:r>
+          </a:p>
+          <a:p>
+            <a:pPr indent="0" algn="ctr">
+              <a:buNone/>
+            </a:pPr>
+            <a:endParaRPr lang="en-IN" sz="3200" b="1" i="0" dirty="0">
+              <a:solidFill>
+                <a:srgbClr val="1F2328"/>
+              </a:solidFill>
+              <a:effectLst/>
+              <a:latin typeface="-apple-system"/>
+            </a:endParaRPr>
+          </a:p>
+          <a:p>
+            <a:pPr indent="0" algn="l">
+              <a:buNone/>
+            </a:pPr>
+            <a:r>
+              <a:rPr lang="en-IN" sz="2000" b="0" i="0" dirty="0">
+                <a:solidFill>
+                  <a:srgbClr val="1F2328"/>
+                </a:solidFill>
+                <a:effectLst/>
+                <a:latin typeface="-apple-system"/>
+              </a:rPr>
+              <a:t>Traditional airline reservation and operations systems often suffer from monolithic architectures with high coupling, leading to:</a:t>
+            </a:r>
+          </a:p>
+          <a:p>
+            <a:pPr indent="0" algn="l">
+              <a:buNone/>
+            </a:pPr>
+            <a:endParaRPr lang="en-IN" sz="2000" b="0" i="0" dirty="0">
+              <a:solidFill>
+                <a:srgbClr val="1F2328"/>
+              </a:solidFill>
+              <a:effectLst/>
+              <a:latin typeface="-apple-system"/>
+            </a:endParaRPr>
+          </a:p>
+          <a:p>
+            <a:pPr marL="342900" lvl="0" indent="-342900" algn="l">
+              <a:buFont typeface="Arial" panose="020B0604020202020204" pitchFamily="34" charset="0"/>
+              <a:buChar char="•"/>
+            </a:pPr>
+            <a:r>
+              <a:rPr lang="en-IN" sz="2000" b="0" i="0" dirty="0">
+                <a:solidFill>
+                  <a:srgbClr val="1F2328"/>
+                </a:solidFill>
+                <a:effectLst/>
+                <a:latin typeface="-apple-system"/>
+              </a:rPr>
+              <a:t>Frequent operational bottlenecks between passenger ticketing, ground operations, and </a:t>
+            </a:r>
+            <a:r>
+              <a:rPr lang="en-IN" sz="2000" b="0" i="0" dirty="0" err="1">
+                <a:solidFill>
+                  <a:srgbClr val="1F2328"/>
+                </a:solidFill>
+                <a:effectLst/>
+                <a:latin typeface="-apple-system"/>
+              </a:rPr>
+              <a:t>backoffice</a:t>
+            </a:r>
+            <a:r>
+              <a:rPr lang="en-IN" sz="2000" b="0" i="0" dirty="0">
+                <a:solidFill>
+                  <a:srgbClr val="1F2328"/>
+                </a:solidFill>
+                <a:effectLst/>
+                <a:latin typeface="-apple-system"/>
+              </a:rPr>
+              <a:t> administration.</a:t>
+            </a:r>
+          </a:p>
+          <a:p>
+            <a:pPr marL="342900" lvl="0" indent="-342900" algn="l">
+              <a:buFont typeface="Arial" panose="020B0604020202020204" pitchFamily="34" charset="0"/>
+              <a:buChar char="•"/>
+            </a:pPr>
+            <a:endParaRPr lang="en-IN" sz="2000" b="0" i="0" dirty="0">
+              <a:solidFill>
+                <a:srgbClr val="1F2328"/>
+              </a:solidFill>
+              <a:effectLst/>
+              <a:latin typeface="-apple-system"/>
+            </a:endParaRPr>
+          </a:p>
+          <a:p>
+            <a:pPr marL="342900" lvl="0" indent="-342900" algn="l">
+              <a:buFont typeface="Arial" panose="020B0604020202020204" pitchFamily="34" charset="0"/>
+              <a:buChar char="•"/>
+            </a:pPr>
+            <a:r>
+              <a:rPr lang="en-IN" sz="2000" b="0" i="0" dirty="0">
+                <a:solidFill>
+                  <a:srgbClr val="1F2328"/>
+                </a:solidFill>
+                <a:effectLst/>
+                <a:latin typeface="-apple-system"/>
+              </a:rPr>
+              <a:t>Single points of failure where a failure in payments or reporting crashes the booking system.</a:t>
+            </a:r>
+          </a:p>
+          <a:p>
+            <a:pPr marL="342900" lvl="0" indent="-342900" algn="l">
+              <a:buFont typeface="Arial" panose="020B0604020202020204" pitchFamily="34" charset="0"/>
+              <a:buChar char="•"/>
+            </a:pPr>
+            <a:endParaRPr lang="en-IN" sz="2000" b="0" i="0" dirty="0">
+              <a:solidFill>
+                <a:srgbClr val="1F2328"/>
+              </a:solidFill>
+              <a:effectLst/>
+              <a:latin typeface="-apple-system"/>
+            </a:endParaRPr>
+          </a:p>
+          <a:p>
+            <a:pPr marL="342900" lvl="0" indent="-342900" algn="l">
+              <a:buFont typeface="Arial" panose="020B0604020202020204" pitchFamily="34" charset="0"/>
+              <a:buChar char="•"/>
+            </a:pPr>
+            <a:r>
+              <a:rPr lang="en-IN" sz="2000" b="0" i="0" dirty="0">
+                <a:solidFill>
+                  <a:srgbClr val="1F2328"/>
+                </a:solidFill>
+                <a:effectLst/>
+                <a:latin typeface="-apple-system"/>
+              </a:rPr>
+              <a:t>High latency during flash sales or heavy passenger check-in traffic.</a:t>
+            </a:r>
+          </a:p>
+          <a:p>
+            <a:pPr marL="342900" lvl="0" indent="-342900" algn="l">
+              <a:buFont typeface="Arial" panose="020B0604020202020204" pitchFamily="34" charset="0"/>
+              <a:buChar char="•"/>
+            </a:pPr>
+            <a:endParaRPr lang="en-IN" sz="2000" b="0" i="0" dirty="0">
+              <a:solidFill>
+                <a:srgbClr val="1F2328"/>
+              </a:solidFill>
+              <a:effectLst/>
+              <a:latin typeface="-apple-system"/>
+            </a:endParaRPr>
+          </a:p>
+          <a:p>
+            <a:pPr marL="342900" lvl="0" indent="-342900" algn="l">
+              <a:buFont typeface="Arial" panose="020B0604020202020204" pitchFamily="34" charset="0"/>
+              <a:buChar char="•"/>
+            </a:pPr>
+            <a:r>
+              <a:rPr lang="en-IN" sz="2000" b="0" i="0" dirty="0">
+                <a:solidFill>
+                  <a:srgbClr val="1F2328"/>
+                </a:solidFill>
+                <a:effectLst/>
+                <a:latin typeface="-apple-system"/>
+              </a:rPr>
+              <a:t>Complex user management where internal airline staff (crew, ground handlers, HR, financial analysts, ticket dealers) lack isolated, role-specific portals and security boundaries.</a:t>
+            </a:r>
           </a:p>
         </p:txBody>
       </p:sp>
     </p:spTree>
     <p:extLst>
       <p:ext uri="{BB962C8B-B14F-4D97-AF65-F5344CB8AC3E}">
-        <p14:creationId xmlns:p14="http://schemas.microsoft.com/office/powerpoint/2010/main" val="728045634"/>
+        <p14:creationId xmlns:p14="http://schemas.microsoft.com/office/powerpoint/2010/main" val="1530762742"/>
       </p:ext>
     </p:extLst>
   </p:cSld>
@@ -4072,17 +3676,17 @@
           <p:cNvPr id="3" name="Text 0">
             <a:extLst>
               <a:ext uri="{FF2B5EF4-FFF2-40B4-BE49-F238E27FC236}">
-                <a16:creationId xmlns:a16="http://schemas.microsoft.com/office/drawing/2014/main" id="{3669C8F6-9F07-07C7-EC67-73301653A2BD}"/>
-              </a:ext>
-            </a:extLst>
-          </p:cNvPr>
-          <p:cNvSpPr/>
-          <p:nvPr/>
-        </p:nvSpPr>
-        <p:spPr>
-          <a:xfrm>
-            <a:off x="640080" y="411480"/>
-            <a:ext cx="9144000" cy="548640"/>
+                <a16:creationId xmlns:a16="http://schemas.microsoft.com/office/drawing/2014/main" id="{E85E3550-F367-1339-F290-FE229BC389CE}"/>
+              </a:ext>
+            </a:extLst>
+          </p:cNvPr>
+          <p:cNvSpPr/>
+          <p:nvPr/>
+        </p:nvSpPr>
+        <p:spPr>
+          <a:xfrm>
+            <a:off x="1059180" y="325845"/>
+            <a:ext cx="9144000" cy="640080"/>
           </a:xfrm>
           <a:prstGeom prst="rect">
             <a:avLst/>
@@ -4098,7 +3702,7 @@
               <a:buNone/>
             </a:pPr>
             <a:r>
-              <a:rPr lang="en-US" sz="3000" b="1" dirty="0">
+              <a:rPr lang="en-US" sz="3200" b="1" dirty="0">
                 <a:solidFill>
                   <a:srgbClr val="0B1F3A"/>
                 </a:solidFill>
@@ -4106,9 +3710,9 @@
                 <a:ea typeface="Cambria" pitchFamily="34" charset="-122"/>
                 <a:cs typeface="Cambria" pitchFamily="34" charset="-120"/>
               </a:rPr>
-              <a:t>Technology Stack</a:t>
-            </a:r>
-            <a:endParaRPr lang="en-US" sz="3000" dirty="0"/>
+              <a:t>The Business Solution</a:t>
+            </a:r>
+            <a:endParaRPr lang="en-US" sz="3200" dirty="0"/>
           </a:p>
         </p:txBody>
       </p:sp>
@@ -4117,17 +3721,17 @@
           <p:cNvPr id="5" name="Text 1">
             <a:extLst>
               <a:ext uri="{FF2B5EF4-FFF2-40B4-BE49-F238E27FC236}">
-                <a16:creationId xmlns:a16="http://schemas.microsoft.com/office/drawing/2014/main" id="{057C91A9-EC54-A020-E879-96258F7343AA}"/>
-              </a:ext>
-            </a:extLst>
-          </p:cNvPr>
-          <p:cNvSpPr/>
-          <p:nvPr/>
-        </p:nvSpPr>
-        <p:spPr>
-          <a:xfrm>
-            <a:off x="640080" y="960120"/>
-            <a:ext cx="10515600" cy="365760"/>
+                <a16:creationId xmlns:a16="http://schemas.microsoft.com/office/drawing/2014/main" id="{53C719B3-12F8-A9CA-647D-E52E136CF3F6}"/>
+              </a:ext>
+            </a:extLst>
+          </p:cNvPr>
+          <p:cNvSpPr/>
+          <p:nvPr/>
+        </p:nvSpPr>
+        <p:spPr>
+          <a:xfrm>
+            <a:off x="640080" y="1097280"/>
+            <a:ext cx="10515600" cy="457200"/>
           </a:xfrm>
           <a:prstGeom prst="rect">
             <a:avLst/>
@@ -4142,61 +3746,26 @@
             <a:pPr marL="0" indent="0">
               <a:buNone/>
             </a:pPr>
-            <a:endParaRPr lang="en-US" sz="1300" dirty="0"/>
-          </a:p>
-        </p:txBody>
-      </p:sp>
-      <p:sp>
-        <p:nvSpPr>
-          <p:cNvPr id="7" name="Shape 2">
-            <a:extLst>
-              <a:ext uri="{FF2B5EF4-FFF2-40B4-BE49-F238E27FC236}">
-                <a16:creationId xmlns:a16="http://schemas.microsoft.com/office/drawing/2014/main" id="{95AEF0F2-6834-EAC9-3351-EE485E2F3D40}"/>
-              </a:ext>
-            </a:extLst>
-          </p:cNvPr>
-          <p:cNvSpPr/>
-          <p:nvPr/>
-        </p:nvSpPr>
-        <p:spPr>
-          <a:xfrm>
-            <a:off x="662940" y="1508760"/>
-            <a:ext cx="2606040" cy="2148840"/>
-          </a:xfrm>
-          <a:prstGeom prst="roundRect">
-            <a:avLst>
-              <a:gd name="adj" fmla="val 3404"/>
-            </a:avLst>
-          </a:prstGeom>
-          <a:solidFill>
-            <a:srgbClr val="EEF3FC"/>
-          </a:solidFill>
-          <a:ln/>
-          <a:effectLst>
-            <a:outerShdw blurRad="63500" dist="25400" dir="5400000" algn="bl" rotWithShape="0">
-              <a:srgbClr val="9AAFD1">
-                <a:alpha val="30000"/>
-              </a:srgbClr>
-            </a:outerShdw>
-          </a:effectLst>
-        </p:spPr>
-      </p:sp>
-      <p:sp>
-        <p:nvSpPr>
-          <p:cNvPr id="9" name="Text 3">
-            <a:extLst>
-              <a:ext uri="{FF2B5EF4-FFF2-40B4-BE49-F238E27FC236}">
-                <a16:creationId xmlns:a16="http://schemas.microsoft.com/office/drawing/2014/main" id="{E5526D71-BA20-19F1-D98A-7C7696316E97}"/>
-              </a:ext>
-            </a:extLst>
-          </p:cNvPr>
-          <p:cNvSpPr/>
-          <p:nvPr/>
-        </p:nvSpPr>
-        <p:spPr>
-          <a:xfrm>
-            <a:off x="827532" y="1645920"/>
-            <a:ext cx="2276856" cy="457200"/>
+            <a:endParaRPr lang="en-US" sz="1400" dirty="0"/>
+          </a:p>
+        </p:txBody>
+      </p:sp>
+      <p:sp>
+        <p:nvSpPr>
+          <p:cNvPr id="13" name="Text 5">
+            <a:extLst>
+              <a:ext uri="{FF2B5EF4-FFF2-40B4-BE49-F238E27FC236}">
+                <a16:creationId xmlns:a16="http://schemas.microsoft.com/office/drawing/2014/main" id="{67463A36-712B-957E-0935-AB3AA8BC5C5E}"/>
+              </a:ext>
+            </a:extLst>
+          </p:cNvPr>
+          <p:cNvSpPr/>
+          <p:nvPr/>
+        </p:nvSpPr>
+        <p:spPr>
+          <a:xfrm>
+            <a:off x="1173480" y="2663667"/>
+            <a:ext cx="4114800" cy="594360"/>
           </a:xfrm>
           <a:prstGeom prst="rect">
             <a:avLst/>
@@ -4209,42 +3778,36 @@
           <a:lstStyle/>
           <a:p>
             <a:pPr marL="0" indent="0">
-              <a:lnSpc>
-                <a:spcPct val="105000"/>
-              </a:lnSpc>
-              <a:buNone/>
-            </a:pPr>
-            <a:r>
-              <a:rPr lang="en-US" sz="1250" b="1" dirty="0">
-                <a:solidFill>
-                  <a:srgbClr val="0B1F3A"/>
-                </a:solidFill>
+              <a:buNone/>
+            </a:pPr>
+            <a:r>
+              <a:rPr lang="en-US" sz="1600" b="1" dirty="0">
                 <a:latin typeface="Calibri" pitchFamily="34" charset="0"/>
                 <a:ea typeface="Calibri" pitchFamily="34" charset="-122"/>
                 <a:cs typeface="Calibri" pitchFamily="34" charset="-120"/>
               </a:rPr>
-              <a:t>Runtime &amp; Framework</a:t>
-            </a:r>
-            <a:endParaRPr lang="en-US" sz="1250" dirty="0"/>
-          </a:p>
-        </p:txBody>
-      </p:sp>
-      <p:sp>
-        <p:nvSpPr>
-          <p:cNvPr id="11" name="Text 4">
-            <a:extLst>
-              <a:ext uri="{FF2B5EF4-FFF2-40B4-BE49-F238E27FC236}">
-                <a16:creationId xmlns:a16="http://schemas.microsoft.com/office/drawing/2014/main" id="{FAD7BE82-A5DA-C330-57B2-872EFE8DA510}"/>
-              </a:ext>
-            </a:extLst>
-          </p:cNvPr>
-          <p:cNvSpPr/>
-          <p:nvPr/>
-        </p:nvSpPr>
-        <p:spPr>
-          <a:xfrm>
-            <a:off x="827532" y="2167128"/>
-            <a:ext cx="2276856" cy="1371600"/>
+              <a:t>Passengers &amp; Travel Agents</a:t>
+            </a:r>
+            <a:endParaRPr lang="en-US" sz="1600" dirty="0"/>
+          </a:p>
+        </p:txBody>
+      </p:sp>
+      <p:sp>
+        <p:nvSpPr>
+          <p:cNvPr id="15" name="Text 6">
+            <a:extLst>
+              <a:ext uri="{FF2B5EF4-FFF2-40B4-BE49-F238E27FC236}">
+                <a16:creationId xmlns:a16="http://schemas.microsoft.com/office/drawing/2014/main" id="{462B7A5C-8396-162F-FBA5-781EAAD39A82}"/>
+              </a:ext>
+            </a:extLst>
+          </p:cNvPr>
+          <p:cNvSpPr/>
+          <p:nvPr/>
+        </p:nvSpPr>
+        <p:spPr>
+          <a:xfrm>
+            <a:off x="960120" y="2926080"/>
+            <a:ext cx="4572000" cy="2926080"/>
           </a:xfrm>
           <a:prstGeom prst="rect">
             <a:avLst/>
@@ -4256,313 +3819,148 @@
           <a:bodyPr wrap="square" rtlCol="0" anchor="ctr"/>
           <a:lstStyle/>
           <a:p>
-            <a:pPr marL="127000" indent="-127000">
+            <a:pPr marL="177800" indent="-177800">
               <a:lnSpc>
                 <a:spcPct val="115000"/>
               </a:lnSpc>
               <a:spcAft>
-                <a:spcPts val="400"/>
+                <a:spcPts val="1000"/>
               </a:spcAft>
               <a:buSzPct val="100000"/>
               <a:buChar char="●"/>
             </a:pPr>
             <a:r>
-              <a:rPr lang="en-US" sz="1050" dirty="0">
-                <a:solidFill>
-                  <a:srgbClr val="1A2233"/>
-                </a:solidFill>
+              <a:rPr lang="en-US" sz="1300" dirty="0">
                 <a:latin typeface="Calibri" pitchFamily="34" charset="0"/>
                 <a:ea typeface="Calibri" pitchFamily="34" charset="-122"/>
                 <a:cs typeface="Calibri" pitchFamily="34" charset="-120"/>
               </a:rPr>
-              <a:t>.NET 10</a:t>
-            </a:r>
-            <a:endParaRPr lang="en-US" sz="1050" dirty="0"/>
-          </a:p>
-          <a:p>
-            <a:pPr marL="127000" indent="-127000">
+              <a:t>flight search</a:t>
+            </a:r>
+            <a:endParaRPr lang="en-US" sz="1300" dirty="0"/>
+          </a:p>
+          <a:p>
+            <a:pPr marL="177800" indent="-177800">
               <a:lnSpc>
                 <a:spcPct val="115000"/>
               </a:lnSpc>
               <a:spcAft>
-                <a:spcPts val="400"/>
+                <a:spcPts val="1000"/>
               </a:spcAft>
               <a:buSzPct val="100000"/>
               <a:buChar char="●"/>
             </a:pPr>
             <a:r>
-              <a:rPr lang="en-US" sz="1050" dirty="0">
-                <a:solidFill>
-                  <a:srgbClr val="1A2233"/>
-                </a:solidFill>
+              <a:rPr lang="en-US" sz="1300" dirty="0">
                 <a:latin typeface="Calibri" pitchFamily="34" charset="0"/>
                 <a:ea typeface="Calibri" pitchFamily="34" charset="-122"/>
                 <a:cs typeface="Calibri" pitchFamily="34" charset="-120"/>
               </a:rPr>
-              <a:t>C# 13</a:t>
-            </a:r>
-            <a:endParaRPr lang="en-US" sz="1050" dirty="0"/>
-          </a:p>
-          <a:p>
-            <a:pPr marL="127000" indent="-127000">
+              <a:t>Seat selection </a:t>
+            </a:r>
+          </a:p>
+          <a:p>
+            <a:pPr marL="177800" indent="-177800">
               <a:lnSpc>
                 <a:spcPct val="115000"/>
               </a:lnSpc>
               <a:spcAft>
-                <a:spcPts val="400"/>
+                <a:spcPts val="1000"/>
               </a:spcAft>
               <a:buSzPct val="100000"/>
               <a:buChar char="●"/>
             </a:pPr>
             <a:r>
-              <a:rPr lang="en-US" sz="1050" dirty="0">
-                <a:solidFill>
-                  <a:srgbClr val="1A2233"/>
-                </a:solidFill>
+              <a:rPr lang="en-US" sz="1300" dirty="0">
                 <a:latin typeface="Calibri" pitchFamily="34" charset="0"/>
                 <a:ea typeface="Calibri" pitchFamily="34" charset="-122"/>
                 <a:cs typeface="Calibri" pitchFamily="34" charset="-120"/>
               </a:rPr>
-              <a:t>ASP.NET Core Web API</a:t>
-            </a:r>
-            <a:endParaRPr lang="en-US" sz="1050" dirty="0"/>
-          </a:p>
-        </p:txBody>
-      </p:sp>
-      <p:sp>
-        <p:nvSpPr>
-          <p:cNvPr id="13" name="Shape 5">
-            <a:extLst>
-              <a:ext uri="{FF2B5EF4-FFF2-40B4-BE49-F238E27FC236}">
-                <a16:creationId xmlns:a16="http://schemas.microsoft.com/office/drawing/2014/main" id="{76FD40D1-944C-AC97-60BE-9121083A7AD8}"/>
-              </a:ext>
-            </a:extLst>
-          </p:cNvPr>
-          <p:cNvSpPr/>
-          <p:nvPr/>
-        </p:nvSpPr>
-        <p:spPr>
-          <a:xfrm>
-            <a:off x="3415284" y="1508760"/>
-            <a:ext cx="2606040" cy="2148840"/>
-          </a:xfrm>
-          <a:prstGeom prst="roundRect">
-            <a:avLst>
-              <a:gd name="adj" fmla="val 3404"/>
-            </a:avLst>
-          </a:prstGeom>
-          <a:solidFill>
-            <a:srgbClr val="EEF3FC"/>
-          </a:solidFill>
-          <a:ln/>
-          <a:effectLst>
-            <a:outerShdw blurRad="63500" dist="25400" dir="5400000" algn="bl" rotWithShape="0">
-              <a:srgbClr val="9AAFD1">
-                <a:alpha val="30000"/>
-              </a:srgbClr>
-            </a:outerShdw>
-          </a:effectLst>
-        </p:spPr>
-      </p:sp>
-      <p:sp>
-        <p:nvSpPr>
-          <p:cNvPr id="15" name="Text 6">
-            <a:extLst>
-              <a:ext uri="{FF2B5EF4-FFF2-40B4-BE49-F238E27FC236}">
-                <a16:creationId xmlns:a16="http://schemas.microsoft.com/office/drawing/2014/main" id="{CF8C8EC0-FC34-602A-A0DD-F8C6AEBC380C}"/>
-              </a:ext>
-            </a:extLst>
-          </p:cNvPr>
-          <p:cNvSpPr/>
-          <p:nvPr/>
-        </p:nvSpPr>
-        <p:spPr>
-          <a:xfrm>
-            <a:off x="3579876" y="1645920"/>
-            <a:ext cx="2276856" cy="457200"/>
-          </a:xfrm>
-          <a:prstGeom prst="rect">
-            <a:avLst/>
-          </a:prstGeom>
-          <a:noFill/>
-          <a:ln/>
-        </p:spPr>
-        <p:txBody>
-          <a:bodyPr wrap="square" rtlCol="0" anchor="ctr"/>
-          <a:lstStyle/>
-          <a:p>
-            <a:pPr marL="0" indent="0">
-              <a:lnSpc>
-                <a:spcPct val="105000"/>
-              </a:lnSpc>
-              <a:buNone/>
-            </a:pPr>
-            <a:r>
-              <a:rPr lang="en-US" sz="1250" b="1" dirty="0">
-                <a:solidFill>
-                  <a:srgbClr val="0B1F3A"/>
-                </a:solidFill>
-                <a:latin typeface="Calibri" pitchFamily="34" charset="0"/>
-                <a:ea typeface="Calibri" pitchFamily="34" charset="-122"/>
-                <a:cs typeface="Calibri" pitchFamily="34" charset="-120"/>
-              </a:rPr>
-              <a:t>Databases &amp; ORM</a:t>
-            </a:r>
-            <a:endParaRPr lang="en-US" sz="1250" dirty="0"/>
-          </a:p>
-        </p:txBody>
-      </p:sp>
-      <p:sp>
-        <p:nvSpPr>
-          <p:cNvPr id="17" name="Text 7">
-            <a:extLst>
-              <a:ext uri="{FF2B5EF4-FFF2-40B4-BE49-F238E27FC236}">
-                <a16:creationId xmlns:a16="http://schemas.microsoft.com/office/drawing/2014/main" id="{92A38091-0791-DC57-AE70-DFEDEA6FA300}"/>
-              </a:ext>
-            </a:extLst>
-          </p:cNvPr>
-          <p:cNvSpPr/>
-          <p:nvPr/>
-        </p:nvSpPr>
-        <p:spPr>
-          <a:xfrm>
-            <a:off x="3579876" y="2167128"/>
-            <a:ext cx="2276856" cy="1371600"/>
-          </a:xfrm>
-          <a:prstGeom prst="rect">
-            <a:avLst/>
-          </a:prstGeom>
-          <a:noFill/>
-          <a:ln/>
-        </p:spPr>
-        <p:txBody>
-          <a:bodyPr wrap="square" rtlCol="0" anchor="ctr"/>
-          <a:lstStyle/>
-          <a:p>
-            <a:pPr marL="127000" indent="-127000">
+              <a:t>Instant booking with automated PNR</a:t>
+            </a:r>
+            <a:endParaRPr lang="en-US" sz="1300" dirty="0"/>
+          </a:p>
+          <a:p>
+            <a:pPr marL="177800" indent="-177800">
               <a:lnSpc>
                 <a:spcPct val="115000"/>
               </a:lnSpc>
               <a:spcAft>
-                <a:spcPts val="400"/>
+                <a:spcPts val="1000"/>
               </a:spcAft>
               <a:buSzPct val="100000"/>
               <a:buChar char="●"/>
             </a:pPr>
             <a:r>
-              <a:rPr lang="en-US" sz="1050" dirty="0">
-                <a:solidFill>
-                  <a:srgbClr val="1A2233"/>
-                </a:solidFill>
+              <a:rPr lang="en-US" sz="1300" dirty="0">
                 <a:latin typeface="Calibri" pitchFamily="34" charset="0"/>
                 <a:ea typeface="Calibri" pitchFamily="34" charset="-122"/>
                 <a:cs typeface="Calibri" pitchFamily="34" charset="-120"/>
               </a:rPr>
-              <a:t>Microsoft SQL Server</a:t>
-            </a:r>
-            <a:endParaRPr lang="en-US" sz="1050" dirty="0"/>
-          </a:p>
-          <a:p>
-            <a:pPr marL="127000" indent="-127000">
+              <a:t>Razorpay payment processing</a:t>
+            </a:r>
+            <a:endParaRPr lang="en-US" sz="1300" dirty="0"/>
+          </a:p>
+          <a:p>
+            <a:pPr marL="177800" indent="-177800">
               <a:lnSpc>
                 <a:spcPct val="115000"/>
               </a:lnSpc>
               <a:spcAft>
-                <a:spcPts val="400"/>
+                <a:spcPts val="1000"/>
               </a:spcAft>
               <a:buSzPct val="100000"/>
               <a:buChar char="●"/>
             </a:pPr>
             <a:r>
-              <a:rPr lang="en-US" sz="1050" dirty="0">
-                <a:solidFill>
-                  <a:srgbClr val="1A2233"/>
-                </a:solidFill>
+              <a:rPr lang="en-US" sz="1300" dirty="0">
                 <a:latin typeface="Calibri" pitchFamily="34" charset="0"/>
                 <a:ea typeface="Calibri" pitchFamily="34" charset="-122"/>
                 <a:cs typeface="Calibri" pitchFamily="34" charset="-120"/>
               </a:rPr>
-              <a:t>EF Core 10</a:t>
-            </a:r>
-            <a:endParaRPr lang="en-US" sz="1050" dirty="0"/>
-          </a:p>
-          <a:p>
-            <a:pPr marL="127000" indent="-127000">
+              <a:t>Digital check-in</a:t>
+            </a:r>
+            <a:endParaRPr lang="en-US" sz="1300" dirty="0"/>
+          </a:p>
+          <a:p>
+            <a:pPr marL="177800" indent="-177800">
               <a:lnSpc>
                 <a:spcPct val="115000"/>
               </a:lnSpc>
               <a:spcAft>
-                <a:spcPts val="400"/>
+                <a:spcPts val="1000"/>
               </a:spcAft>
               <a:buSzPct val="100000"/>
               <a:buChar char="●"/>
             </a:pPr>
             <a:r>
-              <a:rPr lang="en-US" sz="1050" dirty="0">
-                <a:solidFill>
-                  <a:srgbClr val="1A2233"/>
-                </a:solidFill>
+              <a:rPr lang="en-US" sz="1300" dirty="0">
                 <a:latin typeface="Calibri" pitchFamily="34" charset="0"/>
                 <a:ea typeface="Calibri" pitchFamily="34" charset="-122"/>
                 <a:cs typeface="Calibri" pitchFamily="34" charset="-120"/>
               </a:rPr>
-              <a:t>Code-First Migrations</a:t>
-            </a:r>
-            <a:endParaRPr lang="en-US" sz="1050" dirty="0"/>
-          </a:p>
-        </p:txBody>
-      </p:sp>
-      <p:sp>
-        <p:nvSpPr>
-          <p:cNvPr id="19" name="Shape 8">
-            <a:extLst>
-              <a:ext uri="{FF2B5EF4-FFF2-40B4-BE49-F238E27FC236}">
-                <a16:creationId xmlns:a16="http://schemas.microsoft.com/office/drawing/2014/main" id="{B421AA53-7723-ED17-8332-C6490A3927A8}"/>
-              </a:ext>
-            </a:extLst>
-          </p:cNvPr>
-          <p:cNvSpPr/>
-          <p:nvPr/>
-        </p:nvSpPr>
-        <p:spPr>
-          <a:xfrm>
-            <a:off x="6167628" y="1508760"/>
-            <a:ext cx="2606040" cy="2148840"/>
-          </a:xfrm>
-          <a:prstGeom prst="roundRect">
-            <a:avLst>
-              <a:gd name="adj" fmla="val 3404"/>
-            </a:avLst>
-          </a:prstGeom>
-          <a:solidFill>
-            <a:srgbClr val="EEF3FC"/>
-          </a:solidFill>
-          <a:ln/>
-          <a:effectLst>
-            <a:outerShdw blurRad="63500" dist="25400" dir="5400000" algn="bl" rotWithShape="0">
-              <a:srgbClr val="9AAFD1">
-                <a:alpha val="30000"/>
-              </a:srgbClr>
-            </a:outerShdw>
-          </a:effectLst>
-        </p:spPr>
+              <a:t>Self-service companion passenger profiles</a:t>
+            </a:r>
+            <a:endParaRPr lang="en-US" sz="1300" dirty="0"/>
+          </a:p>
+        </p:txBody>
       </p:sp>
       <p:sp>
         <p:nvSpPr>
           <p:cNvPr id="21" name="Text 9">
             <a:extLst>
               <a:ext uri="{FF2B5EF4-FFF2-40B4-BE49-F238E27FC236}">
-                <a16:creationId xmlns:a16="http://schemas.microsoft.com/office/drawing/2014/main" id="{D388C8C6-3373-906E-049E-D5A90B42735E}"/>
-              </a:ext>
-            </a:extLst>
-          </p:cNvPr>
-          <p:cNvSpPr/>
-          <p:nvPr/>
-        </p:nvSpPr>
-        <p:spPr>
-          <a:xfrm>
-            <a:off x="6332220" y="1645920"/>
-            <a:ext cx="2276856" cy="457200"/>
+                <a16:creationId xmlns:a16="http://schemas.microsoft.com/office/drawing/2014/main" id="{926DD7B1-8DB8-5786-53CE-2A944243D5A9}"/>
+              </a:ext>
+            </a:extLst>
+          </p:cNvPr>
+          <p:cNvSpPr/>
+          <p:nvPr/>
+        </p:nvSpPr>
+        <p:spPr>
+          <a:xfrm>
+            <a:off x="6446520" y="2194560"/>
+            <a:ext cx="566928" cy="566928"/>
           </a:xfrm>
           <a:prstGeom prst="rect">
             <a:avLst/>
@@ -4574,14 +3972,45 @@
           <a:bodyPr wrap="square" rtlCol="0" anchor="ctr"/>
           <a:lstStyle/>
           <a:p>
+            <a:pPr marL="0" indent="0" algn="ctr">
+              <a:buNone/>
+            </a:pPr>
+            <a:endParaRPr lang="en-US" sz="2200" dirty="0"/>
+          </a:p>
+        </p:txBody>
+      </p:sp>
+      <p:sp>
+        <p:nvSpPr>
+          <p:cNvPr id="23" name="Text 10">
+            <a:extLst>
+              <a:ext uri="{FF2B5EF4-FFF2-40B4-BE49-F238E27FC236}">
+                <a16:creationId xmlns:a16="http://schemas.microsoft.com/office/drawing/2014/main" id="{E5D41643-4B41-20B3-D088-774D4A7EC7BB}"/>
+              </a:ext>
+            </a:extLst>
+          </p:cNvPr>
+          <p:cNvSpPr/>
+          <p:nvPr/>
+        </p:nvSpPr>
+        <p:spPr>
+          <a:xfrm>
+            <a:off x="6377940" y="2667477"/>
+            <a:ext cx="4114800" cy="594360"/>
+          </a:xfrm>
+          <a:prstGeom prst="rect">
+            <a:avLst/>
+          </a:prstGeom>
+          <a:noFill/>
+          <a:ln/>
+        </p:spPr>
+        <p:txBody>
+          <a:bodyPr wrap="square" rtlCol="0" anchor="ctr"/>
+          <a:lstStyle/>
+          <a:p>
             <a:pPr marL="0" indent="0">
-              <a:lnSpc>
-                <a:spcPct val="105000"/>
-              </a:lnSpc>
-              <a:buNone/>
-            </a:pPr>
-            <a:r>
-              <a:rPr lang="en-US" sz="1250" b="1" dirty="0">
+              <a:buNone/>
+            </a:pPr>
+            <a:r>
+              <a:rPr lang="en-US" sz="1600" b="1" dirty="0">
                 <a:solidFill>
                   <a:srgbClr val="0B1F3A"/>
                 </a:solidFill>
@@ -4589,28 +4018,28 @@
                 <a:ea typeface="Calibri" pitchFamily="34" charset="-122"/>
                 <a:cs typeface="Calibri" pitchFamily="34" charset="-120"/>
               </a:rPr>
-              <a:t>Gateway &amp; Routing</a:t>
-            </a:r>
-            <a:endParaRPr lang="en-US" sz="1250" dirty="0"/>
-          </a:p>
-        </p:txBody>
-      </p:sp>
-      <p:sp>
-        <p:nvSpPr>
-          <p:cNvPr id="23" name="Text 10">
-            <a:extLst>
-              <a:ext uri="{FF2B5EF4-FFF2-40B4-BE49-F238E27FC236}">
-                <a16:creationId xmlns:a16="http://schemas.microsoft.com/office/drawing/2014/main" id="{D78388F5-0B00-A23E-55D8-A99673B68F26}"/>
-              </a:ext>
-            </a:extLst>
-          </p:cNvPr>
-          <p:cNvSpPr/>
-          <p:nvPr/>
-        </p:nvSpPr>
-        <p:spPr>
-          <a:xfrm>
-            <a:off x="6332220" y="2167128"/>
-            <a:ext cx="2276856" cy="1371600"/>
+              <a:t>Backoffice Staff &amp; Executives</a:t>
+            </a:r>
+            <a:endParaRPr lang="en-US" sz="1600" dirty="0"/>
+          </a:p>
+        </p:txBody>
+      </p:sp>
+      <p:sp>
+        <p:nvSpPr>
+          <p:cNvPr id="25" name="Text 11">
+            <a:extLst>
+              <a:ext uri="{FF2B5EF4-FFF2-40B4-BE49-F238E27FC236}">
+                <a16:creationId xmlns:a16="http://schemas.microsoft.com/office/drawing/2014/main" id="{DA322D84-BF96-7FD3-ABAB-643E7E33D960}"/>
+              </a:ext>
+            </a:extLst>
+          </p:cNvPr>
+          <p:cNvSpPr/>
+          <p:nvPr/>
+        </p:nvSpPr>
+        <p:spPr>
+          <a:xfrm>
+            <a:off x="6446520" y="2926080"/>
+            <a:ext cx="4572000" cy="2926080"/>
           </a:xfrm>
           <a:prstGeom prst="rect">
             <a:avLst/>
@@ -4622,18 +4051,18 @@
           <a:bodyPr wrap="square" rtlCol="0" anchor="ctr"/>
           <a:lstStyle/>
           <a:p>
-            <a:pPr marL="127000" indent="-127000">
+            <a:pPr marL="177800" indent="-177800">
               <a:lnSpc>
                 <a:spcPct val="115000"/>
               </a:lnSpc>
               <a:spcAft>
-                <a:spcPts val="400"/>
+                <a:spcPts val="1000"/>
               </a:spcAft>
               <a:buSzPct val="100000"/>
               <a:buChar char="●"/>
             </a:pPr>
             <a:r>
-              <a:rPr lang="en-US" sz="1050" dirty="0">
+              <a:rPr lang="en-US" sz="1300" dirty="0">
                 <a:solidFill>
                   <a:srgbClr val="1A2233"/>
                 </a:solidFill>
@@ -4641,23 +4070,23 @@
                 <a:ea typeface="Calibri" pitchFamily="34" charset="-122"/>
                 <a:cs typeface="Calibri" pitchFamily="34" charset="-120"/>
               </a:rPr>
-              <a:t>Ocelot Reverse Proxy</a:t>
-            </a:r>
-            <a:endParaRPr lang="en-US" sz="1050" dirty="0"/>
-          </a:p>
-          <a:p>
-            <a:pPr marL="127000" indent="-127000">
+              <a:t>Granular RBAC administration</a:t>
+            </a:r>
+            <a:endParaRPr lang="en-US" sz="1300" dirty="0"/>
+          </a:p>
+          <a:p>
+            <a:pPr marL="177800" indent="-177800">
               <a:lnSpc>
                 <a:spcPct val="115000"/>
               </a:lnSpc>
               <a:spcAft>
-                <a:spcPts val="400"/>
+                <a:spcPts val="1000"/>
               </a:spcAft>
               <a:buSzPct val="100000"/>
               <a:buChar char="●"/>
             </a:pPr>
             <a:r>
-              <a:rPr lang="en-US" sz="1050" dirty="0">
+              <a:rPr lang="en-US" sz="1300" dirty="0">
                 <a:solidFill>
                   <a:srgbClr val="1A2233"/>
                 </a:solidFill>
@@ -4665,134 +4094,23 @@
                 <a:ea typeface="Calibri" pitchFamily="34" charset="-122"/>
                 <a:cs typeface="Calibri" pitchFamily="34" charset="-120"/>
               </a:rPr>
-              <a:t>SwaggerForOcelot</a:t>
-            </a:r>
-            <a:endParaRPr lang="en-US" sz="1050" dirty="0"/>
-          </a:p>
-        </p:txBody>
-      </p:sp>
-      <p:sp>
-        <p:nvSpPr>
-          <p:cNvPr id="25" name="Shape 11">
-            <a:extLst>
-              <a:ext uri="{FF2B5EF4-FFF2-40B4-BE49-F238E27FC236}">
-                <a16:creationId xmlns:a16="http://schemas.microsoft.com/office/drawing/2014/main" id="{A5898FD3-C6EA-B23D-9820-F3F376088F78}"/>
-              </a:ext>
-            </a:extLst>
-          </p:cNvPr>
-          <p:cNvSpPr/>
-          <p:nvPr/>
-        </p:nvSpPr>
-        <p:spPr>
-          <a:xfrm>
-            <a:off x="8919972" y="1508760"/>
-            <a:ext cx="2606040" cy="2148840"/>
-          </a:xfrm>
-          <a:prstGeom prst="roundRect">
-            <a:avLst>
-              <a:gd name="adj" fmla="val 3404"/>
-            </a:avLst>
-          </a:prstGeom>
-          <a:solidFill>
-            <a:srgbClr val="EEF3FC"/>
-          </a:solidFill>
-          <a:ln/>
-          <a:effectLst>
-            <a:outerShdw blurRad="63500" dist="25400" dir="5400000" algn="bl" rotWithShape="0">
-              <a:srgbClr val="9AAFD1">
-                <a:alpha val="30000"/>
-              </a:srgbClr>
-            </a:outerShdw>
-          </a:effectLst>
-        </p:spPr>
-      </p:sp>
-      <p:sp>
-        <p:nvSpPr>
-          <p:cNvPr id="27" name="Text 12">
-            <a:extLst>
-              <a:ext uri="{FF2B5EF4-FFF2-40B4-BE49-F238E27FC236}">
-                <a16:creationId xmlns:a16="http://schemas.microsoft.com/office/drawing/2014/main" id="{6D08D329-9E5C-B16E-B44D-F1CD05F2FE5F}"/>
-              </a:ext>
-            </a:extLst>
-          </p:cNvPr>
-          <p:cNvSpPr/>
-          <p:nvPr/>
-        </p:nvSpPr>
-        <p:spPr>
-          <a:xfrm>
-            <a:off x="9084564" y="1645920"/>
-            <a:ext cx="2276856" cy="457200"/>
-          </a:xfrm>
-          <a:prstGeom prst="rect">
-            <a:avLst/>
-          </a:prstGeom>
-          <a:noFill/>
-          <a:ln/>
-        </p:spPr>
-        <p:txBody>
-          <a:bodyPr wrap="square" rtlCol="0" anchor="ctr"/>
-          <a:lstStyle/>
-          <a:p>
-            <a:pPr marL="0" indent="0">
-              <a:lnSpc>
-                <a:spcPct val="105000"/>
-              </a:lnSpc>
-              <a:buNone/>
-            </a:pPr>
-            <a:r>
-              <a:rPr lang="en-US" sz="1250" b="1" dirty="0">
-                <a:solidFill>
-                  <a:srgbClr val="0B1F3A"/>
-                </a:solidFill>
-                <a:latin typeface="Calibri" pitchFamily="34" charset="0"/>
-                <a:ea typeface="Calibri" pitchFamily="34" charset="-122"/>
-                <a:cs typeface="Calibri" pitchFamily="34" charset="-120"/>
-              </a:rPr>
-              <a:t>Security &amp; Auth</a:t>
-            </a:r>
-            <a:endParaRPr lang="en-US" sz="1250" dirty="0"/>
-          </a:p>
-        </p:txBody>
-      </p:sp>
-      <p:sp>
-        <p:nvSpPr>
-          <p:cNvPr id="29" name="Text 13">
-            <a:extLst>
-              <a:ext uri="{FF2B5EF4-FFF2-40B4-BE49-F238E27FC236}">
-                <a16:creationId xmlns:a16="http://schemas.microsoft.com/office/drawing/2014/main" id="{97118666-5E3B-A380-9858-A357094D786A}"/>
-              </a:ext>
-            </a:extLst>
-          </p:cNvPr>
-          <p:cNvSpPr/>
-          <p:nvPr/>
-        </p:nvSpPr>
-        <p:spPr>
-          <a:xfrm>
-            <a:off x="9084564" y="2167128"/>
-            <a:ext cx="2276856" cy="1371600"/>
-          </a:xfrm>
-          <a:prstGeom prst="rect">
-            <a:avLst/>
-          </a:prstGeom>
-          <a:noFill/>
-          <a:ln/>
-        </p:spPr>
-        <p:txBody>
-          <a:bodyPr wrap="square" rtlCol="0" anchor="ctr"/>
-          <a:lstStyle/>
-          <a:p>
-            <a:pPr marL="127000" indent="-127000">
+              <a:t>SuperAdmins, HR, Financial Admins</a:t>
+            </a:r>
+            <a:endParaRPr lang="en-US" sz="1300" dirty="0"/>
+          </a:p>
+          <a:p>
+            <a:pPr marL="177800" indent="-177800">
               <a:lnSpc>
                 <a:spcPct val="115000"/>
               </a:lnSpc>
               <a:spcAft>
-                <a:spcPts val="400"/>
+                <a:spcPts val="1000"/>
               </a:spcAft>
               <a:buSzPct val="100000"/>
               <a:buChar char="●"/>
             </a:pPr>
             <a:r>
-              <a:rPr lang="en-US" sz="1050" dirty="0">
+              <a:rPr lang="en-US" sz="1300" dirty="0">
                 <a:solidFill>
                   <a:srgbClr val="1A2233"/>
                 </a:solidFill>
@@ -4800,23 +4118,23 @@
                 <a:ea typeface="Calibri" pitchFamily="34" charset="-122"/>
                 <a:cs typeface="Calibri" pitchFamily="34" charset="-120"/>
               </a:rPr>
-              <a:t>JWT Bearer Tokens</a:t>
-            </a:r>
-            <a:endParaRPr lang="en-US" sz="1050" dirty="0"/>
-          </a:p>
-          <a:p>
-            <a:pPr marL="127000" indent="-127000">
+              <a:t>Ground Staff &amp; Station Managers</a:t>
+            </a:r>
+            <a:endParaRPr lang="en-US" sz="1300" dirty="0"/>
+          </a:p>
+          <a:p>
+            <a:pPr marL="177800" indent="-177800">
               <a:lnSpc>
                 <a:spcPct val="115000"/>
               </a:lnSpc>
               <a:spcAft>
-                <a:spcPts val="400"/>
+                <a:spcPts val="1000"/>
               </a:spcAft>
               <a:buSzPct val="100000"/>
               <a:buChar char="●"/>
             </a:pPr>
             <a:r>
-              <a:rPr lang="en-US" sz="1050" dirty="0">
+              <a:rPr lang="en-US" sz="1300" dirty="0">
                 <a:solidFill>
                   <a:srgbClr val="1A2233"/>
                 </a:solidFill>
@@ -4824,23 +4142,23 @@
                 <a:ea typeface="Calibri" pitchFamily="34" charset="-122"/>
                 <a:cs typeface="Calibri" pitchFamily="34" charset="-120"/>
               </a:rPr>
-              <a:t>HMAC-SHA256</a:t>
-            </a:r>
-            <a:endParaRPr lang="en-US" sz="1050" dirty="0"/>
-          </a:p>
-          <a:p>
-            <a:pPr marL="127000" indent="-127000">
+              <a:t>Real-time flight scheduling</a:t>
+            </a:r>
+            <a:endParaRPr lang="en-US" sz="1300" dirty="0"/>
+          </a:p>
+          <a:p>
+            <a:pPr marL="177800" indent="-177800">
               <a:lnSpc>
                 <a:spcPct val="115000"/>
               </a:lnSpc>
               <a:spcAft>
-                <a:spcPts val="400"/>
+                <a:spcPts val="1000"/>
               </a:spcAft>
               <a:buSzPct val="100000"/>
               <a:buChar char="●"/>
             </a:pPr>
             <a:r>
-              <a:rPr lang="en-US" sz="1050" dirty="0">
+              <a:rPr lang="en-US" sz="1300" dirty="0">
                 <a:solidFill>
                   <a:srgbClr val="1A2233"/>
                 </a:solidFill>
@@ -4848,134 +4166,23 @@
                 <a:ea typeface="Calibri" pitchFamily="34" charset="-122"/>
                 <a:cs typeface="Calibri" pitchFamily="34" charset="-120"/>
               </a:rPr>
-              <a:t>PBKDF2 / Argon2 Hashing</a:t>
-            </a:r>
-            <a:endParaRPr lang="en-US" sz="1050" dirty="0"/>
-          </a:p>
-        </p:txBody>
-      </p:sp>
-      <p:sp>
-        <p:nvSpPr>
-          <p:cNvPr id="31" name="Shape 14">
-            <a:extLst>
-              <a:ext uri="{FF2B5EF4-FFF2-40B4-BE49-F238E27FC236}">
-                <a16:creationId xmlns:a16="http://schemas.microsoft.com/office/drawing/2014/main" id="{A4B19DFA-2B69-6594-5461-EEFC8056DF88}"/>
-              </a:ext>
-            </a:extLst>
-          </p:cNvPr>
-          <p:cNvSpPr/>
-          <p:nvPr/>
-        </p:nvSpPr>
-        <p:spPr>
-          <a:xfrm>
-            <a:off x="662940" y="3840480"/>
-            <a:ext cx="2606040" cy="2148840"/>
-          </a:xfrm>
-          <a:prstGeom prst="roundRect">
-            <a:avLst>
-              <a:gd name="adj" fmla="val 3404"/>
-            </a:avLst>
-          </a:prstGeom>
-          <a:solidFill>
-            <a:srgbClr val="EEF3FC"/>
-          </a:solidFill>
-          <a:ln/>
-          <a:effectLst>
-            <a:outerShdw blurRad="63500" dist="25400" dir="5400000" algn="bl" rotWithShape="0">
-              <a:srgbClr val="9AAFD1">
-                <a:alpha val="30000"/>
-              </a:srgbClr>
-            </a:outerShdw>
-          </a:effectLst>
-        </p:spPr>
-      </p:sp>
-      <p:sp>
-        <p:nvSpPr>
-          <p:cNvPr id="33" name="Text 15">
-            <a:extLst>
-              <a:ext uri="{FF2B5EF4-FFF2-40B4-BE49-F238E27FC236}">
-                <a16:creationId xmlns:a16="http://schemas.microsoft.com/office/drawing/2014/main" id="{99648504-F894-89C5-C185-201B879DA761}"/>
-              </a:ext>
-            </a:extLst>
-          </p:cNvPr>
-          <p:cNvSpPr/>
-          <p:nvPr/>
-        </p:nvSpPr>
-        <p:spPr>
-          <a:xfrm>
-            <a:off x="827532" y="3977640"/>
-            <a:ext cx="2276856" cy="457200"/>
-          </a:xfrm>
-          <a:prstGeom prst="rect">
-            <a:avLst/>
-          </a:prstGeom>
-          <a:noFill/>
-          <a:ln/>
-        </p:spPr>
-        <p:txBody>
-          <a:bodyPr wrap="square" rtlCol="0" anchor="ctr"/>
-          <a:lstStyle/>
-          <a:p>
-            <a:pPr marL="0" indent="0">
-              <a:lnSpc>
-                <a:spcPct val="105000"/>
-              </a:lnSpc>
-              <a:buNone/>
-            </a:pPr>
-            <a:r>
-              <a:rPr lang="en-US" sz="1250" b="1" dirty="0">
-                <a:solidFill>
-                  <a:srgbClr val="0B1F3A"/>
-                </a:solidFill>
-                <a:latin typeface="Calibri" pitchFamily="34" charset="0"/>
-                <a:ea typeface="Calibri" pitchFamily="34" charset="-122"/>
-                <a:cs typeface="Calibri" pitchFamily="34" charset="-120"/>
-              </a:rPr>
-              <a:t>Logging &amp; Monitoring</a:t>
-            </a:r>
-            <a:endParaRPr lang="en-US" sz="1250" dirty="0"/>
-          </a:p>
-        </p:txBody>
-      </p:sp>
-      <p:sp>
-        <p:nvSpPr>
-          <p:cNvPr id="35" name="Text 16">
-            <a:extLst>
-              <a:ext uri="{FF2B5EF4-FFF2-40B4-BE49-F238E27FC236}">
-                <a16:creationId xmlns:a16="http://schemas.microsoft.com/office/drawing/2014/main" id="{ECE9BD83-54A1-BA6B-E069-75BF65B51410}"/>
-              </a:ext>
-            </a:extLst>
-          </p:cNvPr>
-          <p:cNvSpPr/>
-          <p:nvPr/>
-        </p:nvSpPr>
-        <p:spPr>
-          <a:xfrm>
-            <a:off x="827532" y="4498848"/>
-            <a:ext cx="2276856" cy="1371600"/>
-          </a:xfrm>
-          <a:prstGeom prst="rect">
-            <a:avLst/>
-          </a:prstGeom>
-          <a:noFill/>
-          <a:ln/>
-        </p:spPr>
-        <p:txBody>
-          <a:bodyPr wrap="square" rtlCol="0" anchor="ctr"/>
-          <a:lstStyle/>
-          <a:p>
-            <a:pPr marL="127000" indent="-127000">
+              <a:t>Seat inventory &amp; manifest tracking</a:t>
+            </a:r>
+            <a:endParaRPr lang="en-US" sz="1300" dirty="0"/>
+          </a:p>
+          <a:p>
+            <a:pPr marL="177800" indent="-177800">
               <a:lnSpc>
                 <a:spcPct val="115000"/>
               </a:lnSpc>
               <a:spcAft>
-                <a:spcPts val="400"/>
+                <a:spcPts val="1000"/>
               </a:spcAft>
               <a:buSzPct val="100000"/>
               <a:buChar char="●"/>
             </a:pPr>
             <a:r>
-              <a:rPr lang="en-US" sz="1050" dirty="0">
+              <a:rPr lang="en-US" sz="1300" dirty="0">
                 <a:solidFill>
                   <a:srgbClr val="1A2233"/>
                 </a:solidFill>
@@ -4983,607 +4190,71 @@
                 <a:ea typeface="Calibri" pitchFamily="34" charset="-122"/>
                 <a:cs typeface="Calibri" pitchFamily="34" charset="-120"/>
               </a:rPr>
-              <a:t>Serilog</a:t>
-            </a:r>
-            <a:endParaRPr lang="en-US" sz="1050" dirty="0"/>
-          </a:p>
-          <a:p>
-            <a:pPr marL="127000" indent="-127000">
-              <a:lnSpc>
-                <a:spcPct val="115000"/>
-              </a:lnSpc>
-              <a:spcAft>
-                <a:spcPts val="400"/>
-              </a:spcAft>
-              <a:buSzPct val="100000"/>
-              <a:buChar char="●"/>
-            </a:pPr>
-            <a:r>
-              <a:rPr lang="en-US" sz="1050" dirty="0">
-                <a:solidFill>
-                  <a:srgbClr val="1A2233"/>
-                </a:solidFill>
-                <a:latin typeface="Calibri" pitchFamily="34" charset="0"/>
-                <a:ea typeface="Calibri" pitchFamily="34" charset="-122"/>
-                <a:cs typeface="Calibri" pitchFamily="34" charset="-120"/>
-              </a:rPr>
-              <a:t>Console &amp; Rolling File Sinks</a:t>
-            </a:r>
-            <a:endParaRPr lang="en-US" sz="1050" dirty="0"/>
-          </a:p>
-        </p:txBody>
-      </p:sp>
-      <p:sp>
-        <p:nvSpPr>
-          <p:cNvPr id="37" name="Shape 17">
-            <a:extLst>
-              <a:ext uri="{FF2B5EF4-FFF2-40B4-BE49-F238E27FC236}">
-                <a16:creationId xmlns:a16="http://schemas.microsoft.com/office/drawing/2014/main" id="{1B9F48A6-75B4-FD1B-9AA7-7F33593DB6B8}"/>
-              </a:ext>
-            </a:extLst>
-          </p:cNvPr>
-          <p:cNvSpPr/>
-          <p:nvPr/>
-        </p:nvSpPr>
-        <p:spPr>
-          <a:xfrm>
-            <a:off x="3415284" y="3840480"/>
-            <a:ext cx="2606040" cy="2148840"/>
-          </a:xfrm>
-          <a:prstGeom prst="roundRect">
-            <a:avLst>
-              <a:gd name="adj" fmla="val 3404"/>
-            </a:avLst>
-          </a:prstGeom>
-          <a:solidFill>
-            <a:srgbClr val="EEF3FC"/>
-          </a:solidFill>
-          <a:ln/>
-          <a:effectLst>
-            <a:outerShdw blurRad="63500" dist="25400" dir="5400000" algn="bl" rotWithShape="0">
-              <a:srgbClr val="9AAFD1">
-                <a:alpha val="30000"/>
-              </a:srgbClr>
-            </a:outerShdw>
-          </a:effectLst>
-        </p:spPr>
-      </p:sp>
-      <p:sp>
-        <p:nvSpPr>
-          <p:cNvPr id="39" name="Text 18">
-            <a:extLst>
-              <a:ext uri="{FF2B5EF4-FFF2-40B4-BE49-F238E27FC236}">
-                <a16:creationId xmlns:a16="http://schemas.microsoft.com/office/drawing/2014/main" id="{0A5282E1-9BD7-AC70-EF52-6D51F8BC42F4}"/>
-              </a:ext>
-            </a:extLst>
-          </p:cNvPr>
-          <p:cNvSpPr/>
-          <p:nvPr/>
-        </p:nvSpPr>
-        <p:spPr>
-          <a:xfrm>
-            <a:off x="3579876" y="3977640"/>
-            <a:ext cx="2276856" cy="457200"/>
+              <a:t>Financial reporting &amp; audit trails</a:t>
+            </a:r>
+            <a:endParaRPr lang="en-US" sz="1300" dirty="0"/>
+          </a:p>
+        </p:txBody>
+      </p:sp>
+      <p:sp>
+        <p:nvSpPr>
+          <p:cNvPr id="2" name="TextBox 1">
+            <a:extLst>
+              <a:ext uri="{FF2B5EF4-FFF2-40B4-BE49-F238E27FC236}">
+                <a16:creationId xmlns:a16="http://schemas.microsoft.com/office/drawing/2014/main" id="{DFD08747-9484-E7AE-8BD3-60F7D5FD1A24}"/>
+              </a:ext>
+            </a:extLst>
+          </p:cNvPr>
+          <p:cNvSpPr txBox="1"/>
+          <p:nvPr/>
+        </p:nvSpPr>
+        <p:spPr>
+          <a:xfrm>
+            <a:off x="440369" y="1130517"/>
+            <a:ext cx="11311261" cy="1477328"/>
           </a:xfrm>
           <a:prstGeom prst="rect">
             <a:avLst/>
           </a:prstGeom>
           <a:noFill/>
-          <a:ln/>
-        </p:spPr>
-        <p:txBody>
-          <a:bodyPr wrap="square" rtlCol="0" anchor="ctr"/>
-          <a:lstStyle/>
-          <a:p>
-            <a:pPr marL="0" indent="0">
-              <a:lnSpc>
-                <a:spcPct val="105000"/>
-              </a:lnSpc>
-              <a:buNone/>
-            </a:pPr>
-            <a:r>
-              <a:rPr lang="en-US" sz="1250" b="1" dirty="0">
-                <a:solidFill>
-                  <a:srgbClr val="0B1F3A"/>
-                </a:solidFill>
-                <a:latin typeface="Calibri" pitchFamily="34" charset="0"/>
-                <a:ea typeface="Calibri" pitchFamily="34" charset="-122"/>
-                <a:cs typeface="Calibri" pitchFamily="34" charset="-120"/>
-              </a:rPr>
-              <a:t>Payments</a:t>
-            </a:r>
-            <a:endParaRPr lang="en-US" sz="1250" dirty="0"/>
-          </a:p>
-        </p:txBody>
-      </p:sp>
-      <p:sp>
-        <p:nvSpPr>
-          <p:cNvPr id="41" name="Text 19">
-            <a:extLst>
-              <a:ext uri="{FF2B5EF4-FFF2-40B4-BE49-F238E27FC236}">
-                <a16:creationId xmlns:a16="http://schemas.microsoft.com/office/drawing/2014/main" id="{746DB04A-F412-E1E2-8873-891BE87DC391}"/>
-              </a:ext>
-            </a:extLst>
-          </p:cNvPr>
-          <p:cNvSpPr/>
-          <p:nvPr/>
-        </p:nvSpPr>
-        <p:spPr>
-          <a:xfrm>
-            <a:off x="3579876" y="4498848"/>
-            <a:ext cx="2276856" cy="1371600"/>
-          </a:xfrm>
-          <a:prstGeom prst="rect">
-            <a:avLst/>
-          </a:prstGeom>
-          <a:noFill/>
-          <a:ln/>
-        </p:spPr>
-        <p:txBody>
-          <a:bodyPr wrap="square" rtlCol="0" anchor="ctr"/>
-          <a:lstStyle/>
-          <a:p>
-            <a:pPr marL="127000" indent="-127000">
-              <a:lnSpc>
-                <a:spcPct val="115000"/>
-              </a:lnSpc>
-              <a:spcAft>
-                <a:spcPts val="400"/>
-              </a:spcAft>
-              <a:buSzPct val="100000"/>
-              <a:buChar char="●"/>
-            </a:pPr>
-            <a:r>
-              <a:rPr lang="en-US" sz="1050" dirty="0">
-                <a:solidFill>
-                  <a:srgbClr val="1A2233"/>
-                </a:solidFill>
-                <a:latin typeface="Calibri" pitchFamily="34" charset="0"/>
-                <a:ea typeface="Calibri" pitchFamily="34" charset="-122"/>
-                <a:cs typeface="Calibri" pitchFamily="34" charset="-120"/>
-              </a:rPr>
-              <a:t>Razorpay .NET SDK</a:t>
-            </a:r>
-            <a:endParaRPr lang="en-US" sz="1050" dirty="0"/>
-          </a:p>
-          <a:p>
-            <a:pPr marL="127000" indent="-127000">
-              <a:lnSpc>
-                <a:spcPct val="115000"/>
-              </a:lnSpc>
-              <a:spcAft>
-                <a:spcPts val="400"/>
-              </a:spcAft>
-              <a:buSzPct val="100000"/>
-              <a:buChar char="●"/>
-            </a:pPr>
-            <a:r>
-              <a:rPr lang="en-US" sz="1050" dirty="0">
-                <a:solidFill>
-                  <a:srgbClr val="1A2233"/>
-                </a:solidFill>
-                <a:latin typeface="Calibri" pitchFamily="34" charset="0"/>
-                <a:ea typeface="Calibri" pitchFamily="34" charset="-122"/>
-                <a:cs typeface="Calibri" pitchFamily="34" charset="-120"/>
-              </a:rPr>
-              <a:t>Signature Verification</a:t>
-            </a:r>
-            <a:endParaRPr lang="en-US" sz="1050" dirty="0"/>
-          </a:p>
-        </p:txBody>
-      </p:sp>
-      <p:sp>
-        <p:nvSpPr>
-          <p:cNvPr id="43" name="Shape 20">
-            <a:extLst>
-              <a:ext uri="{FF2B5EF4-FFF2-40B4-BE49-F238E27FC236}">
-                <a16:creationId xmlns:a16="http://schemas.microsoft.com/office/drawing/2014/main" id="{FCD360F4-52A0-0096-D1D9-3559FF569772}"/>
-              </a:ext>
-            </a:extLst>
-          </p:cNvPr>
-          <p:cNvSpPr/>
-          <p:nvPr/>
-        </p:nvSpPr>
-        <p:spPr>
-          <a:xfrm>
-            <a:off x="6167628" y="3840480"/>
-            <a:ext cx="2606040" cy="2148840"/>
-          </a:xfrm>
-          <a:prstGeom prst="roundRect">
-            <a:avLst>
-              <a:gd name="adj" fmla="val 3404"/>
-            </a:avLst>
-          </a:prstGeom>
-          <a:solidFill>
-            <a:srgbClr val="EEF3FC"/>
-          </a:solidFill>
-          <a:ln/>
-          <a:effectLst>
-            <a:outerShdw blurRad="63500" dist="25400" dir="5400000" algn="bl" rotWithShape="0">
-              <a:srgbClr val="9AAFD1">
-                <a:alpha val="30000"/>
-              </a:srgbClr>
-            </a:outerShdw>
-          </a:effectLst>
-        </p:spPr>
-      </p:sp>
-      <p:sp>
-        <p:nvSpPr>
-          <p:cNvPr id="45" name="Text 21">
-            <a:extLst>
-              <a:ext uri="{FF2B5EF4-FFF2-40B4-BE49-F238E27FC236}">
-                <a16:creationId xmlns:a16="http://schemas.microsoft.com/office/drawing/2014/main" id="{191D87D2-01EF-22A0-655F-340CC3A6E29D}"/>
-              </a:ext>
-            </a:extLst>
-          </p:cNvPr>
-          <p:cNvSpPr/>
-          <p:nvPr/>
-        </p:nvSpPr>
-        <p:spPr>
-          <a:xfrm>
-            <a:off x="6332220" y="3977640"/>
-            <a:ext cx="2276856" cy="457200"/>
-          </a:xfrm>
-          <a:prstGeom prst="rect">
-            <a:avLst/>
-          </a:prstGeom>
-          <a:noFill/>
-          <a:ln/>
-        </p:spPr>
-        <p:txBody>
-          <a:bodyPr wrap="square" rtlCol="0" anchor="ctr"/>
-          <a:lstStyle/>
-          <a:p>
-            <a:pPr marL="0" indent="0">
-              <a:lnSpc>
-                <a:spcPct val="105000"/>
-              </a:lnSpc>
-              <a:buNone/>
-            </a:pPr>
-            <a:r>
-              <a:rPr lang="en-US" sz="1250" b="1" dirty="0">
-                <a:solidFill>
-                  <a:srgbClr val="0B1F3A"/>
-                </a:solidFill>
-                <a:latin typeface="Calibri" pitchFamily="34" charset="0"/>
-                <a:ea typeface="Calibri" pitchFamily="34" charset="-122"/>
-                <a:cs typeface="Calibri" pitchFamily="34" charset="-120"/>
-              </a:rPr>
-              <a:t>Utilities</a:t>
-            </a:r>
-            <a:endParaRPr lang="en-US" sz="1250" dirty="0"/>
-          </a:p>
-        </p:txBody>
-      </p:sp>
-      <p:sp>
-        <p:nvSpPr>
-          <p:cNvPr id="47" name="Text 22">
-            <a:extLst>
-              <a:ext uri="{FF2B5EF4-FFF2-40B4-BE49-F238E27FC236}">
-                <a16:creationId xmlns:a16="http://schemas.microsoft.com/office/drawing/2014/main" id="{60893E6C-E092-1932-0FBF-8E1435D5ED15}"/>
-              </a:ext>
-            </a:extLst>
-          </p:cNvPr>
-          <p:cNvSpPr/>
-          <p:nvPr/>
-        </p:nvSpPr>
-        <p:spPr>
-          <a:xfrm>
-            <a:off x="6332220" y="4498848"/>
-            <a:ext cx="2276856" cy="1371600"/>
-          </a:xfrm>
-          <a:prstGeom prst="rect">
-            <a:avLst/>
-          </a:prstGeom>
-          <a:noFill/>
-          <a:ln/>
-        </p:spPr>
-        <p:txBody>
-          <a:bodyPr wrap="square" rtlCol="0" anchor="ctr"/>
-          <a:lstStyle/>
-          <a:p>
-            <a:pPr marL="127000" indent="-127000">
-              <a:lnSpc>
-                <a:spcPct val="115000"/>
-              </a:lnSpc>
-              <a:spcAft>
-                <a:spcPts val="400"/>
-              </a:spcAft>
-              <a:buSzPct val="100000"/>
-              <a:buChar char="●"/>
-            </a:pPr>
-            <a:r>
-              <a:rPr lang="en-US" sz="1050" dirty="0">
-                <a:solidFill>
-                  <a:srgbClr val="1A2233"/>
-                </a:solidFill>
-                <a:latin typeface="Calibri" pitchFamily="34" charset="0"/>
-                <a:ea typeface="Calibri" pitchFamily="34" charset="-122"/>
-                <a:cs typeface="Calibri" pitchFamily="34" charset="-120"/>
-              </a:rPr>
-              <a:t>QRCoder</a:t>
-            </a:r>
-            <a:endParaRPr lang="en-US" sz="1050" dirty="0"/>
-          </a:p>
-          <a:p>
-            <a:pPr marL="127000" indent="-127000">
-              <a:lnSpc>
-                <a:spcPct val="115000"/>
-              </a:lnSpc>
-              <a:spcAft>
-                <a:spcPts val="400"/>
-              </a:spcAft>
-              <a:buSzPct val="100000"/>
-              <a:buChar char="●"/>
-            </a:pPr>
-            <a:r>
-              <a:rPr lang="en-US" sz="1050" dirty="0">
-                <a:solidFill>
-                  <a:srgbClr val="1A2233"/>
-                </a:solidFill>
-                <a:latin typeface="Calibri" pitchFamily="34" charset="0"/>
-                <a:ea typeface="Calibri" pitchFamily="34" charset="-122"/>
-                <a:cs typeface="Calibri" pitchFamily="34" charset="-120"/>
-              </a:rPr>
-              <a:t>Swashbuckle / OpenAPI</a:t>
-            </a:r>
-            <a:endParaRPr lang="en-US" sz="1050" dirty="0"/>
-          </a:p>
-        </p:txBody>
-      </p:sp>
-      <p:sp>
-        <p:nvSpPr>
-          <p:cNvPr id="49" name="Shape 23">
-            <a:extLst>
-              <a:ext uri="{FF2B5EF4-FFF2-40B4-BE49-F238E27FC236}">
-                <a16:creationId xmlns:a16="http://schemas.microsoft.com/office/drawing/2014/main" id="{83FB492E-5513-188B-2BBD-8AB7BB792C0E}"/>
-              </a:ext>
-            </a:extLst>
-          </p:cNvPr>
-          <p:cNvSpPr/>
-          <p:nvPr/>
-        </p:nvSpPr>
-        <p:spPr>
-          <a:xfrm>
-            <a:off x="8919972" y="3840480"/>
-            <a:ext cx="2606040" cy="2148840"/>
-          </a:xfrm>
-          <a:prstGeom prst="roundRect">
-            <a:avLst>
-              <a:gd name="adj" fmla="val 3404"/>
-            </a:avLst>
-          </a:prstGeom>
-          <a:solidFill>
-            <a:srgbClr val="EEF3FC"/>
-          </a:solidFill>
-          <a:ln/>
-          <a:effectLst>
-            <a:outerShdw blurRad="63500" dist="25400" dir="5400000" algn="bl" rotWithShape="0">
-              <a:srgbClr val="9AAFD1">
-                <a:alpha val="30000"/>
-              </a:srgbClr>
-            </a:outerShdw>
-          </a:effectLst>
-        </p:spPr>
-      </p:sp>
-      <p:sp>
-        <p:nvSpPr>
-          <p:cNvPr id="51" name="Text 24">
-            <a:extLst>
-              <a:ext uri="{FF2B5EF4-FFF2-40B4-BE49-F238E27FC236}">
-                <a16:creationId xmlns:a16="http://schemas.microsoft.com/office/drawing/2014/main" id="{0526B59A-B68C-18D1-8152-C54A9D0AF88C}"/>
-              </a:ext>
-            </a:extLst>
-          </p:cNvPr>
-          <p:cNvSpPr/>
-          <p:nvPr/>
-        </p:nvSpPr>
-        <p:spPr>
-          <a:xfrm>
-            <a:off x="9084564" y="3977640"/>
-            <a:ext cx="2276856" cy="457200"/>
-          </a:xfrm>
-          <a:prstGeom prst="rect">
-            <a:avLst/>
-          </a:prstGeom>
-          <a:noFill/>
-          <a:ln/>
-        </p:spPr>
-        <p:txBody>
-          <a:bodyPr wrap="square" rtlCol="0" anchor="ctr"/>
-          <a:lstStyle/>
-          <a:p>
-            <a:pPr marL="0" indent="0">
-              <a:lnSpc>
-                <a:spcPct val="105000"/>
-              </a:lnSpc>
-              <a:buNone/>
-            </a:pPr>
-            <a:r>
-              <a:rPr lang="en-US" sz="1250" b="1" dirty="0">
-                <a:solidFill>
-                  <a:srgbClr val="0B1F3A"/>
-                </a:solidFill>
-                <a:latin typeface="Calibri" pitchFamily="34" charset="0"/>
-                <a:ea typeface="Calibri" pitchFamily="34" charset="-122"/>
-                <a:cs typeface="Calibri" pitchFamily="34" charset="-120"/>
-              </a:rPr>
-              <a:t>Quality Assurance</a:t>
-            </a:r>
-            <a:endParaRPr lang="en-US" sz="1250" dirty="0"/>
-          </a:p>
-        </p:txBody>
-      </p:sp>
-      <p:sp>
-        <p:nvSpPr>
-          <p:cNvPr id="53" name="Text 25">
-            <a:extLst>
-              <a:ext uri="{FF2B5EF4-FFF2-40B4-BE49-F238E27FC236}">
-                <a16:creationId xmlns:a16="http://schemas.microsoft.com/office/drawing/2014/main" id="{B75A6F01-D343-7C6D-BA76-309BAF7391B1}"/>
-              </a:ext>
-            </a:extLst>
-          </p:cNvPr>
-          <p:cNvSpPr/>
-          <p:nvPr/>
-        </p:nvSpPr>
-        <p:spPr>
-          <a:xfrm>
-            <a:off x="9084564" y="4498848"/>
-            <a:ext cx="2276856" cy="1371600"/>
-          </a:xfrm>
-          <a:prstGeom prst="rect">
-            <a:avLst/>
-          </a:prstGeom>
-          <a:noFill/>
-          <a:ln/>
-        </p:spPr>
-        <p:txBody>
-          <a:bodyPr wrap="square" rtlCol="0" anchor="ctr"/>
-          <a:lstStyle/>
-          <a:p>
-            <a:pPr marL="127000" indent="-127000">
-              <a:lnSpc>
-                <a:spcPct val="115000"/>
-              </a:lnSpc>
-              <a:spcAft>
-                <a:spcPts val="400"/>
-              </a:spcAft>
-              <a:buSzPct val="100000"/>
-              <a:buChar char="●"/>
-            </a:pPr>
-            <a:r>
-              <a:rPr lang="en-US" sz="1050" dirty="0">
-                <a:solidFill>
-                  <a:srgbClr val="1A2233"/>
-                </a:solidFill>
-                <a:latin typeface="Calibri" pitchFamily="34" charset="0"/>
-                <a:ea typeface="Calibri" pitchFamily="34" charset="-122"/>
-                <a:cs typeface="Calibri" pitchFamily="34" charset="-120"/>
-              </a:rPr>
-              <a:t>xUnit</a:t>
-            </a:r>
-            <a:endParaRPr lang="en-US" sz="1050" dirty="0"/>
-          </a:p>
-          <a:p>
-            <a:pPr marL="127000" indent="-127000">
-              <a:lnSpc>
-                <a:spcPct val="115000"/>
-              </a:lnSpc>
-              <a:spcAft>
-                <a:spcPts val="400"/>
-              </a:spcAft>
-              <a:buSzPct val="100000"/>
-              <a:buChar char="●"/>
-            </a:pPr>
-            <a:r>
-              <a:rPr lang="en-US" sz="1050" dirty="0">
-                <a:solidFill>
-                  <a:srgbClr val="1A2233"/>
-                </a:solidFill>
-                <a:latin typeface="Calibri" pitchFamily="34" charset="0"/>
-                <a:ea typeface="Calibri" pitchFamily="34" charset="-122"/>
-                <a:cs typeface="Calibri" pitchFamily="34" charset="-120"/>
-              </a:rPr>
-              <a:t>Moq</a:t>
-            </a:r>
-            <a:endParaRPr lang="en-US" sz="1050" dirty="0"/>
-          </a:p>
-        </p:txBody>
-      </p:sp>
-      <p:sp>
-        <p:nvSpPr>
-          <p:cNvPr id="55" name="Text 26">
-            <a:extLst>
-              <a:ext uri="{FF2B5EF4-FFF2-40B4-BE49-F238E27FC236}">
-                <a16:creationId xmlns:a16="http://schemas.microsoft.com/office/drawing/2014/main" id="{3438DD89-62AC-7B31-8808-C528B7453E9D}"/>
-              </a:ext>
-            </a:extLst>
-          </p:cNvPr>
-          <p:cNvSpPr/>
-          <p:nvPr/>
-        </p:nvSpPr>
-        <p:spPr>
-          <a:xfrm>
-            <a:off x="457200" y="6473952"/>
-            <a:ext cx="5486400" cy="274320"/>
-          </a:xfrm>
-          <a:prstGeom prst="rect">
-            <a:avLst/>
-          </a:prstGeom>
-          <a:noFill/>
-          <a:ln/>
-        </p:spPr>
-        <p:txBody>
-          <a:bodyPr wrap="square" rtlCol="0" anchor="ctr"/>
-          <a:lstStyle/>
-          <a:p>
-            <a:pPr marL="0" indent="0">
-              <a:buNone/>
-            </a:pPr>
-            <a:r>
-              <a:rPr lang="en-US" sz="900" b="1" kern="0" spc="100" dirty="0">
-                <a:solidFill>
-                  <a:srgbClr val="A6B2C9"/>
-                </a:solidFill>
-                <a:latin typeface="Calibri" pitchFamily="34" charset="0"/>
-                <a:ea typeface="Calibri" pitchFamily="34" charset="-122"/>
-                <a:cs typeface="Calibri" pitchFamily="34" charset="-120"/>
-              </a:rPr>
-              <a:t>AIRLINE MANAGEMENT SYSTEM</a:t>
-            </a:r>
-            <a:endParaRPr lang="en-US" sz="900" dirty="0"/>
-          </a:p>
-        </p:txBody>
-      </p:sp>
-      <p:sp>
-        <p:nvSpPr>
-          <p:cNvPr id="57" name="Text 27">
-            <a:extLst>
-              <a:ext uri="{FF2B5EF4-FFF2-40B4-BE49-F238E27FC236}">
-                <a16:creationId xmlns:a16="http://schemas.microsoft.com/office/drawing/2014/main" id="{BB14BABC-51F2-62D5-09C8-10263A85E5CF}"/>
-              </a:ext>
-            </a:extLst>
-          </p:cNvPr>
-          <p:cNvSpPr/>
-          <p:nvPr/>
-        </p:nvSpPr>
-        <p:spPr>
-          <a:xfrm>
-            <a:off x="11274552" y="6473952"/>
-            <a:ext cx="457200" cy="274320"/>
-          </a:xfrm>
-          <a:prstGeom prst="rect">
-            <a:avLst/>
-          </a:prstGeom>
-          <a:noFill/>
-          <a:ln/>
-        </p:spPr>
-        <p:txBody>
-          <a:bodyPr wrap="square" rtlCol="0" anchor="ctr"/>
-          <a:lstStyle/>
-          <a:p>
-            <a:pPr marL="0" indent="0" algn="r">
-              <a:buNone/>
-            </a:pPr>
-            <a:r>
-              <a:rPr lang="en-US" sz="900" dirty="0">
-                <a:solidFill>
-                  <a:srgbClr val="A6B2C9"/>
-                </a:solidFill>
-                <a:latin typeface="Calibri" pitchFamily="34" charset="0"/>
-                <a:ea typeface="Calibri" pitchFamily="34" charset="-122"/>
-                <a:cs typeface="Calibri" pitchFamily="34" charset="-120"/>
-              </a:rPr>
-              <a:t>9</a:t>
-            </a:r>
-            <a:endParaRPr lang="en-US" sz="900" dirty="0"/>
+        </p:spPr>
+        <p:txBody>
+          <a:bodyPr wrap="square" rtlCol="0">
+            <a:spAutoFit/>
+          </a:bodyPr>
+          <a:lstStyle/>
+          <a:p>
+            <a:r>
+              <a:rPr lang="en-IN" dirty="0"/>
+              <a:t>The </a:t>
+            </a:r>
+            <a:r>
+              <a:rPr lang="en-IN" b="1" dirty="0"/>
+              <a:t>Airline Management System</a:t>
+            </a:r>
+            <a:r>
+              <a:rPr lang="en-IN" dirty="0"/>
+              <a:t> is a next-generation, cloud-ready, microservices-driven enterprise platform engineered to modernize end-to-end airline operations.</a:t>
+            </a:r>
+          </a:p>
+          <a:p>
+            <a:endParaRPr lang="en-IN" dirty="0"/>
+          </a:p>
+          <a:p>
+            <a:r>
+              <a:rPr lang="en-IN" dirty="0"/>
+              <a:t>It provides an integrated ecosystem serving two distinct user demographics:</a:t>
+            </a:r>
+          </a:p>
+          <a:p>
+            <a:endParaRPr lang="en-IN" dirty="0"/>
           </a:p>
         </p:txBody>
       </p:sp>
     </p:spTree>
     <p:extLst>
       <p:ext uri="{BB962C8B-B14F-4D97-AF65-F5344CB8AC3E}">
-        <p14:creationId xmlns:p14="http://schemas.microsoft.com/office/powerpoint/2010/main" val="116021255"/>
+        <p14:creationId xmlns:p14="http://schemas.microsoft.com/office/powerpoint/2010/main" val="728045634"/>
       </p:ext>
     </p:extLst>
   </p:cSld>
@@ -5615,16 +4286,16 @@
           <p:cNvPr id="3" name="Text 0">
             <a:extLst>
               <a:ext uri="{FF2B5EF4-FFF2-40B4-BE49-F238E27FC236}">
-                <a16:creationId xmlns:a16="http://schemas.microsoft.com/office/drawing/2014/main" id="{7746176D-5064-32A1-9212-D2B667516938}"/>
-              </a:ext>
-            </a:extLst>
-          </p:cNvPr>
-          <p:cNvSpPr/>
-          <p:nvPr/>
-        </p:nvSpPr>
-        <p:spPr>
-          <a:xfrm>
-            <a:off x="640080" y="320040"/>
+                <a16:creationId xmlns:a16="http://schemas.microsoft.com/office/drawing/2014/main" id="{3669C8F6-9F07-07C7-EC67-73301653A2BD}"/>
+              </a:ext>
+            </a:extLst>
+          </p:cNvPr>
+          <p:cNvSpPr/>
+          <p:nvPr/>
+        </p:nvSpPr>
+        <p:spPr>
+          <a:xfrm>
+            <a:off x="1577340" y="411480"/>
             <a:ext cx="9144000" cy="548640"/>
           </a:xfrm>
           <a:prstGeom prst="rect">
@@ -5649,7 +4320,7 @@
                 <a:ea typeface="Cambria" pitchFamily="34" charset="-122"/>
                 <a:cs typeface="Cambria" pitchFamily="34" charset="-120"/>
               </a:rPr>
-              <a:t>System Architecture</a:t>
+              <a:t>Technology Stack</a:t>
             </a:r>
             <a:endParaRPr lang="en-US" sz="3000" dirty="0"/>
           </a:p>
@@ -5660,17 +4331,17 @@
           <p:cNvPr id="5" name="Text 1">
             <a:extLst>
               <a:ext uri="{FF2B5EF4-FFF2-40B4-BE49-F238E27FC236}">
-                <a16:creationId xmlns:a16="http://schemas.microsoft.com/office/drawing/2014/main" id="{56FD4DD2-ED52-36CC-2B8B-AC1473395312}"/>
-              </a:ext>
-            </a:extLst>
-          </p:cNvPr>
-          <p:cNvSpPr/>
-          <p:nvPr/>
-        </p:nvSpPr>
-        <p:spPr>
-          <a:xfrm>
-            <a:off x="640080" y="868680"/>
-            <a:ext cx="10881360" cy="365760"/>
+                <a16:creationId xmlns:a16="http://schemas.microsoft.com/office/drawing/2014/main" id="{057C91A9-EC54-A020-E879-96258F7343AA}"/>
+              </a:ext>
+            </a:extLst>
+          </p:cNvPr>
+          <p:cNvSpPr/>
+          <p:nvPr/>
+        </p:nvSpPr>
+        <p:spPr>
+          <a:xfrm>
+            <a:off x="640080" y="960120"/>
+            <a:ext cx="10515600" cy="365760"/>
           </a:xfrm>
           <a:prstGeom prst="rect">
             <a:avLst/>
@@ -5685,16 +4356,88 @@
             <a:pPr marL="0" indent="0">
               <a:buNone/>
             </a:pPr>
-            <a:r>
-              <a:rPr lang="en-US" sz="1250" dirty="0">
-                <a:solidFill>
-                  <a:srgbClr val="5B6B85"/>
+            <a:endParaRPr lang="en-US" sz="1300" dirty="0"/>
+          </a:p>
+        </p:txBody>
+      </p:sp>
+      <p:sp>
+        <p:nvSpPr>
+          <p:cNvPr id="7" name="Shape 2">
+            <a:extLst>
+              <a:ext uri="{FF2B5EF4-FFF2-40B4-BE49-F238E27FC236}">
+                <a16:creationId xmlns:a16="http://schemas.microsoft.com/office/drawing/2014/main" id="{95AEF0F2-6834-EAC9-3351-EE485E2F3D40}"/>
+              </a:ext>
+            </a:extLst>
+          </p:cNvPr>
+          <p:cNvSpPr/>
+          <p:nvPr/>
+        </p:nvSpPr>
+        <p:spPr>
+          <a:xfrm>
+            <a:off x="662940" y="1508760"/>
+            <a:ext cx="2606040" cy="2148840"/>
+          </a:xfrm>
+          <a:prstGeom prst="roundRect">
+            <a:avLst>
+              <a:gd name="adj" fmla="val 3404"/>
+            </a:avLst>
+          </a:prstGeom>
+          <a:solidFill>
+            <a:srgbClr val="EEF3FC"/>
+          </a:solidFill>
+          <a:ln/>
+          <a:effectLst>
+            <a:outerShdw blurRad="63500" dist="25400" dir="5400000" algn="bl" rotWithShape="0">
+              <a:srgbClr val="9AAFD1">
+                <a:alpha val="30000"/>
+              </a:srgbClr>
+            </a:outerShdw>
+          </a:effectLst>
+        </p:spPr>
+      </p:sp>
+      <p:sp>
+        <p:nvSpPr>
+          <p:cNvPr id="9" name="Text 3">
+            <a:extLst>
+              <a:ext uri="{FF2B5EF4-FFF2-40B4-BE49-F238E27FC236}">
+                <a16:creationId xmlns:a16="http://schemas.microsoft.com/office/drawing/2014/main" id="{E5526D71-BA20-19F1-D98A-7C7696316E97}"/>
+              </a:ext>
+            </a:extLst>
+          </p:cNvPr>
+          <p:cNvSpPr/>
+          <p:nvPr/>
+        </p:nvSpPr>
+        <p:spPr>
+          <a:xfrm>
+            <a:off x="827532" y="1645920"/>
+            <a:ext cx="2276856" cy="457200"/>
+          </a:xfrm>
+          <a:prstGeom prst="rect">
+            <a:avLst/>
+          </a:prstGeom>
+          <a:noFill/>
+          <a:ln/>
+        </p:spPr>
+        <p:txBody>
+          <a:bodyPr wrap="square" rtlCol="0" anchor="ctr"/>
+          <a:lstStyle/>
+          <a:p>
+            <a:pPr marL="0" indent="0">
+              <a:lnSpc>
+                <a:spcPct val="105000"/>
+              </a:lnSpc>
+              <a:buNone/>
+            </a:pPr>
+            <a:r>
+              <a:rPr lang="en-US" sz="1250" b="1" dirty="0">
+                <a:solidFill>
+                  <a:srgbClr val="0B1F3A"/>
                 </a:solidFill>
                 <a:latin typeface="Calibri" pitchFamily="34" charset="0"/>
                 <a:ea typeface="Calibri" pitchFamily="34" charset="-122"/>
                 <a:cs typeface="Calibri" pitchFamily="34" charset="-120"/>
               </a:rPr>
-              <a:t>Microservices architecture with the Database-per-Service pattern for domain autonomy and zero cross-database locking.</a:t>
+              <a:t>Runtime &amp; Framework</a:t>
             </a:r>
             <a:endParaRPr lang="en-US" sz="1250" dirty="0"/>
           </a:p>
@@ -5702,48 +4445,20 @@
       </p:sp>
       <p:sp>
         <p:nvSpPr>
-          <p:cNvPr id="7" name="Shape 2">
-            <a:extLst>
-              <a:ext uri="{FF2B5EF4-FFF2-40B4-BE49-F238E27FC236}">
-                <a16:creationId xmlns:a16="http://schemas.microsoft.com/office/drawing/2014/main" id="{844E42B4-B0F6-7940-679D-358D2BDCBD61}"/>
-              </a:ext>
-            </a:extLst>
-          </p:cNvPr>
-          <p:cNvSpPr/>
-          <p:nvPr/>
-        </p:nvSpPr>
-        <p:spPr>
-          <a:xfrm>
-            <a:off x="973836" y="1417320"/>
-            <a:ext cx="3200400" cy="502920"/>
-          </a:xfrm>
-          <a:prstGeom prst="roundRect">
-            <a:avLst>
-              <a:gd name="adj" fmla="val 10909"/>
-            </a:avLst>
-          </a:prstGeom>
-          <a:solidFill>
-            <a:srgbClr val="0B1F3A"/>
-          </a:solidFill>
-          <a:ln/>
-        </p:spPr>
-      </p:sp>
-      <p:sp>
-        <p:nvSpPr>
-          <p:cNvPr id="9" name="Text 3">
-            <a:extLst>
-              <a:ext uri="{FF2B5EF4-FFF2-40B4-BE49-F238E27FC236}">
-                <a16:creationId xmlns:a16="http://schemas.microsoft.com/office/drawing/2014/main" id="{E310A358-D790-D1D0-1415-1B2EE3781EBC}"/>
-              </a:ext>
-            </a:extLst>
-          </p:cNvPr>
-          <p:cNvSpPr/>
-          <p:nvPr/>
-        </p:nvSpPr>
-        <p:spPr>
-          <a:xfrm>
-            <a:off x="973836" y="1417320"/>
-            <a:ext cx="3200400" cy="502920"/>
+          <p:cNvPr id="11" name="Text 4">
+            <a:extLst>
+              <a:ext uri="{FF2B5EF4-FFF2-40B4-BE49-F238E27FC236}">
+                <a16:creationId xmlns:a16="http://schemas.microsoft.com/office/drawing/2014/main" id="{FAD7BE82-A5DA-C330-57B2-872EFE8DA510}"/>
+              </a:ext>
+            </a:extLst>
+          </p:cNvPr>
+          <p:cNvSpPr/>
+          <p:nvPr/>
+        </p:nvSpPr>
+        <p:spPr>
+          <a:xfrm>
+            <a:off x="827532" y="2167128"/>
+            <a:ext cx="2276856" cy="1371600"/>
           </a:xfrm>
           <a:prstGeom prst="rect">
             <a:avLst/>
@@ -5755,244 +4470,130 @@
           <a:bodyPr wrap="square" rtlCol="0" anchor="ctr"/>
           <a:lstStyle/>
           <a:p>
-            <a:pPr marL="0" indent="0" algn="ctr">
-              <a:buNone/>
-            </a:pPr>
-            <a:r>
-              <a:rPr lang="en-US" sz="1150" b="1" dirty="0">
-                <a:solidFill>
-                  <a:srgbClr val="FFFFFF"/>
+            <a:pPr marL="127000" indent="-127000">
+              <a:lnSpc>
+                <a:spcPct val="115000"/>
+              </a:lnSpc>
+              <a:spcAft>
+                <a:spcPts val="400"/>
+              </a:spcAft>
+              <a:buSzPct val="100000"/>
+              <a:buChar char="●"/>
+            </a:pPr>
+            <a:r>
+              <a:rPr lang="en-US" sz="1050" dirty="0">
+                <a:solidFill>
+                  <a:srgbClr val="1A2233"/>
                 </a:solidFill>
                 <a:latin typeface="Calibri" pitchFamily="34" charset="0"/>
                 <a:ea typeface="Calibri" pitchFamily="34" charset="-122"/>
                 <a:cs typeface="Calibri" pitchFamily="34" charset="-120"/>
               </a:rPr>
-              <a:t>Passenger Web Portal</a:t>
-            </a:r>
-            <a:endParaRPr lang="en-US" sz="1150" dirty="0"/>
-          </a:p>
-        </p:txBody>
-      </p:sp>
-      <p:sp>
-        <p:nvSpPr>
-          <p:cNvPr id="11" name="Shape 4">
-            <a:extLst>
-              <a:ext uri="{FF2B5EF4-FFF2-40B4-BE49-F238E27FC236}">
-                <a16:creationId xmlns:a16="http://schemas.microsoft.com/office/drawing/2014/main" id="{0974057E-8A18-44B8-5895-611CA93D2B48}"/>
-              </a:ext>
-            </a:extLst>
-          </p:cNvPr>
-          <p:cNvSpPr/>
-          <p:nvPr/>
-        </p:nvSpPr>
-        <p:spPr>
-          <a:xfrm>
-            <a:off x="4494276" y="1417320"/>
-            <a:ext cx="3200400" cy="502920"/>
-          </a:xfrm>
-          <a:prstGeom prst="roundRect">
-            <a:avLst>
-              <a:gd name="adj" fmla="val 10909"/>
-            </a:avLst>
-          </a:prstGeom>
-          <a:solidFill>
-            <a:srgbClr val="0B1F3A"/>
-          </a:solidFill>
-          <a:ln/>
-        </p:spPr>
-      </p:sp>
-      <p:sp>
-        <p:nvSpPr>
-          <p:cNvPr id="13" name="Text 5">
-            <a:extLst>
-              <a:ext uri="{FF2B5EF4-FFF2-40B4-BE49-F238E27FC236}">
-                <a16:creationId xmlns:a16="http://schemas.microsoft.com/office/drawing/2014/main" id="{9F667A5A-9B9A-5329-A148-F08E0F1789A3}"/>
-              </a:ext>
-            </a:extLst>
-          </p:cNvPr>
-          <p:cNvSpPr/>
-          <p:nvPr/>
-        </p:nvSpPr>
-        <p:spPr>
-          <a:xfrm>
-            <a:off x="4494276" y="1417320"/>
-            <a:ext cx="3200400" cy="502920"/>
-          </a:xfrm>
-          <a:prstGeom prst="rect">
-            <a:avLst/>
-          </a:prstGeom>
-          <a:noFill/>
-          <a:ln/>
-        </p:spPr>
-        <p:txBody>
-          <a:bodyPr wrap="square" rtlCol="0" anchor="ctr"/>
-          <a:lstStyle/>
-          <a:p>
-            <a:pPr marL="0" indent="0" algn="ctr">
-              <a:buNone/>
-            </a:pPr>
-            <a:r>
-              <a:rPr lang="en-US" sz="1150" b="1" dirty="0">
-                <a:solidFill>
-                  <a:srgbClr val="FFFFFF"/>
+              <a:t>.NET 10</a:t>
+            </a:r>
+            <a:endParaRPr lang="en-US" sz="1050" dirty="0"/>
+          </a:p>
+          <a:p>
+            <a:pPr marL="127000" indent="-127000">
+              <a:lnSpc>
+                <a:spcPct val="115000"/>
+              </a:lnSpc>
+              <a:spcAft>
+                <a:spcPts val="400"/>
+              </a:spcAft>
+              <a:buSzPct val="100000"/>
+              <a:buChar char="●"/>
+            </a:pPr>
+            <a:r>
+              <a:rPr lang="en-US" sz="1050" dirty="0">
+                <a:solidFill>
+                  <a:srgbClr val="1A2233"/>
                 </a:solidFill>
                 <a:latin typeface="Calibri" pitchFamily="34" charset="0"/>
                 <a:ea typeface="Calibri" pitchFamily="34" charset="-122"/>
                 <a:cs typeface="Calibri" pitchFamily="34" charset="-120"/>
               </a:rPr>
-              <a:t>Backoffice Admin Dashboard</a:t>
-            </a:r>
-            <a:endParaRPr lang="en-US" sz="1150" dirty="0"/>
-          </a:p>
-        </p:txBody>
-      </p:sp>
-      <p:sp>
-        <p:nvSpPr>
-          <p:cNvPr id="15" name="Shape 6">
-            <a:extLst>
-              <a:ext uri="{FF2B5EF4-FFF2-40B4-BE49-F238E27FC236}">
-                <a16:creationId xmlns:a16="http://schemas.microsoft.com/office/drawing/2014/main" id="{02332EA4-C5E1-84EC-5BB6-7748649CE26A}"/>
-              </a:ext>
-            </a:extLst>
-          </p:cNvPr>
-          <p:cNvSpPr/>
-          <p:nvPr/>
-        </p:nvSpPr>
-        <p:spPr>
-          <a:xfrm>
-            <a:off x="8014716" y="1417320"/>
-            <a:ext cx="3200400" cy="502920"/>
-          </a:xfrm>
-          <a:prstGeom prst="roundRect">
-            <a:avLst>
-              <a:gd name="adj" fmla="val 10909"/>
-            </a:avLst>
-          </a:prstGeom>
-          <a:solidFill>
-            <a:srgbClr val="0B1F3A"/>
-          </a:solidFill>
-          <a:ln/>
-        </p:spPr>
-      </p:sp>
-      <p:sp>
-        <p:nvSpPr>
-          <p:cNvPr id="17" name="Text 7">
-            <a:extLst>
-              <a:ext uri="{FF2B5EF4-FFF2-40B4-BE49-F238E27FC236}">
-                <a16:creationId xmlns:a16="http://schemas.microsoft.com/office/drawing/2014/main" id="{E6475D47-B31A-2A5F-6797-C47903C06906}"/>
-              </a:ext>
-            </a:extLst>
-          </p:cNvPr>
-          <p:cNvSpPr/>
-          <p:nvPr/>
-        </p:nvSpPr>
-        <p:spPr>
-          <a:xfrm>
-            <a:off x="8014716" y="1417320"/>
-            <a:ext cx="3200400" cy="502920"/>
-          </a:xfrm>
-          <a:prstGeom prst="rect">
-            <a:avLst/>
-          </a:prstGeom>
-          <a:noFill/>
-          <a:ln/>
-        </p:spPr>
-        <p:txBody>
-          <a:bodyPr wrap="square" rtlCol="0" anchor="ctr"/>
-          <a:lstStyle/>
-          <a:p>
-            <a:pPr marL="0" indent="0" algn="ctr">
-              <a:buNone/>
-            </a:pPr>
-            <a:r>
-              <a:rPr lang="en-US" sz="1150" b="1" dirty="0">
-                <a:solidFill>
-                  <a:srgbClr val="FFFFFF"/>
+              <a:t>C# 13</a:t>
+            </a:r>
+            <a:endParaRPr lang="en-US" sz="1050" dirty="0"/>
+          </a:p>
+          <a:p>
+            <a:pPr marL="127000" indent="-127000">
+              <a:lnSpc>
+                <a:spcPct val="115000"/>
+              </a:lnSpc>
+              <a:spcAft>
+                <a:spcPts val="400"/>
+              </a:spcAft>
+              <a:buSzPct val="100000"/>
+              <a:buChar char="●"/>
+            </a:pPr>
+            <a:r>
+              <a:rPr lang="en-US" sz="1050" dirty="0">
+                <a:solidFill>
+                  <a:srgbClr val="1A2233"/>
                 </a:solidFill>
                 <a:latin typeface="Calibri" pitchFamily="34" charset="0"/>
                 <a:ea typeface="Calibri" pitchFamily="34" charset="-122"/>
                 <a:cs typeface="Calibri" pitchFamily="34" charset="-120"/>
               </a:rPr>
-              <a:t>B2B Dealer Portal</a:t>
-            </a:r>
-            <a:endParaRPr lang="en-US" sz="1150" dirty="0"/>
-          </a:p>
-        </p:txBody>
-      </p:sp>
-      <p:sp>
-        <p:nvSpPr>
-          <p:cNvPr id="19" name="Shape 8">
-            <a:extLst>
-              <a:ext uri="{FF2B5EF4-FFF2-40B4-BE49-F238E27FC236}">
-                <a16:creationId xmlns:a16="http://schemas.microsoft.com/office/drawing/2014/main" id="{4B26E2B2-925F-E57C-35B9-6EB846079E63}"/>
-              </a:ext>
-            </a:extLst>
-          </p:cNvPr>
-          <p:cNvSpPr/>
-          <p:nvPr/>
-        </p:nvSpPr>
-        <p:spPr>
-          <a:xfrm>
-            <a:off x="6094476" y="1920240"/>
-            <a:ext cx="0" cy="256032"/>
-          </a:xfrm>
-          <a:prstGeom prst="line">
-            <a:avLst/>
-          </a:prstGeom>
-          <a:noFill/>
-          <a:ln w="19050">
-            <a:solidFill>
-              <a:srgbClr val="5B6B85"/>
-            </a:solidFill>
-            <a:prstDash val="solid"/>
-            <a:tailEnd type="triangle"/>
-          </a:ln>
-        </p:spPr>
-      </p:sp>
-      <p:sp>
-        <p:nvSpPr>
-          <p:cNvPr id="21" name="Shape 9">
-            <a:extLst>
-              <a:ext uri="{FF2B5EF4-FFF2-40B4-BE49-F238E27FC236}">
-                <a16:creationId xmlns:a16="http://schemas.microsoft.com/office/drawing/2014/main" id="{8C9FA778-2CBA-3B3F-841B-46873368235B}"/>
-              </a:ext>
-            </a:extLst>
-          </p:cNvPr>
-          <p:cNvSpPr/>
-          <p:nvPr/>
-        </p:nvSpPr>
-        <p:spPr>
-          <a:xfrm>
-            <a:off x="4023360" y="2176272"/>
-            <a:ext cx="4114800" cy="502920"/>
+              <a:t>ASP.NET Core Web API</a:t>
+            </a:r>
+            <a:endParaRPr lang="en-US" sz="1050" dirty="0"/>
+          </a:p>
+        </p:txBody>
+      </p:sp>
+      <p:sp>
+        <p:nvSpPr>
+          <p:cNvPr id="13" name="Shape 5">
+            <a:extLst>
+              <a:ext uri="{FF2B5EF4-FFF2-40B4-BE49-F238E27FC236}">
+                <a16:creationId xmlns:a16="http://schemas.microsoft.com/office/drawing/2014/main" id="{76FD40D1-944C-AC97-60BE-9121083A7AD8}"/>
+              </a:ext>
+            </a:extLst>
+          </p:cNvPr>
+          <p:cNvSpPr/>
+          <p:nvPr/>
+        </p:nvSpPr>
+        <p:spPr>
+          <a:xfrm>
+            <a:off x="3415284" y="1508760"/>
+            <a:ext cx="2606040" cy="2148840"/>
           </a:xfrm>
           <a:prstGeom prst="roundRect">
             <a:avLst>
-              <a:gd name="adj" fmla="val 10909"/>
+              <a:gd name="adj" fmla="val 3404"/>
             </a:avLst>
           </a:prstGeom>
           <a:solidFill>
-            <a:srgbClr val="F2A93B"/>
+            <a:srgbClr val="EEF3FC"/>
           </a:solidFill>
           <a:ln/>
-        </p:spPr>
-      </p:sp>
-      <p:sp>
-        <p:nvSpPr>
-          <p:cNvPr id="23" name="Text 10">
-            <a:extLst>
-              <a:ext uri="{FF2B5EF4-FFF2-40B4-BE49-F238E27FC236}">
-                <a16:creationId xmlns:a16="http://schemas.microsoft.com/office/drawing/2014/main" id="{DB302A85-B632-E900-EA38-BAA1B4D7545D}"/>
-              </a:ext>
-            </a:extLst>
-          </p:cNvPr>
-          <p:cNvSpPr/>
-          <p:nvPr/>
-        </p:nvSpPr>
-        <p:spPr>
-          <a:xfrm>
-            <a:off x="4023360" y="2176272"/>
-            <a:ext cx="4114800" cy="502920"/>
+          <a:effectLst>
+            <a:outerShdw blurRad="63500" dist="25400" dir="5400000" algn="bl" rotWithShape="0">
+              <a:srgbClr val="9AAFD1">
+                <a:alpha val="30000"/>
+              </a:srgbClr>
+            </a:outerShdw>
+          </a:effectLst>
+        </p:spPr>
+      </p:sp>
+      <p:sp>
+        <p:nvSpPr>
+          <p:cNvPr id="15" name="Text 6">
+            <a:extLst>
+              <a:ext uri="{FF2B5EF4-FFF2-40B4-BE49-F238E27FC236}">
+                <a16:creationId xmlns:a16="http://schemas.microsoft.com/office/drawing/2014/main" id="{CF8C8EC0-FC34-602A-A0DD-F8C6AEBC380C}"/>
+              </a:ext>
+            </a:extLst>
+          </p:cNvPr>
+          <p:cNvSpPr/>
+          <p:nvPr/>
+        </p:nvSpPr>
+        <p:spPr>
+          <a:xfrm>
+            <a:off x="3579876" y="1645920"/>
+            <a:ext cx="2276856" cy="457200"/>
           </a:xfrm>
           <a:prstGeom prst="rect">
             <a:avLst/>
@@ -6004,11 +4605,14 @@
           <a:bodyPr wrap="square" rtlCol="0" anchor="ctr"/>
           <a:lstStyle/>
           <a:p>
-            <a:pPr marL="0" indent="0" algn="ctr">
-              <a:buNone/>
-            </a:pPr>
-            <a:r>
-              <a:rPr lang="en-US" sz="1150" b="1" dirty="0">
+            <a:pPr marL="0" indent="0">
+              <a:lnSpc>
+                <a:spcPct val="105000"/>
+              </a:lnSpc>
+              <a:buNone/>
+            </a:pPr>
+            <a:r>
+              <a:rPr lang="en-US" sz="1250" b="1" dirty="0">
                 <a:solidFill>
                   <a:srgbClr val="0B1F3A"/>
                 </a:solidFill>
@@ -6016,91 +4620,170 @@
                 <a:ea typeface="Calibri" pitchFamily="34" charset="-122"/>
                 <a:cs typeface="Calibri" pitchFamily="34" charset="-120"/>
               </a:rPr>
-              <a:t>API GATEWAY  •  Ocelot Reverse Proxy  •  Port 5000</a:t>
-            </a:r>
-            <a:endParaRPr lang="en-US" sz="1150" dirty="0"/>
-          </a:p>
-        </p:txBody>
-      </p:sp>
-      <p:sp>
-        <p:nvSpPr>
-          <p:cNvPr id="25" name="Shape 11">
-            <a:extLst>
-              <a:ext uri="{FF2B5EF4-FFF2-40B4-BE49-F238E27FC236}">
-                <a16:creationId xmlns:a16="http://schemas.microsoft.com/office/drawing/2014/main" id="{597C3E70-8DFE-34E2-17CB-89A471B3BB6A}"/>
-              </a:ext>
-            </a:extLst>
-          </p:cNvPr>
-          <p:cNvSpPr/>
-          <p:nvPr/>
-        </p:nvSpPr>
-        <p:spPr>
-          <a:xfrm>
-            <a:off x="6094476" y="2679192"/>
-            <a:ext cx="0" cy="228600"/>
-          </a:xfrm>
-          <a:prstGeom prst="line">
+              <a:t>Databases &amp; ORM</a:t>
+            </a:r>
+            <a:endParaRPr lang="en-US" sz="1250" dirty="0"/>
+          </a:p>
+        </p:txBody>
+      </p:sp>
+      <p:sp>
+        <p:nvSpPr>
+          <p:cNvPr id="17" name="Text 7">
+            <a:extLst>
+              <a:ext uri="{FF2B5EF4-FFF2-40B4-BE49-F238E27FC236}">
+                <a16:creationId xmlns:a16="http://schemas.microsoft.com/office/drawing/2014/main" id="{92A38091-0791-DC57-AE70-DFEDEA6FA300}"/>
+              </a:ext>
+            </a:extLst>
+          </p:cNvPr>
+          <p:cNvSpPr/>
+          <p:nvPr/>
+        </p:nvSpPr>
+        <p:spPr>
+          <a:xfrm>
+            <a:off x="3579876" y="2167128"/>
+            <a:ext cx="2276856" cy="1371600"/>
+          </a:xfrm>
+          <a:prstGeom prst="rect">
             <a:avLst/>
           </a:prstGeom>
           <a:noFill/>
-          <a:ln w="19050">
-            <a:solidFill>
-              <a:srgbClr val="5B6B85"/>
-            </a:solidFill>
-            <a:prstDash val="solid"/>
-            <a:tailEnd type="triangle"/>
-          </a:ln>
-        </p:spPr>
-      </p:sp>
-      <p:sp>
-        <p:nvSpPr>
-          <p:cNvPr id="27" name="Shape 12">
-            <a:extLst>
-              <a:ext uri="{FF2B5EF4-FFF2-40B4-BE49-F238E27FC236}">
-                <a16:creationId xmlns:a16="http://schemas.microsoft.com/office/drawing/2014/main" id="{EF2A8F6F-A461-CAEB-00D7-BE706CB22841}"/>
-              </a:ext>
-            </a:extLst>
-          </p:cNvPr>
-          <p:cNvSpPr/>
-          <p:nvPr/>
-        </p:nvSpPr>
-        <p:spPr>
-          <a:xfrm>
-            <a:off x="539496" y="2907792"/>
-            <a:ext cx="2606040" cy="1417320"/>
+          <a:ln/>
+        </p:spPr>
+        <p:txBody>
+          <a:bodyPr wrap="square" rtlCol="0" anchor="ctr"/>
+          <a:lstStyle/>
+          <a:p>
+            <a:pPr marL="127000" indent="-127000">
+              <a:lnSpc>
+                <a:spcPct val="115000"/>
+              </a:lnSpc>
+              <a:spcAft>
+                <a:spcPts val="400"/>
+              </a:spcAft>
+              <a:buSzPct val="100000"/>
+              <a:buChar char="●"/>
+            </a:pPr>
+            <a:r>
+              <a:rPr lang="en-US" sz="1050" dirty="0">
+                <a:solidFill>
+                  <a:srgbClr val="1A2233"/>
+                </a:solidFill>
+                <a:latin typeface="Calibri" pitchFamily="34" charset="0"/>
+                <a:ea typeface="Calibri" pitchFamily="34" charset="-122"/>
+                <a:cs typeface="Calibri" pitchFamily="34" charset="-120"/>
+              </a:rPr>
+              <a:t>Microsoft SQL Server</a:t>
+            </a:r>
+            <a:endParaRPr lang="en-US" sz="1050" dirty="0"/>
+          </a:p>
+          <a:p>
+            <a:pPr marL="127000" indent="-127000">
+              <a:lnSpc>
+                <a:spcPct val="115000"/>
+              </a:lnSpc>
+              <a:spcAft>
+                <a:spcPts val="400"/>
+              </a:spcAft>
+              <a:buSzPct val="100000"/>
+              <a:buChar char="●"/>
+            </a:pPr>
+            <a:r>
+              <a:rPr lang="en-US" sz="1050" dirty="0">
+                <a:solidFill>
+                  <a:srgbClr val="1A2233"/>
+                </a:solidFill>
+                <a:latin typeface="Calibri" pitchFamily="34" charset="0"/>
+                <a:ea typeface="Calibri" pitchFamily="34" charset="-122"/>
+                <a:cs typeface="Calibri" pitchFamily="34" charset="-120"/>
+              </a:rPr>
+              <a:t>EF Core 10</a:t>
+            </a:r>
+            <a:endParaRPr lang="en-US" sz="1050" dirty="0"/>
+          </a:p>
+          <a:p>
+            <a:pPr marL="127000" indent="-127000">
+              <a:lnSpc>
+                <a:spcPct val="115000"/>
+              </a:lnSpc>
+              <a:spcAft>
+                <a:spcPts val="400"/>
+              </a:spcAft>
+              <a:buSzPct val="100000"/>
+              <a:buChar char="●"/>
+            </a:pPr>
+            <a:r>
+              <a:rPr lang="en-US" sz="1050" dirty="0">
+                <a:solidFill>
+                  <a:srgbClr val="1A2233"/>
+                </a:solidFill>
+                <a:latin typeface="Calibri" pitchFamily="34" charset="0"/>
+                <a:ea typeface="Calibri" pitchFamily="34" charset="-122"/>
+                <a:cs typeface="Calibri" pitchFamily="34" charset="-120"/>
+              </a:rPr>
+              <a:t>Code-First Migrations</a:t>
+            </a:r>
+            <a:endParaRPr lang="en-US" sz="1050" dirty="0"/>
+          </a:p>
+        </p:txBody>
+      </p:sp>
+      <p:sp>
+        <p:nvSpPr>
+          <p:cNvPr id="19" name="Shape 8">
+            <a:extLst>
+              <a:ext uri="{FF2B5EF4-FFF2-40B4-BE49-F238E27FC236}">
+                <a16:creationId xmlns:a16="http://schemas.microsoft.com/office/drawing/2014/main" id="{B421AA53-7723-ED17-8332-C6490A3927A8}"/>
+              </a:ext>
+            </a:extLst>
+          </p:cNvPr>
+          <p:cNvSpPr/>
+          <p:nvPr/>
+        </p:nvSpPr>
+        <p:spPr>
+          <a:xfrm>
+            <a:off x="6167628" y="1508760"/>
+            <a:ext cx="2606040" cy="2148840"/>
           </a:xfrm>
           <a:prstGeom prst="roundRect">
             <a:avLst>
-              <a:gd name="adj" fmla="val 4516"/>
+              <a:gd name="adj" fmla="val 3404"/>
             </a:avLst>
           </a:prstGeom>
           <a:solidFill>
             <a:srgbClr val="EEF3FC"/>
           </a:solidFill>
-          <a:ln w="12700">
-            <a:solidFill>
-              <a:srgbClr val="CADCFC"/>
-            </a:solidFill>
-            <a:prstDash val="solid"/>
-          </a:ln>
-        </p:spPr>
-      </p:sp>
-      <p:sp>
-        <p:nvSpPr>
-          <p:cNvPr id="29" name="Text 13">
-            <a:extLst>
-              <a:ext uri="{FF2B5EF4-FFF2-40B4-BE49-F238E27FC236}">
-                <a16:creationId xmlns:a16="http://schemas.microsoft.com/office/drawing/2014/main" id="{18D950E5-9C61-B30A-7246-63AB2E32EA91}"/>
-              </a:ext>
-            </a:extLst>
-          </p:cNvPr>
-          <p:cNvSpPr/>
-          <p:nvPr/>
-        </p:nvSpPr>
-        <p:spPr>
-          <a:xfrm>
-            <a:off x="649224" y="3017520"/>
-            <a:ext cx="2386584" cy="320040"/>
+          <a:ln/>
+          <a:effectLst>
+            <a:outerShdw blurRad="63500" dist="25400" dir="5400000" algn="bl" rotWithShape="0">
+              <a:srgbClr val="9AAFD1">
+                <a:alpha val="30000"/>
+              </a:srgbClr>
+            </a:outerShdw>
+          </a:effectLst>
+        </p:spPr>
+        <p:txBody>
+          <a:bodyPr/>
+          <a:lstStyle/>
+          <a:p>
+            <a:endParaRPr lang="en-IN" dirty="0"/>
+          </a:p>
+        </p:txBody>
+      </p:sp>
+      <p:sp>
+        <p:nvSpPr>
+          <p:cNvPr id="21" name="Text 9">
+            <a:extLst>
+              <a:ext uri="{FF2B5EF4-FFF2-40B4-BE49-F238E27FC236}">
+                <a16:creationId xmlns:a16="http://schemas.microsoft.com/office/drawing/2014/main" id="{D388C8C6-3373-906E-049E-D5A90B42735E}"/>
+              </a:ext>
+            </a:extLst>
+          </p:cNvPr>
+          <p:cNvSpPr/>
+          <p:nvPr/>
+        </p:nvSpPr>
+        <p:spPr>
+          <a:xfrm>
+            <a:off x="6332220" y="1645920"/>
+            <a:ext cx="2276856" cy="457200"/>
           </a:xfrm>
           <a:prstGeom prst="rect">
             <a:avLst/>
@@ -6113,6 +4796,9 @@
           <a:lstStyle/>
           <a:p>
             <a:pPr marL="0" indent="0">
+              <a:lnSpc>
+                <a:spcPct val="105000"/>
+              </a:lnSpc>
               <a:buNone/>
             </a:pPr>
             <a:r>
@@ -6124,7 +4810,7 @@
                 <a:ea typeface="Calibri" pitchFamily="34" charset="-122"/>
                 <a:cs typeface="Calibri" pitchFamily="34" charset="-120"/>
               </a:rPr>
-              <a:t>BackOfficeService</a:t>
+              <a:t>Gateway &amp; Routing</a:t>
             </a:r>
             <a:endParaRPr lang="en-US" sz="1250" dirty="0"/>
           </a:p>
@@ -6132,20 +4818,20 @@
       </p:sp>
       <p:sp>
         <p:nvSpPr>
-          <p:cNvPr id="31" name="Text 14">
-            <a:extLst>
-              <a:ext uri="{FF2B5EF4-FFF2-40B4-BE49-F238E27FC236}">
-                <a16:creationId xmlns:a16="http://schemas.microsoft.com/office/drawing/2014/main" id="{506D5597-8774-A7D8-D2EB-A42B9B4B864A}"/>
-              </a:ext>
-            </a:extLst>
-          </p:cNvPr>
-          <p:cNvSpPr/>
-          <p:nvPr/>
-        </p:nvSpPr>
-        <p:spPr>
-          <a:xfrm>
-            <a:off x="649224" y="3319272"/>
-            <a:ext cx="2386584" cy="228600"/>
+          <p:cNvPr id="23" name="Text 10">
+            <a:extLst>
+              <a:ext uri="{FF2B5EF4-FFF2-40B4-BE49-F238E27FC236}">
+                <a16:creationId xmlns:a16="http://schemas.microsoft.com/office/drawing/2014/main" id="{D78388F5-0B00-A23E-55D8-A99673B68F26}"/>
+              </a:ext>
+            </a:extLst>
+          </p:cNvPr>
+          <p:cNvSpPr/>
+          <p:nvPr/>
+        </p:nvSpPr>
+        <p:spPr>
+          <a:xfrm>
+            <a:off x="6332220" y="2167128"/>
+            <a:ext cx="2276856" cy="1371600"/>
           </a:xfrm>
           <a:prstGeom prst="rect">
             <a:avLst/>
@@ -6157,59 +4843,42 @@
           <a:bodyPr wrap="square" rtlCol="0" anchor="ctr"/>
           <a:lstStyle/>
           <a:p>
-            <a:pPr marL="0" indent="0">
-              <a:buNone/>
-            </a:pPr>
-            <a:r>
-              <a:rPr lang="en-US" sz="900" b="1" dirty="0">
-                <a:solidFill>
-                  <a:srgbClr val="B8791F"/>
+            <a:pPr marL="127000" indent="-127000">
+              <a:lnSpc>
+                <a:spcPct val="115000"/>
+              </a:lnSpc>
+              <a:spcAft>
+                <a:spcPts val="400"/>
+              </a:spcAft>
+              <a:buSzPct val="100000"/>
+              <a:buChar char="●"/>
+            </a:pPr>
+            <a:r>
+              <a:rPr lang="en-US" sz="1050" dirty="0">
+                <a:solidFill>
+                  <a:srgbClr val="1A2233"/>
                 </a:solidFill>
                 <a:latin typeface="Calibri" pitchFamily="34" charset="0"/>
                 <a:ea typeface="Calibri" pitchFamily="34" charset="-122"/>
                 <a:cs typeface="Calibri" pitchFamily="34" charset="-120"/>
               </a:rPr>
-              <a:t>PORT 5001</a:t>
-            </a:r>
-            <a:endParaRPr lang="en-US" sz="900" dirty="0"/>
-          </a:p>
-        </p:txBody>
-      </p:sp>
-      <p:sp>
-        <p:nvSpPr>
-          <p:cNvPr id="33" name="Text 15">
-            <a:extLst>
-              <a:ext uri="{FF2B5EF4-FFF2-40B4-BE49-F238E27FC236}">
-                <a16:creationId xmlns:a16="http://schemas.microsoft.com/office/drawing/2014/main" id="{02E4BA0B-CB47-5C46-8F41-1F83E3E51B9D}"/>
-              </a:ext>
-            </a:extLst>
-          </p:cNvPr>
-          <p:cNvSpPr/>
-          <p:nvPr/>
-        </p:nvSpPr>
-        <p:spPr>
-          <a:xfrm>
-            <a:off x="649224" y="3593592"/>
-            <a:ext cx="2386584" cy="658368"/>
-          </a:xfrm>
-          <a:prstGeom prst="rect">
-            <a:avLst/>
-          </a:prstGeom>
-          <a:noFill/>
-          <a:ln/>
-        </p:spPr>
-        <p:txBody>
-          <a:bodyPr wrap="square" rtlCol="0" anchor="ctr"/>
-          <a:lstStyle/>
-          <a:p>
-            <a:pPr marL="0" indent="0">
+              <a:t>Ocelot Api Gateway</a:t>
+            </a:r>
+            <a:endParaRPr lang="en-US" sz="1050" dirty="0"/>
+          </a:p>
+          <a:p>
+            <a:pPr marL="127000" indent="-127000">
               <a:lnSpc>
                 <a:spcPct val="115000"/>
               </a:lnSpc>
-              <a:buNone/>
-            </a:pPr>
-            <a:r>
-              <a:rPr lang="en-US" sz="1000" dirty="0">
+              <a:spcAft>
+                <a:spcPts val="400"/>
+              </a:spcAft>
+              <a:buSzPct val="100000"/>
+              <a:buChar char="●"/>
+            </a:pPr>
+            <a:r>
+              <a:rPr lang="en-US" sz="1050" dirty="0">
                 <a:solidFill>
                   <a:srgbClr val="1A2233"/>
                 </a:solidFill>
@@ -6217,19 +4886,134 @@
                 <a:ea typeface="Calibri" pitchFamily="34" charset="-122"/>
                 <a:cs typeface="Calibri" pitchFamily="34" charset="-120"/>
               </a:rPr>
-              <a:t>Staff, roles, station</a:t>
-            </a:r>
-            <a:endParaRPr lang="en-US" sz="1000" dirty="0"/>
-          </a:p>
+              <a:t>Swagger</a:t>
+            </a:r>
+            <a:endParaRPr lang="en-US" sz="1050" dirty="0"/>
+          </a:p>
+        </p:txBody>
+      </p:sp>
+      <p:sp>
+        <p:nvSpPr>
+          <p:cNvPr id="25" name="Shape 11">
+            <a:extLst>
+              <a:ext uri="{FF2B5EF4-FFF2-40B4-BE49-F238E27FC236}">
+                <a16:creationId xmlns:a16="http://schemas.microsoft.com/office/drawing/2014/main" id="{A5898FD3-C6EA-B23D-9820-F3F376088F78}"/>
+              </a:ext>
+            </a:extLst>
+          </p:cNvPr>
+          <p:cNvSpPr/>
+          <p:nvPr/>
+        </p:nvSpPr>
+        <p:spPr>
+          <a:xfrm>
+            <a:off x="8919972" y="1508760"/>
+            <a:ext cx="2606040" cy="2148840"/>
+          </a:xfrm>
+          <a:prstGeom prst="roundRect">
+            <a:avLst>
+              <a:gd name="adj" fmla="val 3404"/>
+            </a:avLst>
+          </a:prstGeom>
+          <a:solidFill>
+            <a:srgbClr val="EEF3FC"/>
+          </a:solidFill>
+          <a:ln/>
+          <a:effectLst>
+            <a:outerShdw blurRad="63500" dist="25400" dir="5400000" algn="bl" rotWithShape="0">
+              <a:srgbClr val="9AAFD1">
+                <a:alpha val="30000"/>
+              </a:srgbClr>
+            </a:outerShdw>
+          </a:effectLst>
+        </p:spPr>
+      </p:sp>
+      <p:sp>
+        <p:nvSpPr>
+          <p:cNvPr id="27" name="Text 12">
+            <a:extLst>
+              <a:ext uri="{FF2B5EF4-FFF2-40B4-BE49-F238E27FC236}">
+                <a16:creationId xmlns:a16="http://schemas.microsoft.com/office/drawing/2014/main" id="{6D08D329-9E5C-B16E-B44D-F1CD05F2FE5F}"/>
+              </a:ext>
+            </a:extLst>
+          </p:cNvPr>
+          <p:cNvSpPr/>
+          <p:nvPr/>
+        </p:nvSpPr>
+        <p:spPr>
+          <a:xfrm>
+            <a:off x="9084564" y="1645920"/>
+            <a:ext cx="2276856" cy="457200"/>
+          </a:xfrm>
+          <a:prstGeom prst="rect">
+            <a:avLst/>
+          </a:prstGeom>
+          <a:noFill/>
+          <a:ln/>
+        </p:spPr>
+        <p:txBody>
+          <a:bodyPr wrap="square" rtlCol="0" anchor="ctr"/>
+          <a:lstStyle/>
           <a:p>
             <a:pPr marL="0" indent="0">
+              <a:lnSpc>
+                <a:spcPct val="105000"/>
+              </a:lnSpc>
+              <a:buNone/>
+            </a:pPr>
+            <a:r>
+              <a:rPr lang="en-US" sz="1250" b="1" dirty="0">
+                <a:solidFill>
+                  <a:srgbClr val="0B1F3A"/>
+                </a:solidFill>
+                <a:latin typeface="Calibri" pitchFamily="34" charset="0"/>
+                <a:ea typeface="Calibri" pitchFamily="34" charset="-122"/>
+                <a:cs typeface="Calibri" pitchFamily="34" charset="-120"/>
+              </a:rPr>
+              <a:t>Security &amp; Auth</a:t>
+            </a:r>
+            <a:endParaRPr lang="en-US" sz="1250" dirty="0"/>
+          </a:p>
+        </p:txBody>
+      </p:sp>
+      <p:sp>
+        <p:nvSpPr>
+          <p:cNvPr id="29" name="Text 13">
+            <a:extLst>
+              <a:ext uri="{FF2B5EF4-FFF2-40B4-BE49-F238E27FC236}">
+                <a16:creationId xmlns:a16="http://schemas.microsoft.com/office/drawing/2014/main" id="{97118666-5E3B-A380-9858-A357094D786A}"/>
+              </a:ext>
+            </a:extLst>
+          </p:cNvPr>
+          <p:cNvSpPr/>
+          <p:nvPr/>
+        </p:nvSpPr>
+        <p:spPr>
+          <a:xfrm>
+            <a:off x="9084564" y="2167128"/>
+            <a:ext cx="2276856" cy="1371600"/>
+          </a:xfrm>
+          <a:prstGeom prst="rect">
+            <a:avLst/>
+          </a:prstGeom>
+          <a:noFill/>
+          <a:ln/>
+        </p:spPr>
+        <p:txBody>
+          <a:bodyPr wrap="square" rtlCol="0" anchor="ctr"/>
+          <a:lstStyle/>
+          <a:p>
+            <a:pPr marL="127000" indent="-127000">
               <a:lnSpc>
                 <a:spcPct val="115000"/>
               </a:lnSpc>
-              <a:buNone/>
-            </a:pPr>
-            <a:r>
-              <a:rPr lang="en-US" sz="1000" dirty="0">
+              <a:spcAft>
+                <a:spcPts val="400"/>
+              </a:spcAft>
+              <a:buSzPct val="100000"/>
+              <a:buChar char="●"/>
+            </a:pPr>
+            <a:r>
+              <a:rPr lang="en-US" sz="1050" dirty="0">
                 <a:solidFill>
                   <a:srgbClr val="1A2233"/>
                 </a:solidFill>
@@ -6237,91 +5021,86 @@
                 <a:ea typeface="Calibri" pitchFamily="34" charset="-122"/>
                 <a:cs typeface="Calibri" pitchFamily="34" charset="-120"/>
               </a:rPr>
-              <a:t>mgmt, reports</a:t>
-            </a:r>
-            <a:endParaRPr lang="en-US" sz="1000" dirty="0"/>
-          </a:p>
-        </p:txBody>
-      </p:sp>
-      <p:sp>
-        <p:nvSpPr>
-          <p:cNvPr id="35" name="Shape 16">
-            <a:extLst>
-              <a:ext uri="{FF2B5EF4-FFF2-40B4-BE49-F238E27FC236}">
-                <a16:creationId xmlns:a16="http://schemas.microsoft.com/office/drawing/2014/main" id="{08343FFD-5A97-A847-3808-E63BCE295238}"/>
-              </a:ext>
-            </a:extLst>
-          </p:cNvPr>
-          <p:cNvSpPr/>
-          <p:nvPr/>
-        </p:nvSpPr>
-        <p:spPr>
-          <a:xfrm>
-            <a:off x="1842516" y="4325112"/>
-            <a:ext cx="0" cy="201168"/>
-          </a:xfrm>
-          <a:prstGeom prst="line">
-            <a:avLst/>
-          </a:prstGeom>
-          <a:noFill/>
-          <a:ln w="15875">
-            <a:solidFill>
-              <a:srgbClr val="5B6B85"/>
-            </a:solidFill>
-            <a:prstDash val="solid"/>
-            <a:tailEnd type="triangle"/>
-          </a:ln>
-        </p:spPr>
-      </p:sp>
-      <p:sp>
-        <p:nvSpPr>
-          <p:cNvPr id="37" name="Shape 17">
-            <a:extLst>
-              <a:ext uri="{FF2B5EF4-FFF2-40B4-BE49-F238E27FC236}">
-                <a16:creationId xmlns:a16="http://schemas.microsoft.com/office/drawing/2014/main" id="{0C862DBF-F608-7A0E-A22D-0B8CD15C3CB0}"/>
-              </a:ext>
-            </a:extLst>
-          </p:cNvPr>
-          <p:cNvSpPr/>
-          <p:nvPr/>
-        </p:nvSpPr>
-        <p:spPr>
-          <a:xfrm>
-            <a:off x="3374136" y="2907792"/>
-            <a:ext cx="2606040" cy="1417320"/>
+              <a:t>JWT Bearer Tokens</a:t>
+            </a:r>
+          </a:p>
+          <a:p>
+            <a:pPr marL="127000" indent="-127000">
+              <a:lnSpc>
+                <a:spcPct val="115000"/>
+              </a:lnSpc>
+              <a:spcAft>
+                <a:spcPts val="400"/>
+              </a:spcAft>
+              <a:buSzPct val="100000"/>
+              <a:buChar char="●"/>
+            </a:pPr>
+            <a:r>
+              <a:rPr lang="en-US" sz="1050" dirty="0">
+                <a:solidFill>
+                  <a:srgbClr val="1A2233"/>
+                </a:solidFill>
+                <a:latin typeface="Calibri" pitchFamily="34" charset="0"/>
+                <a:ea typeface="Calibri" pitchFamily="34" charset="-122"/>
+                <a:cs typeface="Calibri" pitchFamily="34" charset="-120"/>
+              </a:rPr>
+              <a:t>Hashing</a:t>
+            </a:r>
+            <a:endParaRPr lang="en-US" sz="1050" dirty="0"/>
+          </a:p>
+        </p:txBody>
+      </p:sp>
+      <p:sp>
+        <p:nvSpPr>
+          <p:cNvPr id="31" name="Shape 14">
+            <a:extLst>
+              <a:ext uri="{FF2B5EF4-FFF2-40B4-BE49-F238E27FC236}">
+                <a16:creationId xmlns:a16="http://schemas.microsoft.com/office/drawing/2014/main" id="{A4B19DFA-2B69-6594-5461-EEFC8056DF88}"/>
+              </a:ext>
+            </a:extLst>
+          </p:cNvPr>
+          <p:cNvSpPr/>
+          <p:nvPr/>
+        </p:nvSpPr>
+        <p:spPr>
+          <a:xfrm>
+            <a:off x="1965960" y="3840480"/>
+            <a:ext cx="2606040" cy="2148840"/>
           </a:xfrm>
           <a:prstGeom prst="roundRect">
             <a:avLst>
-              <a:gd name="adj" fmla="val 4516"/>
+              <a:gd name="adj" fmla="val 3404"/>
             </a:avLst>
           </a:prstGeom>
           <a:solidFill>
             <a:srgbClr val="EEF3FC"/>
           </a:solidFill>
-          <a:ln w="12700">
-            <a:solidFill>
-              <a:srgbClr val="CADCFC"/>
-            </a:solidFill>
-            <a:prstDash val="solid"/>
-          </a:ln>
-        </p:spPr>
-      </p:sp>
-      <p:sp>
-        <p:nvSpPr>
-          <p:cNvPr id="39" name="Text 18">
-            <a:extLst>
-              <a:ext uri="{FF2B5EF4-FFF2-40B4-BE49-F238E27FC236}">
-                <a16:creationId xmlns:a16="http://schemas.microsoft.com/office/drawing/2014/main" id="{214ACB38-42D4-600A-9439-1FF557CC3752}"/>
-              </a:ext>
-            </a:extLst>
-          </p:cNvPr>
-          <p:cNvSpPr/>
-          <p:nvPr/>
-        </p:nvSpPr>
-        <p:spPr>
-          <a:xfrm>
-            <a:off x="3483864" y="3017520"/>
-            <a:ext cx="2386584" cy="320040"/>
+          <a:ln/>
+          <a:effectLst>
+            <a:outerShdw blurRad="63500" dist="25400" dir="5400000" algn="bl" rotWithShape="0">
+              <a:srgbClr val="9AAFD1">
+                <a:alpha val="30000"/>
+              </a:srgbClr>
+            </a:outerShdw>
+          </a:effectLst>
+        </p:spPr>
+      </p:sp>
+      <p:sp>
+        <p:nvSpPr>
+          <p:cNvPr id="33" name="Text 15">
+            <a:extLst>
+              <a:ext uri="{FF2B5EF4-FFF2-40B4-BE49-F238E27FC236}">
+                <a16:creationId xmlns:a16="http://schemas.microsoft.com/office/drawing/2014/main" id="{99648504-F894-89C5-C185-201B879DA761}"/>
+              </a:ext>
+            </a:extLst>
+          </p:cNvPr>
+          <p:cNvSpPr/>
+          <p:nvPr/>
+        </p:nvSpPr>
+        <p:spPr>
+          <a:xfrm>
+            <a:off x="2130552" y="3977640"/>
+            <a:ext cx="2276856" cy="457200"/>
           </a:xfrm>
           <a:prstGeom prst="rect">
             <a:avLst/>
@@ -6334,6 +5113,9 @@
           <a:lstStyle/>
           <a:p>
             <a:pPr marL="0" indent="0">
+              <a:lnSpc>
+                <a:spcPct val="105000"/>
+              </a:lnSpc>
               <a:buNone/>
             </a:pPr>
             <a:r>
@@ -6345,7 +5127,7 @@
                 <a:ea typeface="Calibri" pitchFamily="34" charset="-122"/>
                 <a:cs typeface="Calibri" pitchFamily="34" charset="-120"/>
               </a:rPr>
-              <a:t>FlightOpsService</a:t>
+              <a:t>Logging</a:t>
             </a:r>
             <a:endParaRPr lang="en-US" sz="1250" dirty="0"/>
           </a:p>
@@ -6353,20 +5135,20 @@
       </p:sp>
       <p:sp>
         <p:nvSpPr>
-          <p:cNvPr id="41" name="Text 19">
-            <a:extLst>
-              <a:ext uri="{FF2B5EF4-FFF2-40B4-BE49-F238E27FC236}">
-                <a16:creationId xmlns:a16="http://schemas.microsoft.com/office/drawing/2014/main" id="{C896472A-B9FF-3083-6479-B181ED86F4BF}"/>
-              </a:ext>
-            </a:extLst>
-          </p:cNvPr>
-          <p:cNvSpPr/>
-          <p:nvPr/>
-        </p:nvSpPr>
-        <p:spPr>
-          <a:xfrm>
-            <a:off x="3483864" y="3319272"/>
-            <a:ext cx="2386584" cy="228600"/>
+          <p:cNvPr id="35" name="Text 16">
+            <a:extLst>
+              <a:ext uri="{FF2B5EF4-FFF2-40B4-BE49-F238E27FC236}">
+                <a16:creationId xmlns:a16="http://schemas.microsoft.com/office/drawing/2014/main" id="{ECE9BD83-54A1-BA6B-E069-75BF65B51410}"/>
+              </a:ext>
+            </a:extLst>
+          </p:cNvPr>
+          <p:cNvSpPr/>
+          <p:nvPr/>
+        </p:nvSpPr>
+        <p:spPr>
+          <a:xfrm>
+            <a:off x="2130552" y="4498848"/>
+            <a:ext cx="2276856" cy="1371600"/>
           </a:xfrm>
           <a:prstGeom prst="rect">
             <a:avLst/>
@@ -6378,40 +5160,82 @@
           <a:bodyPr wrap="square" rtlCol="0" anchor="ctr"/>
           <a:lstStyle/>
           <a:p>
-            <a:pPr marL="0" indent="0">
-              <a:buNone/>
-            </a:pPr>
-            <a:r>
-              <a:rPr lang="en-US" sz="900" b="1" dirty="0">
-                <a:solidFill>
-                  <a:srgbClr val="B8791F"/>
+            <a:pPr marL="127000" indent="-127000">
+              <a:lnSpc>
+                <a:spcPct val="115000"/>
+              </a:lnSpc>
+              <a:spcAft>
+                <a:spcPts val="400"/>
+              </a:spcAft>
+              <a:buSzPct val="100000"/>
+              <a:buChar char="●"/>
+            </a:pPr>
+            <a:r>
+              <a:rPr lang="en-US" sz="1050" dirty="0" err="1">
+                <a:solidFill>
+                  <a:srgbClr val="1A2233"/>
                 </a:solidFill>
                 <a:latin typeface="Calibri" pitchFamily="34" charset="0"/>
                 <a:ea typeface="Calibri" pitchFamily="34" charset="-122"/>
                 <a:cs typeface="Calibri" pitchFamily="34" charset="-120"/>
               </a:rPr>
-              <a:t>PORT 5002</a:t>
-            </a:r>
-            <a:endParaRPr lang="en-US" sz="900" dirty="0"/>
-          </a:p>
-        </p:txBody>
-      </p:sp>
-      <p:sp>
-        <p:nvSpPr>
-          <p:cNvPr id="43" name="Text 20">
-            <a:extLst>
-              <a:ext uri="{FF2B5EF4-FFF2-40B4-BE49-F238E27FC236}">
-                <a16:creationId xmlns:a16="http://schemas.microsoft.com/office/drawing/2014/main" id="{73EEEF79-BD16-224C-B7F7-A15CCCC17B9C}"/>
-              </a:ext>
-            </a:extLst>
-          </p:cNvPr>
-          <p:cNvSpPr/>
-          <p:nvPr/>
-        </p:nvSpPr>
-        <p:spPr>
-          <a:xfrm>
-            <a:off x="3483864" y="3593592"/>
-            <a:ext cx="2386584" cy="658368"/>
+              <a:t>Serilog</a:t>
+            </a:r>
+            <a:endParaRPr lang="en-US" sz="1050" dirty="0"/>
+          </a:p>
+        </p:txBody>
+      </p:sp>
+      <p:sp>
+        <p:nvSpPr>
+          <p:cNvPr id="37" name="Shape 17">
+            <a:extLst>
+              <a:ext uri="{FF2B5EF4-FFF2-40B4-BE49-F238E27FC236}">
+                <a16:creationId xmlns:a16="http://schemas.microsoft.com/office/drawing/2014/main" id="{1B9F48A6-75B4-FD1B-9AA7-7F33593DB6B8}"/>
+              </a:ext>
+            </a:extLst>
+          </p:cNvPr>
+          <p:cNvSpPr/>
+          <p:nvPr/>
+        </p:nvSpPr>
+        <p:spPr>
+          <a:xfrm>
+            <a:off x="4846320" y="3840480"/>
+            <a:ext cx="2606040" cy="2148840"/>
+          </a:xfrm>
+          <a:prstGeom prst="roundRect">
+            <a:avLst>
+              <a:gd name="adj" fmla="val 3404"/>
+            </a:avLst>
+          </a:prstGeom>
+          <a:solidFill>
+            <a:srgbClr val="EEF3FC"/>
+          </a:solidFill>
+          <a:ln/>
+          <a:effectLst>
+            <a:outerShdw blurRad="63500" dist="25400" dir="5400000" algn="bl" rotWithShape="0">
+              <a:srgbClr val="9AAFD1">
+                <a:alpha val="30000"/>
+              </a:srgbClr>
+            </a:outerShdw>
+          </a:effectLst>
+        </p:spPr>
+      </p:sp>
+      <p:sp>
+        <p:nvSpPr>
+          <p:cNvPr id="39" name="Text 18">
+            <a:extLst>
+              <a:ext uri="{FF2B5EF4-FFF2-40B4-BE49-F238E27FC236}">
+                <a16:creationId xmlns:a16="http://schemas.microsoft.com/office/drawing/2014/main" id="{0A5282E1-9BD7-AC70-EF52-6D51F8BC42F4}"/>
+              </a:ext>
+            </a:extLst>
+          </p:cNvPr>
+          <p:cNvSpPr/>
+          <p:nvPr/>
+        </p:nvSpPr>
+        <p:spPr>
+          <a:xfrm>
+            <a:off x="5010912" y="3977640"/>
+            <a:ext cx="2276856" cy="457200"/>
           </a:xfrm>
           <a:prstGeom prst="rect">
             <a:avLst/>
@@ -6424,13 +5248,65 @@
           <a:lstStyle/>
           <a:p>
             <a:pPr marL="0" indent="0">
+              <a:lnSpc>
+                <a:spcPct val="105000"/>
+              </a:lnSpc>
+              <a:buNone/>
+            </a:pPr>
+            <a:r>
+              <a:rPr lang="en-US" sz="1250" b="1" dirty="0">
+                <a:solidFill>
+                  <a:srgbClr val="0B1F3A"/>
+                </a:solidFill>
+                <a:latin typeface="Calibri" pitchFamily="34" charset="0"/>
+                <a:ea typeface="Calibri" pitchFamily="34" charset="-122"/>
+                <a:cs typeface="Calibri" pitchFamily="34" charset="-120"/>
+              </a:rPr>
+              <a:t>Payments</a:t>
+            </a:r>
+            <a:endParaRPr lang="en-US" sz="1250" dirty="0"/>
+          </a:p>
+        </p:txBody>
+      </p:sp>
+      <p:sp>
+        <p:nvSpPr>
+          <p:cNvPr id="41" name="Text 19">
+            <a:extLst>
+              <a:ext uri="{FF2B5EF4-FFF2-40B4-BE49-F238E27FC236}">
+                <a16:creationId xmlns:a16="http://schemas.microsoft.com/office/drawing/2014/main" id="{746DB04A-F412-E1E2-8873-891BE87DC391}"/>
+              </a:ext>
+            </a:extLst>
+          </p:cNvPr>
+          <p:cNvSpPr/>
+          <p:nvPr/>
+        </p:nvSpPr>
+        <p:spPr>
+          <a:xfrm>
+            <a:off x="5010912" y="4498848"/>
+            <a:ext cx="2276856" cy="1371600"/>
+          </a:xfrm>
+          <a:prstGeom prst="rect">
+            <a:avLst/>
+          </a:prstGeom>
+          <a:noFill/>
+          <a:ln/>
+        </p:spPr>
+        <p:txBody>
+          <a:bodyPr wrap="square" rtlCol="0" anchor="ctr"/>
+          <a:lstStyle/>
+          <a:p>
+            <a:pPr marL="127000" indent="-127000">
               <a:lnSpc>
                 <a:spcPct val="115000"/>
               </a:lnSpc>
-              <a:buNone/>
-            </a:pPr>
-            <a:r>
-              <a:rPr lang="en-US" sz="1000" dirty="0">
+              <a:spcAft>
+                <a:spcPts val="400"/>
+              </a:spcAft>
+              <a:buSzPct val="100000"/>
+              <a:buChar char="●"/>
+            </a:pPr>
+            <a:r>
+              <a:rPr lang="en-US" sz="1050" dirty="0">
                 <a:solidFill>
                   <a:srgbClr val="1A2233"/>
                 </a:solidFill>
@@ -6438,19 +5314,23 @@
                 <a:ea typeface="Calibri" pitchFamily="34" charset="-122"/>
                 <a:cs typeface="Calibri" pitchFamily="34" charset="-120"/>
               </a:rPr>
-              <a:t>Flights, bookings,</a:t>
-            </a:r>
-            <a:endParaRPr lang="en-US" sz="1000" dirty="0"/>
-          </a:p>
-          <a:p>
-            <a:pPr marL="0" indent="0">
+              <a:t>Razorpay .NET SDK</a:t>
+            </a:r>
+            <a:endParaRPr lang="en-US" sz="1050" dirty="0"/>
+          </a:p>
+          <a:p>
+            <a:pPr marL="127000" indent="-127000">
               <a:lnSpc>
                 <a:spcPct val="115000"/>
               </a:lnSpc>
-              <a:buNone/>
-            </a:pPr>
-            <a:r>
-              <a:rPr lang="en-US" sz="1000" dirty="0">
+              <a:spcAft>
+                <a:spcPts val="400"/>
+              </a:spcAft>
+              <a:buSzPct val="100000"/>
+              <a:buChar char="●"/>
+            </a:pPr>
+            <a:r>
+              <a:rPr lang="en-US" sz="1050" dirty="0">
                 <a:solidFill>
                   <a:srgbClr val="1A2233"/>
                 </a:solidFill>
@@ -6458,91 +5338,63 @@
                 <a:ea typeface="Calibri" pitchFamily="34" charset="-122"/>
                 <a:cs typeface="Calibri" pitchFamily="34" charset="-120"/>
               </a:rPr>
-              <a:t>seats, check-in</a:t>
-            </a:r>
-            <a:endParaRPr lang="en-US" sz="1000" dirty="0"/>
-          </a:p>
-        </p:txBody>
-      </p:sp>
-      <p:sp>
-        <p:nvSpPr>
-          <p:cNvPr id="45" name="Shape 21">
-            <a:extLst>
-              <a:ext uri="{FF2B5EF4-FFF2-40B4-BE49-F238E27FC236}">
-                <a16:creationId xmlns:a16="http://schemas.microsoft.com/office/drawing/2014/main" id="{335BDFCD-FBAF-21BA-BF6C-C185449D724B}"/>
-              </a:ext>
-            </a:extLst>
-          </p:cNvPr>
-          <p:cNvSpPr/>
-          <p:nvPr/>
-        </p:nvSpPr>
-        <p:spPr>
-          <a:xfrm>
-            <a:off x="4677156" y="4325112"/>
-            <a:ext cx="0" cy="201168"/>
-          </a:xfrm>
-          <a:prstGeom prst="line">
-            <a:avLst/>
-          </a:prstGeom>
-          <a:noFill/>
-          <a:ln w="15875">
-            <a:solidFill>
-              <a:srgbClr val="5B6B85"/>
-            </a:solidFill>
-            <a:prstDash val="solid"/>
-            <a:tailEnd type="triangle"/>
-          </a:ln>
-        </p:spPr>
-      </p:sp>
-      <p:sp>
-        <p:nvSpPr>
-          <p:cNvPr id="47" name="Shape 22">
-            <a:extLst>
-              <a:ext uri="{FF2B5EF4-FFF2-40B4-BE49-F238E27FC236}">
-                <a16:creationId xmlns:a16="http://schemas.microsoft.com/office/drawing/2014/main" id="{559D2F30-59F1-ED60-D471-E4977CC88005}"/>
-              </a:ext>
-            </a:extLst>
-          </p:cNvPr>
-          <p:cNvSpPr/>
-          <p:nvPr/>
-        </p:nvSpPr>
-        <p:spPr>
-          <a:xfrm>
-            <a:off x="6208776" y="2907792"/>
-            <a:ext cx="2606040" cy="1417320"/>
+              <a:t>Signature Verification</a:t>
+            </a:r>
+            <a:endParaRPr lang="en-US" sz="1050" dirty="0"/>
+          </a:p>
+        </p:txBody>
+      </p:sp>
+      <p:sp>
+        <p:nvSpPr>
+          <p:cNvPr id="49" name="Shape 23">
+            <a:extLst>
+              <a:ext uri="{FF2B5EF4-FFF2-40B4-BE49-F238E27FC236}">
+                <a16:creationId xmlns:a16="http://schemas.microsoft.com/office/drawing/2014/main" id="{83FB492E-5513-188B-2BBD-8AB7BB792C0E}"/>
+              </a:ext>
+            </a:extLst>
+          </p:cNvPr>
+          <p:cNvSpPr/>
+          <p:nvPr/>
+        </p:nvSpPr>
+        <p:spPr>
+          <a:xfrm>
+            <a:off x="7616952" y="3840480"/>
+            <a:ext cx="2606040" cy="2148840"/>
           </a:xfrm>
           <a:prstGeom prst="roundRect">
             <a:avLst>
-              <a:gd name="adj" fmla="val 4516"/>
+              <a:gd name="adj" fmla="val 3404"/>
             </a:avLst>
           </a:prstGeom>
           <a:solidFill>
             <a:srgbClr val="EEF3FC"/>
           </a:solidFill>
-          <a:ln w="12700">
-            <a:solidFill>
-              <a:srgbClr val="CADCFC"/>
-            </a:solidFill>
-            <a:prstDash val="solid"/>
-          </a:ln>
-        </p:spPr>
-      </p:sp>
-      <p:sp>
-        <p:nvSpPr>
-          <p:cNvPr id="49" name="Text 23">
-            <a:extLst>
-              <a:ext uri="{FF2B5EF4-FFF2-40B4-BE49-F238E27FC236}">
-                <a16:creationId xmlns:a16="http://schemas.microsoft.com/office/drawing/2014/main" id="{1DBFEA2A-6B09-311D-49D0-D1B2DFB3A61A}"/>
-              </a:ext>
-            </a:extLst>
-          </p:cNvPr>
-          <p:cNvSpPr/>
-          <p:nvPr/>
-        </p:nvSpPr>
-        <p:spPr>
-          <a:xfrm>
-            <a:off x="6318504" y="3017520"/>
-            <a:ext cx="2386584" cy="320040"/>
+          <a:ln/>
+          <a:effectLst>
+            <a:outerShdw blurRad="63500" dist="25400" dir="5400000" algn="bl" rotWithShape="0">
+              <a:srgbClr val="9AAFD1">
+                <a:alpha val="30000"/>
+              </a:srgbClr>
+            </a:outerShdw>
+          </a:effectLst>
+        </p:spPr>
+      </p:sp>
+      <p:sp>
+        <p:nvSpPr>
+          <p:cNvPr id="51" name="Text 24">
+            <a:extLst>
+              <a:ext uri="{FF2B5EF4-FFF2-40B4-BE49-F238E27FC236}">
+                <a16:creationId xmlns:a16="http://schemas.microsoft.com/office/drawing/2014/main" id="{0526B59A-B68C-18D1-8152-C54A9D0AF88C}"/>
+              </a:ext>
+            </a:extLst>
+          </p:cNvPr>
+          <p:cNvSpPr/>
+          <p:nvPr/>
+        </p:nvSpPr>
+        <p:spPr>
+          <a:xfrm>
+            <a:off x="7781544" y="3977640"/>
+            <a:ext cx="2276856" cy="457200"/>
           </a:xfrm>
           <a:prstGeom prst="rect">
             <a:avLst/>
@@ -6555,6 +5407,9 @@
           <a:lstStyle/>
           <a:p>
             <a:pPr marL="0" indent="0">
+              <a:lnSpc>
+                <a:spcPct val="105000"/>
+              </a:lnSpc>
               <a:buNone/>
             </a:pPr>
             <a:r>
@@ -6566,7 +5421,7 @@
                 <a:ea typeface="Calibri" pitchFamily="34" charset="-122"/>
                 <a:cs typeface="Calibri" pitchFamily="34" charset="-120"/>
               </a:rPr>
-              <a:t>PaymentService</a:t>
+              <a:t>Quality Assurance</a:t>
             </a:r>
             <a:endParaRPr lang="en-US" sz="1250" dirty="0"/>
           </a:p>
@@ -6574,20 +5429,20 @@
       </p:sp>
       <p:sp>
         <p:nvSpPr>
-          <p:cNvPr id="51" name="Text 24">
-            <a:extLst>
-              <a:ext uri="{FF2B5EF4-FFF2-40B4-BE49-F238E27FC236}">
-                <a16:creationId xmlns:a16="http://schemas.microsoft.com/office/drawing/2014/main" id="{727BE72E-17AC-6122-5056-3F84EEDBAD65}"/>
-              </a:ext>
-            </a:extLst>
-          </p:cNvPr>
-          <p:cNvSpPr/>
-          <p:nvPr/>
-        </p:nvSpPr>
-        <p:spPr>
-          <a:xfrm>
-            <a:off x="6318504" y="3319272"/>
-            <a:ext cx="2386584" cy="228600"/>
+          <p:cNvPr id="53" name="Text 25">
+            <a:extLst>
+              <a:ext uri="{FF2B5EF4-FFF2-40B4-BE49-F238E27FC236}">
+                <a16:creationId xmlns:a16="http://schemas.microsoft.com/office/drawing/2014/main" id="{B75A6F01-D343-7C6D-BA76-309BAF7391B1}"/>
+              </a:ext>
+            </a:extLst>
+          </p:cNvPr>
+          <p:cNvSpPr/>
+          <p:nvPr/>
+        </p:nvSpPr>
+        <p:spPr>
+          <a:xfrm>
+            <a:off x="7781544" y="4498848"/>
+            <a:ext cx="2276856" cy="1371600"/>
           </a:xfrm>
           <a:prstGeom prst="rect">
             <a:avLst/>
@@ -6599,59 +5454,42 @@
           <a:bodyPr wrap="square" rtlCol="0" anchor="ctr"/>
           <a:lstStyle/>
           <a:p>
-            <a:pPr marL="0" indent="0">
-              <a:buNone/>
-            </a:pPr>
-            <a:r>
-              <a:rPr lang="en-US" sz="900" b="1" dirty="0">
-                <a:solidFill>
-                  <a:srgbClr val="B8791F"/>
+            <a:pPr marL="127000" indent="-127000">
+              <a:lnSpc>
+                <a:spcPct val="115000"/>
+              </a:lnSpc>
+              <a:spcAft>
+                <a:spcPts val="400"/>
+              </a:spcAft>
+              <a:buSzPct val="100000"/>
+              <a:buChar char="●"/>
+            </a:pPr>
+            <a:r>
+              <a:rPr lang="en-US" sz="1050" dirty="0">
+                <a:solidFill>
+                  <a:srgbClr val="1A2233"/>
                 </a:solidFill>
                 <a:latin typeface="Calibri" pitchFamily="34" charset="0"/>
                 <a:ea typeface="Calibri" pitchFamily="34" charset="-122"/>
                 <a:cs typeface="Calibri" pitchFamily="34" charset="-120"/>
               </a:rPr>
-              <a:t>PORT 5004</a:t>
-            </a:r>
-            <a:endParaRPr lang="en-US" sz="900" dirty="0"/>
-          </a:p>
-        </p:txBody>
-      </p:sp>
-      <p:sp>
-        <p:nvSpPr>
-          <p:cNvPr id="53" name="Text 25">
-            <a:extLst>
-              <a:ext uri="{FF2B5EF4-FFF2-40B4-BE49-F238E27FC236}">
-                <a16:creationId xmlns:a16="http://schemas.microsoft.com/office/drawing/2014/main" id="{A01D22C4-BB49-00B1-AFCB-7D2CA553DC8F}"/>
-              </a:ext>
-            </a:extLst>
-          </p:cNvPr>
-          <p:cNvSpPr/>
-          <p:nvPr/>
-        </p:nvSpPr>
-        <p:spPr>
-          <a:xfrm>
-            <a:off x="6318504" y="3593592"/>
-            <a:ext cx="2386584" cy="658368"/>
-          </a:xfrm>
-          <a:prstGeom prst="rect">
-            <a:avLst/>
-          </a:prstGeom>
-          <a:noFill/>
-          <a:ln/>
-        </p:spPr>
-        <p:txBody>
-          <a:bodyPr wrap="square" rtlCol="0" anchor="ctr"/>
-          <a:lstStyle/>
-          <a:p>
-            <a:pPr marL="0" indent="0">
+              <a:t>xUnit</a:t>
+            </a:r>
+            <a:endParaRPr lang="en-US" sz="1050" dirty="0"/>
+          </a:p>
+          <a:p>
+            <a:pPr marL="127000" indent="-127000">
               <a:lnSpc>
                 <a:spcPct val="115000"/>
               </a:lnSpc>
-              <a:buNone/>
-            </a:pPr>
-            <a:r>
-              <a:rPr lang="en-US" sz="1000" dirty="0">
+              <a:spcAft>
+                <a:spcPts val="400"/>
+              </a:spcAft>
+              <a:buSzPct val="100000"/>
+              <a:buChar char="●"/>
+            </a:pPr>
+            <a:r>
+              <a:rPr lang="en-US" sz="1050" dirty="0">
                 <a:solidFill>
                   <a:srgbClr val="1A2233"/>
                 </a:solidFill>
@@ -6659,586 +5497,16 @@
                 <a:ea typeface="Calibri" pitchFamily="34" charset="-122"/>
                 <a:cs typeface="Calibri" pitchFamily="34" charset="-120"/>
               </a:rPr>
-              <a:t>Razorpay orders,</a:t>
-            </a:r>
-            <a:endParaRPr lang="en-US" sz="1000" dirty="0"/>
-          </a:p>
-          <a:p>
-            <a:pPr marL="0" indent="0">
-              <a:lnSpc>
-                <a:spcPct val="115000"/>
-              </a:lnSpc>
-              <a:buNone/>
-            </a:pPr>
-            <a:r>
-              <a:rPr lang="en-US" sz="1000" dirty="0">
-                <a:solidFill>
-                  <a:srgbClr val="1A2233"/>
-                </a:solidFill>
-                <a:latin typeface="Calibri" pitchFamily="34" charset="0"/>
-                <a:ea typeface="Calibri" pitchFamily="34" charset="-122"/>
-                <a:cs typeface="Calibri" pitchFamily="34" charset="-120"/>
-              </a:rPr>
-              <a:t>verification, refunds</a:t>
-            </a:r>
-            <a:endParaRPr lang="en-US" sz="1000" dirty="0"/>
-          </a:p>
-        </p:txBody>
-      </p:sp>
-      <p:sp>
-        <p:nvSpPr>
-          <p:cNvPr id="55" name="Shape 26">
-            <a:extLst>
-              <a:ext uri="{FF2B5EF4-FFF2-40B4-BE49-F238E27FC236}">
-                <a16:creationId xmlns:a16="http://schemas.microsoft.com/office/drawing/2014/main" id="{7A0DCD89-9F85-5218-DB15-79112FF7CB8C}"/>
-              </a:ext>
-            </a:extLst>
-          </p:cNvPr>
-          <p:cNvSpPr/>
-          <p:nvPr/>
-        </p:nvSpPr>
-        <p:spPr>
-          <a:xfrm>
-            <a:off x="7511796" y="4325112"/>
-            <a:ext cx="0" cy="201168"/>
-          </a:xfrm>
-          <a:prstGeom prst="line">
-            <a:avLst/>
-          </a:prstGeom>
-          <a:noFill/>
-          <a:ln w="15875">
-            <a:solidFill>
-              <a:srgbClr val="5B6B85"/>
-            </a:solidFill>
-            <a:prstDash val="solid"/>
-            <a:tailEnd type="triangle"/>
-          </a:ln>
-        </p:spPr>
-      </p:sp>
-      <p:sp>
-        <p:nvSpPr>
-          <p:cNvPr id="57" name="Shape 27">
-            <a:extLst>
-              <a:ext uri="{FF2B5EF4-FFF2-40B4-BE49-F238E27FC236}">
-                <a16:creationId xmlns:a16="http://schemas.microsoft.com/office/drawing/2014/main" id="{CEA2B53E-5AA1-9530-8893-C2C9FB742FB1}"/>
-              </a:ext>
-            </a:extLst>
-          </p:cNvPr>
-          <p:cNvSpPr/>
-          <p:nvPr/>
-        </p:nvSpPr>
-        <p:spPr>
-          <a:xfrm>
-            <a:off x="9043416" y="2907792"/>
-            <a:ext cx="2606040" cy="1417320"/>
-          </a:xfrm>
-          <a:prstGeom prst="roundRect">
-            <a:avLst>
-              <a:gd name="adj" fmla="val 4516"/>
-            </a:avLst>
-          </a:prstGeom>
-          <a:solidFill>
-            <a:srgbClr val="EEF3FC"/>
-          </a:solidFill>
-          <a:ln w="12700">
-            <a:solidFill>
-              <a:srgbClr val="CADCFC"/>
-            </a:solidFill>
-            <a:prstDash val="solid"/>
-          </a:ln>
-        </p:spPr>
-      </p:sp>
-      <p:sp>
-        <p:nvSpPr>
-          <p:cNvPr id="59" name="Text 28">
-            <a:extLst>
-              <a:ext uri="{FF2B5EF4-FFF2-40B4-BE49-F238E27FC236}">
-                <a16:creationId xmlns:a16="http://schemas.microsoft.com/office/drawing/2014/main" id="{FD75E54F-417F-3C96-1520-71F8107DB278}"/>
-              </a:ext>
-            </a:extLst>
-          </p:cNvPr>
-          <p:cNvSpPr/>
-          <p:nvPr/>
-        </p:nvSpPr>
-        <p:spPr>
-          <a:xfrm>
-            <a:off x="9153144" y="3017520"/>
-            <a:ext cx="2386584" cy="320040"/>
-          </a:xfrm>
-          <a:prstGeom prst="rect">
-            <a:avLst/>
-          </a:prstGeom>
-          <a:noFill/>
-          <a:ln/>
-        </p:spPr>
-        <p:txBody>
-          <a:bodyPr wrap="square" rtlCol="0" anchor="ctr"/>
-          <a:lstStyle/>
-          <a:p>
-            <a:pPr marL="0" indent="0">
-              <a:buNone/>
-            </a:pPr>
-            <a:r>
-              <a:rPr lang="en-US" sz="1250" b="1" dirty="0">
-                <a:solidFill>
-                  <a:srgbClr val="0B1F3A"/>
-                </a:solidFill>
-                <a:latin typeface="Calibri" pitchFamily="34" charset="0"/>
-                <a:ea typeface="Calibri" pitchFamily="34" charset="-122"/>
-                <a:cs typeface="Calibri" pitchFamily="34" charset="-120"/>
-              </a:rPr>
-              <a:t>PassengerService</a:t>
-            </a:r>
-            <a:endParaRPr lang="en-US" sz="1250" dirty="0"/>
-          </a:p>
-        </p:txBody>
-      </p:sp>
-      <p:sp>
-        <p:nvSpPr>
-          <p:cNvPr id="61" name="Text 29">
-            <a:extLst>
-              <a:ext uri="{FF2B5EF4-FFF2-40B4-BE49-F238E27FC236}">
-                <a16:creationId xmlns:a16="http://schemas.microsoft.com/office/drawing/2014/main" id="{E62B0F33-4572-2C45-7D18-97DECC3F10C5}"/>
-              </a:ext>
-            </a:extLst>
-          </p:cNvPr>
-          <p:cNvSpPr/>
-          <p:nvPr/>
-        </p:nvSpPr>
-        <p:spPr>
-          <a:xfrm>
-            <a:off x="9153144" y="3319272"/>
-            <a:ext cx="2386584" cy="228600"/>
-          </a:xfrm>
-          <a:prstGeom prst="rect">
-            <a:avLst/>
-          </a:prstGeom>
-          <a:noFill/>
-          <a:ln/>
-        </p:spPr>
-        <p:txBody>
-          <a:bodyPr wrap="square" rtlCol="0" anchor="ctr"/>
-          <a:lstStyle/>
-          <a:p>
-            <a:pPr marL="0" indent="0">
-              <a:buNone/>
-            </a:pPr>
-            <a:r>
-              <a:rPr lang="en-US" sz="900" b="1" dirty="0">
-                <a:solidFill>
-                  <a:srgbClr val="B8791F"/>
-                </a:solidFill>
-                <a:latin typeface="Calibri" pitchFamily="34" charset="0"/>
-                <a:ea typeface="Calibri" pitchFamily="34" charset="-122"/>
-                <a:cs typeface="Calibri" pitchFamily="34" charset="-120"/>
-              </a:rPr>
-              <a:t>PORT 5007</a:t>
-            </a:r>
-            <a:endParaRPr lang="en-US" sz="900" dirty="0"/>
-          </a:p>
-        </p:txBody>
-      </p:sp>
-      <p:sp>
-        <p:nvSpPr>
-          <p:cNvPr id="63" name="Text 30">
-            <a:extLst>
-              <a:ext uri="{FF2B5EF4-FFF2-40B4-BE49-F238E27FC236}">
-                <a16:creationId xmlns:a16="http://schemas.microsoft.com/office/drawing/2014/main" id="{07CDE8E5-A321-70F5-5C27-E9E37D5AEFB4}"/>
-              </a:ext>
-            </a:extLst>
-          </p:cNvPr>
-          <p:cNvSpPr/>
-          <p:nvPr/>
-        </p:nvSpPr>
-        <p:spPr>
-          <a:xfrm>
-            <a:off x="9153144" y="3593592"/>
-            <a:ext cx="2386584" cy="658368"/>
-          </a:xfrm>
-          <a:prstGeom prst="rect">
-            <a:avLst/>
-          </a:prstGeom>
-          <a:noFill/>
-          <a:ln/>
-        </p:spPr>
-        <p:txBody>
-          <a:bodyPr wrap="square" rtlCol="0" anchor="ctr"/>
-          <a:lstStyle/>
-          <a:p>
-            <a:pPr marL="0" indent="0">
-              <a:lnSpc>
-                <a:spcPct val="115000"/>
-              </a:lnSpc>
-              <a:buNone/>
-            </a:pPr>
-            <a:r>
-              <a:rPr lang="en-US" sz="1000" dirty="0">
-                <a:solidFill>
-                  <a:srgbClr val="1A2233"/>
-                </a:solidFill>
-                <a:latin typeface="Calibri" pitchFamily="34" charset="0"/>
-                <a:ea typeface="Calibri" pitchFamily="34" charset="-122"/>
-                <a:cs typeface="Calibri" pitchFamily="34" charset="-120"/>
-              </a:rPr>
-              <a:t>Identity, OTP,</a:t>
-            </a:r>
-            <a:endParaRPr lang="en-US" sz="1000" dirty="0"/>
-          </a:p>
-          <a:p>
-            <a:pPr marL="0" indent="0">
-              <a:lnSpc>
-                <a:spcPct val="115000"/>
-              </a:lnSpc>
-              <a:buNone/>
-            </a:pPr>
-            <a:r>
-              <a:rPr lang="en-US" sz="1000" dirty="0">
-                <a:solidFill>
-                  <a:srgbClr val="1A2233"/>
-                </a:solidFill>
-                <a:latin typeface="Calibri" pitchFamily="34" charset="0"/>
-                <a:ea typeface="Calibri" pitchFamily="34" charset="-122"/>
-                <a:cs typeface="Calibri" pitchFamily="34" charset="-120"/>
-              </a:rPr>
-              <a:t>companion profiles</a:t>
-            </a:r>
-            <a:endParaRPr lang="en-US" sz="1000" dirty="0"/>
-          </a:p>
-        </p:txBody>
-      </p:sp>
-      <p:sp>
-        <p:nvSpPr>
-          <p:cNvPr id="65" name="Shape 31">
-            <a:extLst>
-              <a:ext uri="{FF2B5EF4-FFF2-40B4-BE49-F238E27FC236}">
-                <a16:creationId xmlns:a16="http://schemas.microsoft.com/office/drawing/2014/main" id="{657F8075-8798-24F1-F8B7-2E9B4128033B}"/>
-              </a:ext>
-            </a:extLst>
-          </p:cNvPr>
-          <p:cNvSpPr/>
-          <p:nvPr/>
-        </p:nvSpPr>
-        <p:spPr>
-          <a:xfrm>
-            <a:off x="10346436" y="4325112"/>
-            <a:ext cx="0" cy="201168"/>
-          </a:xfrm>
-          <a:prstGeom prst="line">
-            <a:avLst/>
-          </a:prstGeom>
-          <a:noFill/>
-          <a:ln w="15875">
-            <a:solidFill>
-              <a:srgbClr val="5B6B85"/>
-            </a:solidFill>
-            <a:prstDash val="solid"/>
-            <a:tailEnd type="triangle"/>
-          </a:ln>
-        </p:spPr>
-      </p:sp>
-      <p:sp>
-        <p:nvSpPr>
-          <p:cNvPr id="67" name="Shape 32">
-            <a:extLst>
-              <a:ext uri="{FF2B5EF4-FFF2-40B4-BE49-F238E27FC236}">
-                <a16:creationId xmlns:a16="http://schemas.microsoft.com/office/drawing/2014/main" id="{1F8EF186-A39E-1BF9-E92D-6C62C287BF09}"/>
-              </a:ext>
-            </a:extLst>
-          </p:cNvPr>
-          <p:cNvSpPr/>
-          <p:nvPr/>
-        </p:nvSpPr>
-        <p:spPr>
-          <a:xfrm>
-            <a:off x="539496" y="4526280"/>
-            <a:ext cx="2606040" cy="457200"/>
-          </a:xfrm>
-          <a:prstGeom prst="roundRect">
-            <a:avLst>
-              <a:gd name="adj" fmla="val 70000"/>
-            </a:avLst>
-          </a:prstGeom>
-          <a:solidFill>
-            <a:schemeClr val="accent2"/>
-          </a:solidFill>
-          <a:ln/>
-        </p:spPr>
-        <p:txBody>
-          <a:bodyPr/>
-          <a:lstStyle/>
-          <a:p>
-            <a:endParaRPr lang="en-IN"/>
-          </a:p>
-        </p:txBody>
-      </p:sp>
-      <p:sp>
-        <p:nvSpPr>
-          <p:cNvPr id="69" name="Text 33">
-            <a:extLst>
-              <a:ext uri="{FF2B5EF4-FFF2-40B4-BE49-F238E27FC236}">
-                <a16:creationId xmlns:a16="http://schemas.microsoft.com/office/drawing/2014/main" id="{1FB87219-6B02-1699-405B-34F706B5A0FF}"/>
-              </a:ext>
-            </a:extLst>
-          </p:cNvPr>
-          <p:cNvSpPr/>
-          <p:nvPr/>
-        </p:nvSpPr>
-        <p:spPr>
-          <a:xfrm>
-            <a:off x="612648" y="4526280"/>
-            <a:ext cx="2459736" cy="457200"/>
-          </a:xfrm>
-          <a:prstGeom prst="rect">
-            <a:avLst/>
-          </a:prstGeom>
-          <a:noFill/>
-          <a:ln/>
-        </p:spPr>
-        <p:txBody>
-          <a:bodyPr wrap="square" rtlCol="0" anchor="ctr"/>
-          <a:lstStyle/>
-          <a:p>
-            <a:pPr marL="0" indent="0" algn="ctr">
-              <a:buNone/>
-            </a:pPr>
-            <a:r>
-              <a:rPr lang="en-US" sz="950" b="1" dirty="0">
-                <a:solidFill>
-                  <a:srgbClr val="CADCFC"/>
-                </a:solidFill>
-                <a:latin typeface="Calibri" pitchFamily="34" charset="0"/>
-                <a:ea typeface="Calibri" pitchFamily="34" charset="-122"/>
-                <a:cs typeface="Calibri" pitchFamily="34" charset="-120"/>
-              </a:rPr>
-              <a:t>Airline_ BackOfficeDB</a:t>
-            </a:r>
-            <a:endParaRPr lang="en-US" sz="950" dirty="0"/>
-          </a:p>
-        </p:txBody>
-      </p:sp>
-      <p:sp>
-        <p:nvSpPr>
-          <p:cNvPr id="71" name="Shape 34">
-            <a:extLst>
-              <a:ext uri="{FF2B5EF4-FFF2-40B4-BE49-F238E27FC236}">
-                <a16:creationId xmlns:a16="http://schemas.microsoft.com/office/drawing/2014/main" id="{3B9387F3-7B97-4368-FA1A-924B02969144}"/>
-              </a:ext>
-            </a:extLst>
-          </p:cNvPr>
-          <p:cNvSpPr/>
-          <p:nvPr/>
-        </p:nvSpPr>
-        <p:spPr>
-          <a:xfrm>
-            <a:off x="3374136" y="4526280"/>
-            <a:ext cx="2606040" cy="457200"/>
-          </a:xfrm>
-          <a:prstGeom prst="roundRect">
-            <a:avLst>
-              <a:gd name="adj" fmla="val 70000"/>
-            </a:avLst>
-          </a:prstGeom>
-          <a:solidFill>
-            <a:schemeClr val="accent2"/>
-          </a:solidFill>
-          <a:ln/>
-        </p:spPr>
-      </p:sp>
-      <p:sp>
-        <p:nvSpPr>
-          <p:cNvPr id="73" name="Text 35">
-            <a:extLst>
-              <a:ext uri="{FF2B5EF4-FFF2-40B4-BE49-F238E27FC236}">
-                <a16:creationId xmlns:a16="http://schemas.microsoft.com/office/drawing/2014/main" id="{9AF20075-D527-45AB-9D52-4D2D6C4D6BF3}"/>
-              </a:ext>
-            </a:extLst>
-          </p:cNvPr>
-          <p:cNvSpPr/>
-          <p:nvPr/>
-        </p:nvSpPr>
-        <p:spPr>
-          <a:xfrm>
-            <a:off x="3447288" y="4526280"/>
-            <a:ext cx="2459736" cy="457200"/>
-          </a:xfrm>
-          <a:prstGeom prst="rect">
-            <a:avLst/>
-          </a:prstGeom>
-          <a:noFill/>
-          <a:ln/>
-        </p:spPr>
-        <p:txBody>
-          <a:bodyPr wrap="square" rtlCol="0" anchor="ctr"/>
-          <a:lstStyle/>
-          <a:p>
-            <a:pPr marL="0" indent="0" algn="ctr">
-              <a:buNone/>
-            </a:pPr>
-            <a:r>
-              <a:rPr lang="en-US" sz="950" b="1" dirty="0">
-                <a:solidFill>
-                  <a:srgbClr val="CADCFC"/>
-                </a:solidFill>
-                <a:latin typeface="Calibri" pitchFamily="34" charset="0"/>
-                <a:ea typeface="Calibri" pitchFamily="34" charset="-122"/>
-                <a:cs typeface="Calibri" pitchFamily="34" charset="-120"/>
-              </a:rPr>
-              <a:t>Airline_ FlightOpsDB</a:t>
-            </a:r>
-            <a:endParaRPr lang="en-US" sz="950" dirty="0"/>
-          </a:p>
-        </p:txBody>
-      </p:sp>
-      <p:sp>
-        <p:nvSpPr>
-          <p:cNvPr id="75" name="Shape 36">
-            <a:extLst>
-              <a:ext uri="{FF2B5EF4-FFF2-40B4-BE49-F238E27FC236}">
-                <a16:creationId xmlns:a16="http://schemas.microsoft.com/office/drawing/2014/main" id="{9B103F5E-DF8F-82DE-B49D-E9BFDCF69ED4}"/>
-              </a:ext>
-            </a:extLst>
-          </p:cNvPr>
-          <p:cNvSpPr/>
-          <p:nvPr/>
-        </p:nvSpPr>
-        <p:spPr>
-          <a:xfrm>
-            <a:off x="6208776" y="4526280"/>
-            <a:ext cx="2606040" cy="457200"/>
-          </a:xfrm>
-          <a:prstGeom prst="roundRect">
-            <a:avLst>
-              <a:gd name="adj" fmla="val 70000"/>
-            </a:avLst>
-          </a:prstGeom>
-          <a:solidFill>
-            <a:schemeClr val="accent2"/>
-          </a:solidFill>
-          <a:ln/>
-        </p:spPr>
-      </p:sp>
-      <p:sp>
-        <p:nvSpPr>
-          <p:cNvPr id="77" name="Text 37">
-            <a:extLst>
-              <a:ext uri="{FF2B5EF4-FFF2-40B4-BE49-F238E27FC236}">
-                <a16:creationId xmlns:a16="http://schemas.microsoft.com/office/drawing/2014/main" id="{716BD4E6-A3AC-8AEE-2C3F-0B39B6B7F4E3}"/>
-              </a:ext>
-            </a:extLst>
-          </p:cNvPr>
-          <p:cNvSpPr/>
-          <p:nvPr/>
-        </p:nvSpPr>
-        <p:spPr>
-          <a:xfrm>
-            <a:off x="6281928" y="4526280"/>
-            <a:ext cx="2459736" cy="457200"/>
-          </a:xfrm>
-          <a:prstGeom prst="rect">
-            <a:avLst/>
-          </a:prstGeom>
-          <a:noFill/>
-          <a:ln/>
-        </p:spPr>
-        <p:txBody>
-          <a:bodyPr wrap="square" rtlCol="0" anchor="ctr"/>
-          <a:lstStyle/>
-          <a:p>
-            <a:pPr marL="0" indent="0" algn="ctr">
-              <a:buNone/>
-            </a:pPr>
-            <a:r>
-              <a:rPr lang="en-US" sz="950" b="1" dirty="0">
-                <a:solidFill>
-                  <a:srgbClr val="CADCFC"/>
-                </a:solidFill>
-                <a:latin typeface="Calibri" pitchFamily="34" charset="0"/>
-                <a:ea typeface="Calibri" pitchFamily="34" charset="-122"/>
-                <a:cs typeface="Calibri" pitchFamily="34" charset="-120"/>
-              </a:rPr>
-              <a:t>Airline_ PaymentDB</a:t>
-            </a:r>
-            <a:endParaRPr lang="en-US" sz="950" dirty="0"/>
-          </a:p>
-        </p:txBody>
-      </p:sp>
-      <p:sp>
-        <p:nvSpPr>
-          <p:cNvPr id="79" name="Shape 38">
-            <a:extLst>
-              <a:ext uri="{FF2B5EF4-FFF2-40B4-BE49-F238E27FC236}">
-                <a16:creationId xmlns:a16="http://schemas.microsoft.com/office/drawing/2014/main" id="{843DD914-70FC-A0C6-72B6-21682EBC0DDE}"/>
-              </a:ext>
-            </a:extLst>
-          </p:cNvPr>
-          <p:cNvSpPr/>
-          <p:nvPr/>
-        </p:nvSpPr>
-        <p:spPr>
-          <a:xfrm>
-            <a:off x="9043416" y="4526280"/>
-            <a:ext cx="2606040" cy="457200"/>
-          </a:xfrm>
-          <a:prstGeom prst="roundRect">
-            <a:avLst>
-              <a:gd name="adj" fmla="val 70000"/>
-            </a:avLst>
-          </a:prstGeom>
-          <a:solidFill>
-            <a:schemeClr val="accent2"/>
-          </a:solidFill>
-          <a:ln/>
-        </p:spPr>
-      </p:sp>
-      <p:sp>
-        <p:nvSpPr>
-          <p:cNvPr id="81" name="Text 39">
-            <a:extLst>
-              <a:ext uri="{FF2B5EF4-FFF2-40B4-BE49-F238E27FC236}">
-                <a16:creationId xmlns:a16="http://schemas.microsoft.com/office/drawing/2014/main" id="{4D3797B6-47B3-BF7B-3FC7-5EBAF1E091B2}"/>
-              </a:ext>
-            </a:extLst>
-          </p:cNvPr>
-          <p:cNvSpPr/>
-          <p:nvPr/>
-        </p:nvSpPr>
-        <p:spPr>
-          <a:xfrm>
-            <a:off x="9116568" y="4526280"/>
-            <a:ext cx="2459736" cy="457200"/>
-          </a:xfrm>
-          <a:prstGeom prst="rect">
-            <a:avLst/>
-          </a:prstGeom>
-          <a:noFill/>
-          <a:ln/>
-        </p:spPr>
-        <p:txBody>
-          <a:bodyPr wrap="square" rtlCol="0" anchor="ctr"/>
-          <a:lstStyle/>
-          <a:p>
-            <a:pPr marL="0" indent="0" algn="ctr">
-              <a:buNone/>
-            </a:pPr>
-            <a:r>
-              <a:rPr lang="en-US" sz="950" b="1" dirty="0">
-                <a:solidFill>
-                  <a:srgbClr val="CADCFC"/>
-                </a:solidFill>
-                <a:latin typeface="Calibri" pitchFamily="34" charset="0"/>
-                <a:ea typeface="Calibri" pitchFamily="34" charset="-122"/>
-                <a:cs typeface="Calibri" pitchFamily="34" charset="-120"/>
-              </a:rPr>
-              <a:t>Airline_ PassengerDB</a:t>
-            </a:r>
-            <a:endParaRPr lang="en-US" sz="950" dirty="0"/>
+              <a:t>Moq</a:t>
+            </a:r>
+            <a:endParaRPr lang="en-US" sz="1050" dirty="0"/>
           </a:p>
         </p:txBody>
       </p:sp>
     </p:spTree>
     <p:extLst>
       <p:ext uri="{BB962C8B-B14F-4D97-AF65-F5344CB8AC3E}">
-        <p14:creationId xmlns:p14="http://schemas.microsoft.com/office/powerpoint/2010/main" val="2970446841"/>
+        <p14:creationId xmlns:p14="http://schemas.microsoft.com/office/powerpoint/2010/main" val="116021255"/>
       </p:ext>
     </p:extLst>
   </p:cSld>
@@ -7270,17 +5538,17 @@
           <p:cNvPr id="3" name="Text 0">
             <a:extLst>
               <a:ext uri="{FF2B5EF4-FFF2-40B4-BE49-F238E27FC236}">
-                <a16:creationId xmlns:a16="http://schemas.microsoft.com/office/drawing/2014/main" id="{ABA8438D-DD4C-7B22-44F4-28A28416205E}"/>
-              </a:ext>
-            </a:extLst>
-          </p:cNvPr>
-          <p:cNvSpPr/>
-          <p:nvPr/>
-        </p:nvSpPr>
-        <p:spPr>
-          <a:xfrm>
-            <a:off x="548640" y="365760"/>
-            <a:ext cx="11064240" cy="640080"/>
+                <a16:creationId xmlns:a16="http://schemas.microsoft.com/office/drawing/2014/main" id="{7746176D-5064-32A1-9212-D2B667516938}"/>
+              </a:ext>
+            </a:extLst>
+          </p:cNvPr>
+          <p:cNvSpPr/>
+          <p:nvPr/>
+        </p:nvSpPr>
+        <p:spPr>
+          <a:xfrm>
+            <a:off x="640080" y="320040"/>
+            <a:ext cx="9144000" cy="548640"/>
           </a:xfrm>
           <a:prstGeom prst="rect">
             <a:avLst/>
@@ -7292,19 +5560,19 @@
           <a:bodyPr wrap="square" rtlCol="0" anchor="ctr"/>
           <a:lstStyle/>
           <a:p>
-            <a:pPr marL="0" indent="0" algn="l">
+            <a:pPr marL="0" indent="0" algn="ctr">
               <a:buNone/>
             </a:pPr>
             <a:r>
               <a:rPr lang="en-US" sz="3000" b="1" dirty="0">
                 <a:solidFill>
-                  <a:srgbClr val="1E2761"/>
+                  <a:srgbClr val="0B1F3A"/>
                 </a:solidFill>
                 <a:latin typeface="Cambria" pitchFamily="34" charset="0"/>
                 <a:ea typeface="Cambria" pitchFamily="34" charset="-122"/>
                 <a:cs typeface="Cambria" pitchFamily="34" charset="-120"/>
               </a:rPr>
-              <a:t>Shared Common Infrastructure</a:t>
+              <a:t>System Architecture</a:t>
             </a:r>
             <a:endParaRPr lang="en-US" sz="3000" dirty="0"/>
           </a:p>
@@ -7315,17 +5583,17 @@
           <p:cNvPr id="5" name="Text 1">
             <a:extLst>
               <a:ext uri="{FF2B5EF4-FFF2-40B4-BE49-F238E27FC236}">
-                <a16:creationId xmlns:a16="http://schemas.microsoft.com/office/drawing/2014/main" id="{B2886291-7C6B-49F2-DBAC-449710161ABE}"/>
-              </a:ext>
-            </a:extLst>
-          </p:cNvPr>
-          <p:cNvSpPr/>
-          <p:nvPr/>
-        </p:nvSpPr>
-        <p:spPr>
-          <a:xfrm>
-            <a:off x="548640" y="932688"/>
-            <a:ext cx="11064240" cy="365760"/>
+                <a16:creationId xmlns:a16="http://schemas.microsoft.com/office/drawing/2014/main" id="{56FD4DD2-ED52-36CC-2B8B-AC1473395312}"/>
+              </a:ext>
+            </a:extLst>
+          </p:cNvPr>
+          <p:cNvSpPr/>
+          <p:nvPr/>
+        </p:nvSpPr>
+        <p:spPr>
+          <a:xfrm>
+            <a:off x="640080" y="868680"/>
+            <a:ext cx="10881360" cy="365760"/>
           </a:xfrm>
           <a:prstGeom prst="rect">
             <a:avLst/>
@@ -7337,21 +5605,21 @@
           <a:bodyPr wrap="square" rtlCol="0" anchor="ctr"/>
           <a:lstStyle/>
           <a:p>
-            <a:pPr marL="0" indent="0" algn="l">
-              <a:buNone/>
-            </a:pPr>
-            <a:r>
-              <a:rPr lang="en-US" sz="1350" i="1" dirty="0">
-                <a:solidFill>
-                  <a:srgbClr val="5B6172"/>
+            <a:pPr marL="0" indent="0">
+              <a:buNone/>
+            </a:pPr>
+            <a:r>
+              <a:rPr lang="en-US" sz="1250" dirty="0">
+                <a:solidFill>
+                  <a:srgbClr val="5B6B85"/>
                 </a:solidFill>
                 <a:latin typeface="Calibri" pitchFamily="34" charset="0"/>
                 <a:ea typeface="Calibri" pitchFamily="34" charset="-122"/>
                 <a:cs typeface="Calibri" pitchFamily="34" charset="-120"/>
               </a:rPr>
-              <a:t>Reusable base entities, security helpers &amp; domain enums used across all four services</a:t>
-            </a:r>
-            <a:endParaRPr lang="en-US" sz="1350" dirty="0"/>
+              <a:t>Microservices architecture with the Database-per-Service pattern for domain autonomy and zero cross-database locking.</a:t>
+            </a:r>
+            <a:endParaRPr lang="en-US" sz="1250" dirty="0"/>
           </a:p>
         </p:txBody>
       </p:sp>
@@ -7360,50 +5628,409 @@
           <p:cNvPr id="7" name="Shape 2">
             <a:extLst>
               <a:ext uri="{FF2B5EF4-FFF2-40B4-BE49-F238E27FC236}">
-                <a16:creationId xmlns:a16="http://schemas.microsoft.com/office/drawing/2014/main" id="{08109F90-7D7B-B1F3-C506-115ED8795C4C}"/>
-              </a:ext>
-            </a:extLst>
-          </p:cNvPr>
-          <p:cNvSpPr/>
-          <p:nvPr/>
-        </p:nvSpPr>
-        <p:spPr>
-          <a:xfrm>
-            <a:off x="548640" y="1600200"/>
-            <a:ext cx="6675120" cy="1417320"/>
+                <a16:creationId xmlns:a16="http://schemas.microsoft.com/office/drawing/2014/main" id="{844E42B4-B0F6-7940-679D-358D2BDCBD61}"/>
+              </a:ext>
+            </a:extLst>
+          </p:cNvPr>
+          <p:cNvSpPr/>
+          <p:nvPr/>
+        </p:nvSpPr>
+        <p:spPr>
+          <a:xfrm>
+            <a:off x="973836" y="1417320"/>
+            <a:ext cx="3200400" cy="502920"/>
           </a:xfrm>
           <a:prstGeom prst="roundRect">
             <a:avLst>
-              <a:gd name="adj" fmla="val 5161"/>
+              <a:gd name="adj" fmla="val 10909"/>
             </a:avLst>
           </a:prstGeom>
           <a:solidFill>
-            <a:srgbClr val="EEF3FD"/>
+            <a:srgbClr val="0B1F3A"/>
+          </a:solidFill>
+          <a:ln/>
+        </p:spPr>
+      </p:sp>
+      <p:sp>
+        <p:nvSpPr>
+          <p:cNvPr id="9" name="Text 3">
+            <a:extLst>
+              <a:ext uri="{FF2B5EF4-FFF2-40B4-BE49-F238E27FC236}">
+                <a16:creationId xmlns:a16="http://schemas.microsoft.com/office/drawing/2014/main" id="{E310A358-D790-D1D0-1415-1B2EE3781EBC}"/>
+              </a:ext>
+            </a:extLst>
+          </p:cNvPr>
+          <p:cNvSpPr/>
+          <p:nvPr/>
+        </p:nvSpPr>
+        <p:spPr>
+          <a:xfrm>
+            <a:off x="973836" y="1417320"/>
+            <a:ext cx="3200400" cy="502920"/>
+          </a:xfrm>
+          <a:prstGeom prst="rect">
+            <a:avLst/>
+          </a:prstGeom>
+          <a:noFill/>
+          <a:ln/>
+        </p:spPr>
+        <p:txBody>
+          <a:bodyPr wrap="square" rtlCol="0" anchor="ctr"/>
+          <a:lstStyle/>
+          <a:p>
+            <a:pPr marL="0" indent="0" algn="ctr">
+              <a:buNone/>
+            </a:pPr>
+            <a:r>
+              <a:rPr lang="en-US" sz="1150" b="1" dirty="0">
+                <a:solidFill>
+                  <a:srgbClr val="FFFFFF"/>
+                </a:solidFill>
+                <a:latin typeface="Calibri" pitchFamily="34" charset="0"/>
+                <a:ea typeface="Calibri" pitchFamily="34" charset="-122"/>
+                <a:cs typeface="Calibri" pitchFamily="34" charset="-120"/>
+              </a:rPr>
+              <a:t>Passenger Web Portal</a:t>
+            </a:r>
+            <a:endParaRPr lang="en-US" sz="1150" dirty="0"/>
+          </a:p>
+        </p:txBody>
+      </p:sp>
+      <p:sp>
+        <p:nvSpPr>
+          <p:cNvPr id="11" name="Shape 4">
+            <a:extLst>
+              <a:ext uri="{FF2B5EF4-FFF2-40B4-BE49-F238E27FC236}">
+                <a16:creationId xmlns:a16="http://schemas.microsoft.com/office/drawing/2014/main" id="{0974057E-8A18-44B8-5895-611CA93D2B48}"/>
+              </a:ext>
+            </a:extLst>
+          </p:cNvPr>
+          <p:cNvSpPr/>
+          <p:nvPr/>
+        </p:nvSpPr>
+        <p:spPr>
+          <a:xfrm>
+            <a:off x="4494276" y="1417320"/>
+            <a:ext cx="3200400" cy="502920"/>
+          </a:xfrm>
+          <a:prstGeom prst="roundRect">
+            <a:avLst>
+              <a:gd name="adj" fmla="val 10909"/>
+            </a:avLst>
+          </a:prstGeom>
+          <a:solidFill>
+            <a:srgbClr val="0B1F3A"/>
+          </a:solidFill>
+          <a:ln/>
+        </p:spPr>
+      </p:sp>
+      <p:sp>
+        <p:nvSpPr>
+          <p:cNvPr id="13" name="Text 5">
+            <a:extLst>
+              <a:ext uri="{FF2B5EF4-FFF2-40B4-BE49-F238E27FC236}">
+                <a16:creationId xmlns:a16="http://schemas.microsoft.com/office/drawing/2014/main" id="{9F667A5A-9B9A-5329-A148-F08E0F1789A3}"/>
+              </a:ext>
+            </a:extLst>
+          </p:cNvPr>
+          <p:cNvSpPr/>
+          <p:nvPr/>
+        </p:nvSpPr>
+        <p:spPr>
+          <a:xfrm>
+            <a:off x="4494276" y="1417320"/>
+            <a:ext cx="3200400" cy="502920"/>
+          </a:xfrm>
+          <a:prstGeom prst="rect">
+            <a:avLst/>
+          </a:prstGeom>
+          <a:noFill/>
+          <a:ln/>
+        </p:spPr>
+        <p:txBody>
+          <a:bodyPr wrap="square" rtlCol="0" anchor="ctr"/>
+          <a:lstStyle/>
+          <a:p>
+            <a:pPr marL="0" indent="0" algn="ctr">
+              <a:buNone/>
+            </a:pPr>
+            <a:r>
+              <a:rPr lang="en-US" sz="1150" b="1" dirty="0">
+                <a:solidFill>
+                  <a:srgbClr val="FFFFFF"/>
+                </a:solidFill>
+                <a:latin typeface="Calibri" pitchFamily="34" charset="0"/>
+                <a:ea typeface="Calibri" pitchFamily="34" charset="-122"/>
+                <a:cs typeface="Calibri" pitchFamily="34" charset="-120"/>
+              </a:rPr>
+              <a:t>Backoffice Admin Dashboard</a:t>
+            </a:r>
+            <a:endParaRPr lang="en-US" sz="1150" dirty="0"/>
+          </a:p>
+        </p:txBody>
+      </p:sp>
+      <p:sp>
+        <p:nvSpPr>
+          <p:cNvPr id="15" name="Shape 6">
+            <a:extLst>
+              <a:ext uri="{FF2B5EF4-FFF2-40B4-BE49-F238E27FC236}">
+                <a16:creationId xmlns:a16="http://schemas.microsoft.com/office/drawing/2014/main" id="{02332EA4-C5E1-84EC-5BB6-7748649CE26A}"/>
+              </a:ext>
+            </a:extLst>
+          </p:cNvPr>
+          <p:cNvSpPr/>
+          <p:nvPr/>
+        </p:nvSpPr>
+        <p:spPr>
+          <a:xfrm>
+            <a:off x="8014716" y="1417320"/>
+            <a:ext cx="3200400" cy="502920"/>
+          </a:xfrm>
+          <a:prstGeom prst="roundRect">
+            <a:avLst>
+              <a:gd name="adj" fmla="val 10909"/>
+            </a:avLst>
+          </a:prstGeom>
+          <a:solidFill>
+            <a:srgbClr val="0B1F3A"/>
+          </a:solidFill>
+          <a:ln/>
+        </p:spPr>
+      </p:sp>
+      <p:sp>
+        <p:nvSpPr>
+          <p:cNvPr id="17" name="Text 7">
+            <a:extLst>
+              <a:ext uri="{FF2B5EF4-FFF2-40B4-BE49-F238E27FC236}">
+                <a16:creationId xmlns:a16="http://schemas.microsoft.com/office/drawing/2014/main" id="{E6475D47-B31A-2A5F-6797-C47903C06906}"/>
+              </a:ext>
+            </a:extLst>
+          </p:cNvPr>
+          <p:cNvSpPr/>
+          <p:nvPr/>
+        </p:nvSpPr>
+        <p:spPr>
+          <a:xfrm>
+            <a:off x="8014716" y="1417320"/>
+            <a:ext cx="3200400" cy="502920"/>
+          </a:xfrm>
+          <a:prstGeom prst="rect">
+            <a:avLst/>
+          </a:prstGeom>
+          <a:noFill/>
+          <a:ln/>
+        </p:spPr>
+        <p:txBody>
+          <a:bodyPr wrap="square" rtlCol="0" anchor="ctr"/>
+          <a:lstStyle/>
+          <a:p>
+            <a:pPr marL="0" indent="0" algn="ctr">
+              <a:buNone/>
+            </a:pPr>
+            <a:r>
+              <a:rPr lang="en-US" sz="1150" b="1" dirty="0">
+                <a:solidFill>
+                  <a:srgbClr val="FFFFFF"/>
+                </a:solidFill>
+                <a:latin typeface="Calibri" pitchFamily="34" charset="0"/>
+                <a:ea typeface="Calibri" pitchFamily="34" charset="-122"/>
+                <a:cs typeface="Calibri" pitchFamily="34" charset="-120"/>
+              </a:rPr>
+              <a:t>B2B Dealer Portal</a:t>
+            </a:r>
+            <a:endParaRPr lang="en-US" sz="1150" dirty="0"/>
+          </a:p>
+        </p:txBody>
+      </p:sp>
+      <p:sp>
+        <p:nvSpPr>
+          <p:cNvPr id="19" name="Shape 8">
+            <a:extLst>
+              <a:ext uri="{FF2B5EF4-FFF2-40B4-BE49-F238E27FC236}">
+                <a16:creationId xmlns:a16="http://schemas.microsoft.com/office/drawing/2014/main" id="{4B26E2B2-925F-E57C-35B9-6EB846079E63}"/>
+              </a:ext>
+            </a:extLst>
+          </p:cNvPr>
+          <p:cNvSpPr/>
+          <p:nvPr/>
+        </p:nvSpPr>
+        <p:spPr>
+          <a:xfrm>
+            <a:off x="6094476" y="1920240"/>
+            <a:ext cx="0" cy="256032"/>
+          </a:xfrm>
+          <a:prstGeom prst="line">
+            <a:avLst/>
+          </a:prstGeom>
+          <a:noFill/>
+          <a:ln w="19050">
+            <a:solidFill>
+              <a:srgbClr val="5B6B85"/>
+            </a:solidFill>
+            <a:prstDash val="solid"/>
+            <a:tailEnd type="triangle"/>
+          </a:ln>
+        </p:spPr>
+      </p:sp>
+      <p:sp>
+        <p:nvSpPr>
+          <p:cNvPr id="21" name="Shape 9">
+            <a:extLst>
+              <a:ext uri="{FF2B5EF4-FFF2-40B4-BE49-F238E27FC236}">
+                <a16:creationId xmlns:a16="http://schemas.microsoft.com/office/drawing/2014/main" id="{8C9FA778-2CBA-3B3F-841B-46873368235B}"/>
+              </a:ext>
+            </a:extLst>
+          </p:cNvPr>
+          <p:cNvSpPr/>
+          <p:nvPr/>
+        </p:nvSpPr>
+        <p:spPr>
+          <a:xfrm>
+            <a:off x="4023360" y="2176272"/>
+            <a:ext cx="4114800" cy="502920"/>
+          </a:xfrm>
+          <a:prstGeom prst="roundRect">
+            <a:avLst>
+              <a:gd name="adj" fmla="val 10909"/>
+            </a:avLst>
+          </a:prstGeom>
+          <a:solidFill>
+            <a:srgbClr val="F2A93B"/>
+          </a:solidFill>
+          <a:ln/>
+        </p:spPr>
+      </p:sp>
+      <p:sp>
+        <p:nvSpPr>
+          <p:cNvPr id="23" name="Text 10">
+            <a:extLst>
+              <a:ext uri="{FF2B5EF4-FFF2-40B4-BE49-F238E27FC236}">
+                <a16:creationId xmlns:a16="http://schemas.microsoft.com/office/drawing/2014/main" id="{DB302A85-B632-E900-EA38-BAA1B4D7545D}"/>
+              </a:ext>
+            </a:extLst>
+          </p:cNvPr>
+          <p:cNvSpPr/>
+          <p:nvPr/>
+        </p:nvSpPr>
+        <p:spPr>
+          <a:xfrm>
+            <a:off x="4023360" y="2176272"/>
+            <a:ext cx="4114800" cy="502920"/>
+          </a:xfrm>
+          <a:prstGeom prst="rect">
+            <a:avLst/>
+          </a:prstGeom>
+          <a:noFill/>
+          <a:ln/>
+        </p:spPr>
+        <p:txBody>
+          <a:bodyPr wrap="square" rtlCol="0" anchor="ctr"/>
+          <a:lstStyle/>
+          <a:p>
+            <a:pPr marL="0" indent="0" algn="ctr">
+              <a:buNone/>
+            </a:pPr>
+            <a:r>
+              <a:rPr lang="en-US" sz="1150" b="1" dirty="0">
+                <a:solidFill>
+                  <a:srgbClr val="0B1F3A"/>
+                </a:solidFill>
+                <a:latin typeface="Calibri" pitchFamily="34" charset="0"/>
+                <a:ea typeface="Calibri" pitchFamily="34" charset="-122"/>
+                <a:cs typeface="Calibri" pitchFamily="34" charset="-120"/>
+              </a:rPr>
+              <a:t>API GATEWAY  •  Ocelot Reverse Proxy  •  Port 5000</a:t>
+            </a:r>
+            <a:endParaRPr lang="en-US" sz="1150" dirty="0"/>
+          </a:p>
+        </p:txBody>
+      </p:sp>
+      <p:sp>
+        <p:nvSpPr>
+          <p:cNvPr id="25" name="Shape 11">
+            <a:extLst>
+              <a:ext uri="{FF2B5EF4-FFF2-40B4-BE49-F238E27FC236}">
+                <a16:creationId xmlns:a16="http://schemas.microsoft.com/office/drawing/2014/main" id="{597C3E70-8DFE-34E2-17CB-89A471B3BB6A}"/>
+              </a:ext>
+            </a:extLst>
+          </p:cNvPr>
+          <p:cNvSpPr/>
+          <p:nvPr/>
+        </p:nvSpPr>
+        <p:spPr>
+          <a:xfrm>
+            <a:off x="6094476" y="2679192"/>
+            <a:ext cx="0" cy="228600"/>
+          </a:xfrm>
+          <a:prstGeom prst="line">
+            <a:avLst/>
+          </a:prstGeom>
+          <a:noFill/>
+          <a:ln w="19050">
+            <a:solidFill>
+              <a:srgbClr val="5B6B85"/>
+            </a:solidFill>
+            <a:prstDash val="solid"/>
+            <a:tailEnd type="triangle"/>
+          </a:ln>
+        </p:spPr>
+      </p:sp>
+      <p:sp>
+        <p:nvSpPr>
+          <p:cNvPr id="27" name="Shape 12">
+            <a:extLst>
+              <a:ext uri="{FF2B5EF4-FFF2-40B4-BE49-F238E27FC236}">
+                <a16:creationId xmlns:a16="http://schemas.microsoft.com/office/drawing/2014/main" id="{EF2A8F6F-A461-CAEB-00D7-BE706CB22841}"/>
+              </a:ext>
+            </a:extLst>
+          </p:cNvPr>
+          <p:cNvSpPr/>
+          <p:nvPr/>
+        </p:nvSpPr>
+        <p:spPr>
+          <a:xfrm>
+            <a:off x="539496" y="2907792"/>
+            <a:ext cx="2606040" cy="1417320"/>
+          </a:xfrm>
+          <a:prstGeom prst="roundRect">
+            <a:avLst>
+              <a:gd name="adj" fmla="val 4516"/>
+            </a:avLst>
+          </a:prstGeom>
+          <a:solidFill>
+            <a:srgbClr val="EEF3FC"/>
           </a:solidFill>
           <a:ln w="12700">
             <a:solidFill>
-              <a:srgbClr val="DCE3F2"/>
+              <a:srgbClr val="CADCFC"/>
             </a:solidFill>
             <a:prstDash val="solid"/>
           </a:ln>
         </p:spPr>
-      </p:sp>
-      <p:sp>
-        <p:nvSpPr>
-          <p:cNvPr id="9" name="Text 3">
-            <a:extLst>
-              <a:ext uri="{FF2B5EF4-FFF2-40B4-BE49-F238E27FC236}">
-                <a16:creationId xmlns:a16="http://schemas.microsoft.com/office/drawing/2014/main" id="{EC55E18F-C395-1ECC-CD30-4F64F4D00FD9}"/>
-              </a:ext>
-            </a:extLst>
-          </p:cNvPr>
-          <p:cNvSpPr/>
-          <p:nvPr/>
-        </p:nvSpPr>
-        <p:spPr>
-          <a:xfrm>
-            <a:off x="777240" y="1691640"/>
-            <a:ext cx="6217920" cy="320040"/>
+        <p:txBody>
+          <a:bodyPr/>
+          <a:lstStyle/>
+          <a:p>
+            <a:endParaRPr lang="en-IN" dirty="0"/>
+          </a:p>
+        </p:txBody>
+      </p:sp>
+      <p:sp>
+        <p:nvSpPr>
+          <p:cNvPr id="29" name="Text 13">
+            <a:extLst>
+              <a:ext uri="{FF2B5EF4-FFF2-40B4-BE49-F238E27FC236}">
+                <a16:creationId xmlns:a16="http://schemas.microsoft.com/office/drawing/2014/main" id="{18D950E5-9C61-B30A-7246-63AB2E32EA91}"/>
+              </a:ext>
+            </a:extLst>
+          </p:cNvPr>
+          <p:cNvSpPr/>
+          <p:nvPr/>
+        </p:nvSpPr>
+        <p:spPr>
+          <a:xfrm>
+            <a:off x="649224" y="3017520"/>
+            <a:ext cx="2386584" cy="320040"/>
           </a:xfrm>
           <a:prstGeom prst="rect">
             <a:avLst/>
@@ -7419,36 +6046,81 @@
               <a:buNone/>
             </a:pPr>
             <a:r>
-              <a:rPr lang="en-US" sz="1450" b="1" dirty="0">
-                <a:solidFill>
-                  <a:srgbClr val="1E2761"/>
-                </a:solidFill>
-                <a:latin typeface="Cambria" pitchFamily="34" charset="0"/>
-                <a:ea typeface="Cambria" pitchFamily="34" charset="-122"/>
-                <a:cs typeface="Cambria" pitchFamily="34" charset="-120"/>
-              </a:rPr>
-              <a:t>BaseEntity&lt;TId&gt;</a:t>
-            </a:r>
-            <a:endParaRPr lang="en-US" sz="1450" dirty="0"/>
-          </a:p>
-        </p:txBody>
-      </p:sp>
-      <p:sp>
-        <p:nvSpPr>
-          <p:cNvPr id="11" name="Text 4">
-            <a:extLst>
-              <a:ext uri="{FF2B5EF4-FFF2-40B4-BE49-F238E27FC236}">
-                <a16:creationId xmlns:a16="http://schemas.microsoft.com/office/drawing/2014/main" id="{1EF53BC6-11E9-C7C7-52B0-9A9288CB2828}"/>
-              </a:ext>
-            </a:extLst>
-          </p:cNvPr>
-          <p:cNvSpPr/>
-          <p:nvPr/>
-        </p:nvSpPr>
-        <p:spPr>
-          <a:xfrm>
-            <a:off x="777240" y="2020824"/>
-            <a:ext cx="6217920" cy="640080"/>
+              <a:rPr lang="en-US" sz="1250" b="1" dirty="0">
+                <a:solidFill>
+                  <a:srgbClr val="0B1F3A"/>
+                </a:solidFill>
+                <a:latin typeface="Calibri" pitchFamily="34" charset="0"/>
+                <a:ea typeface="Calibri" pitchFamily="34" charset="-122"/>
+                <a:cs typeface="Calibri" pitchFamily="34" charset="-120"/>
+              </a:rPr>
+              <a:t>BackOfficeService</a:t>
+            </a:r>
+            <a:endParaRPr lang="en-US" sz="1250" dirty="0"/>
+          </a:p>
+        </p:txBody>
+      </p:sp>
+      <p:sp>
+        <p:nvSpPr>
+          <p:cNvPr id="31" name="Text 14">
+            <a:extLst>
+              <a:ext uri="{FF2B5EF4-FFF2-40B4-BE49-F238E27FC236}">
+                <a16:creationId xmlns:a16="http://schemas.microsoft.com/office/drawing/2014/main" id="{506D5597-8774-A7D8-D2EB-A42B9B4B864A}"/>
+              </a:ext>
+            </a:extLst>
+          </p:cNvPr>
+          <p:cNvSpPr/>
+          <p:nvPr/>
+        </p:nvSpPr>
+        <p:spPr>
+          <a:xfrm>
+            <a:off x="649224" y="3319272"/>
+            <a:ext cx="2386584" cy="228600"/>
+          </a:xfrm>
+          <a:prstGeom prst="rect">
+            <a:avLst/>
+          </a:prstGeom>
+          <a:noFill/>
+          <a:ln/>
+        </p:spPr>
+        <p:txBody>
+          <a:bodyPr wrap="square" rtlCol="0" anchor="ctr"/>
+          <a:lstStyle/>
+          <a:p>
+            <a:pPr marL="0" indent="0">
+              <a:buNone/>
+            </a:pPr>
+            <a:r>
+              <a:rPr lang="en-US" sz="900" b="1" dirty="0">
+                <a:solidFill>
+                  <a:srgbClr val="B8791F"/>
+                </a:solidFill>
+                <a:latin typeface="Calibri" pitchFamily="34" charset="0"/>
+                <a:ea typeface="Calibri" pitchFamily="34" charset="-122"/>
+                <a:cs typeface="Calibri" pitchFamily="34" charset="-120"/>
+              </a:rPr>
+              <a:t>PORT 5001</a:t>
+            </a:r>
+            <a:endParaRPr lang="en-US" sz="900" dirty="0"/>
+          </a:p>
+        </p:txBody>
+      </p:sp>
+      <p:sp>
+        <p:nvSpPr>
+          <p:cNvPr id="33" name="Text 15">
+            <a:extLst>
+              <a:ext uri="{FF2B5EF4-FFF2-40B4-BE49-F238E27FC236}">
+                <a16:creationId xmlns:a16="http://schemas.microsoft.com/office/drawing/2014/main" id="{02E4BA0B-CB47-5C46-8F41-1F83E3E51B9D}"/>
+              </a:ext>
+            </a:extLst>
+          </p:cNvPr>
+          <p:cNvSpPr/>
+          <p:nvPr/>
+        </p:nvSpPr>
+        <p:spPr>
+          <a:xfrm>
+            <a:off x="649224" y="3593592"/>
+            <a:ext cx="2386584" cy="658368"/>
           </a:xfrm>
           <a:prstGeom prst="rect">
             <a:avLst/>
@@ -7467,17 +6139,17 @@
               <a:buNone/>
             </a:pPr>
             <a:r>
-              <a:rPr lang="en-US" sz="1050" dirty="0">
-                <a:solidFill>
-                  <a:srgbClr val="1A1A2E"/>
-                </a:solidFill>
-                <a:latin typeface="Courier New" pitchFamily="34" charset="0"/>
-                <a:ea typeface="Courier New" pitchFamily="34" charset="-122"/>
-                <a:cs typeface="Courier New" pitchFamily="34" charset="-120"/>
-              </a:rPr>
-              <a:t>+ TId Id</a:t>
-            </a:r>
-            <a:endParaRPr lang="en-US" sz="1050" dirty="0"/>
+              <a:rPr lang="en-US" sz="1000" dirty="0">
+                <a:solidFill>
+                  <a:srgbClr val="1A2233"/>
+                </a:solidFill>
+                <a:latin typeface="Calibri" pitchFamily="34" charset="0"/>
+                <a:ea typeface="Calibri" pitchFamily="34" charset="-122"/>
+                <a:cs typeface="Calibri" pitchFamily="34" charset="-120"/>
+              </a:rPr>
+              <a:t>Staff, roles, station</a:t>
+            </a:r>
+            <a:endParaRPr lang="en-US" sz="1000" dirty="0"/>
           </a:p>
           <a:p>
             <a:pPr marL="0" indent="0">
@@ -7487,18 +6159,198 @@
               <a:buNone/>
             </a:pPr>
             <a:r>
-              <a:rPr lang="en-US" sz="1050" dirty="0">
-                <a:solidFill>
-                  <a:srgbClr val="1A1A2E"/>
-                </a:solidFill>
-                <a:latin typeface="Courier New" pitchFamily="34" charset="0"/>
-                <a:ea typeface="Courier New" pitchFamily="34" charset="-122"/>
-                <a:cs typeface="Courier New" pitchFamily="34" charset="-120"/>
-              </a:rPr>
-              <a:t>+ DateTime CreatedAt</a:t>
-            </a:r>
-            <a:endParaRPr lang="en-US" sz="1050" dirty="0"/>
-          </a:p>
+              <a:rPr lang="en-US" sz="1000" dirty="0">
+                <a:solidFill>
+                  <a:srgbClr val="1A2233"/>
+                </a:solidFill>
+                <a:latin typeface="Calibri" pitchFamily="34" charset="0"/>
+                <a:ea typeface="Calibri" pitchFamily="34" charset="-122"/>
+                <a:cs typeface="Calibri" pitchFamily="34" charset="-120"/>
+              </a:rPr>
+              <a:t>mgmt, reports</a:t>
+            </a:r>
+            <a:endParaRPr lang="en-US" sz="1000" dirty="0"/>
+          </a:p>
+        </p:txBody>
+      </p:sp>
+      <p:sp>
+        <p:nvSpPr>
+          <p:cNvPr id="35" name="Shape 16">
+            <a:extLst>
+              <a:ext uri="{FF2B5EF4-FFF2-40B4-BE49-F238E27FC236}">
+                <a16:creationId xmlns:a16="http://schemas.microsoft.com/office/drawing/2014/main" id="{08343FFD-5A97-A847-3808-E63BCE295238}"/>
+              </a:ext>
+            </a:extLst>
+          </p:cNvPr>
+          <p:cNvSpPr/>
+          <p:nvPr/>
+        </p:nvSpPr>
+        <p:spPr>
+          <a:xfrm>
+            <a:off x="1842516" y="4325112"/>
+            <a:ext cx="0" cy="201168"/>
+          </a:xfrm>
+          <a:prstGeom prst="line">
+            <a:avLst/>
+          </a:prstGeom>
+          <a:noFill/>
+          <a:ln w="15875">
+            <a:solidFill>
+              <a:srgbClr val="5B6B85"/>
+            </a:solidFill>
+            <a:prstDash val="solid"/>
+            <a:tailEnd type="triangle"/>
+          </a:ln>
+        </p:spPr>
+      </p:sp>
+      <p:sp>
+        <p:nvSpPr>
+          <p:cNvPr id="37" name="Shape 17">
+            <a:extLst>
+              <a:ext uri="{FF2B5EF4-FFF2-40B4-BE49-F238E27FC236}">
+                <a16:creationId xmlns:a16="http://schemas.microsoft.com/office/drawing/2014/main" id="{0C862DBF-F608-7A0E-A22D-0B8CD15C3CB0}"/>
+              </a:ext>
+            </a:extLst>
+          </p:cNvPr>
+          <p:cNvSpPr/>
+          <p:nvPr/>
+        </p:nvSpPr>
+        <p:spPr>
+          <a:xfrm>
+            <a:off x="3374136" y="2907792"/>
+            <a:ext cx="2606040" cy="1417320"/>
+          </a:xfrm>
+          <a:prstGeom prst="roundRect">
+            <a:avLst>
+              <a:gd name="adj" fmla="val 4516"/>
+            </a:avLst>
+          </a:prstGeom>
+          <a:solidFill>
+            <a:srgbClr val="EEF3FC"/>
+          </a:solidFill>
+          <a:ln w="12700">
+            <a:solidFill>
+              <a:srgbClr val="CADCFC"/>
+            </a:solidFill>
+            <a:prstDash val="solid"/>
+          </a:ln>
+        </p:spPr>
+      </p:sp>
+      <p:sp>
+        <p:nvSpPr>
+          <p:cNvPr id="39" name="Text 18">
+            <a:extLst>
+              <a:ext uri="{FF2B5EF4-FFF2-40B4-BE49-F238E27FC236}">
+                <a16:creationId xmlns:a16="http://schemas.microsoft.com/office/drawing/2014/main" id="{214ACB38-42D4-600A-9439-1FF557CC3752}"/>
+              </a:ext>
+            </a:extLst>
+          </p:cNvPr>
+          <p:cNvSpPr/>
+          <p:nvPr/>
+        </p:nvSpPr>
+        <p:spPr>
+          <a:xfrm>
+            <a:off x="3483864" y="3017520"/>
+            <a:ext cx="2386584" cy="320040"/>
+          </a:xfrm>
+          <a:prstGeom prst="rect">
+            <a:avLst/>
+          </a:prstGeom>
+          <a:noFill/>
+          <a:ln/>
+        </p:spPr>
+        <p:txBody>
+          <a:bodyPr wrap="square" rtlCol="0" anchor="ctr"/>
+          <a:lstStyle/>
+          <a:p>
+            <a:pPr marL="0" indent="0">
+              <a:buNone/>
+            </a:pPr>
+            <a:r>
+              <a:rPr lang="en-US" sz="1250" b="1" dirty="0">
+                <a:solidFill>
+                  <a:srgbClr val="0B1F3A"/>
+                </a:solidFill>
+                <a:latin typeface="Calibri" pitchFamily="34" charset="0"/>
+                <a:ea typeface="Calibri" pitchFamily="34" charset="-122"/>
+                <a:cs typeface="Calibri" pitchFamily="34" charset="-120"/>
+              </a:rPr>
+              <a:t>FlightOpsService</a:t>
+            </a:r>
+            <a:endParaRPr lang="en-US" sz="1250" dirty="0"/>
+          </a:p>
+        </p:txBody>
+      </p:sp>
+      <p:sp>
+        <p:nvSpPr>
+          <p:cNvPr id="41" name="Text 19">
+            <a:extLst>
+              <a:ext uri="{FF2B5EF4-FFF2-40B4-BE49-F238E27FC236}">
+                <a16:creationId xmlns:a16="http://schemas.microsoft.com/office/drawing/2014/main" id="{C896472A-B9FF-3083-6479-B181ED86F4BF}"/>
+              </a:ext>
+            </a:extLst>
+          </p:cNvPr>
+          <p:cNvSpPr/>
+          <p:nvPr/>
+        </p:nvSpPr>
+        <p:spPr>
+          <a:xfrm>
+            <a:off x="3483864" y="3319272"/>
+            <a:ext cx="2386584" cy="228600"/>
+          </a:xfrm>
+          <a:prstGeom prst="rect">
+            <a:avLst/>
+          </a:prstGeom>
+          <a:noFill/>
+          <a:ln/>
+        </p:spPr>
+        <p:txBody>
+          <a:bodyPr wrap="square" rtlCol="0" anchor="ctr"/>
+          <a:lstStyle/>
+          <a:p>
+            <a:pPr marL="0" indent="0">
+              <a:buNone/>
+            </a:pPr>
+            <a:r>
+              <a:rPr lang="en-US" sz="900" b="1" dirty="0">
+                <a:solidFill>
+                  <a:srgbClr val="B8791F"/>
+                </a:solidFill>
+                <a:latin typeface="Calibri" pitchFamily="34" charset="0"/>
+                <a:ea typeface="Calibri" pitchFamily="34" charset="-122"/>
+                <a:cs typeface="Calibri" pitchFamily="34" charset="-120"/>
+              </a:rPr>
+              <a:t>PORT 5003</a:t>
+            </a:r>
+          </a:p>
+        </p:txBody>
+      </p:sp>
+      <p:sp>
+        <p:nvSpPr>
+          <p:cNvPr id="43" name="Text 20">
+            <a:extLst>
+              <a:ext uri="{FF2B5EF4-FFF2-40B4-BE49-F238E27FC236}">
+                <a16:creationId xmlns:a16="http://schemas.microsoft.com/office/drawing/2014/main" id="{73EEEF79-BD16-224C-B7F7-A15CCCC17B9C}"/>
+              </a:ext>
+            </a:extLst>
+          </p:cNvPr>
+          <p:cNvSpPr/>
+          <p:nvPr/>
+        </p:nvSpPr>
+        <p:spPr>
+          <a:xfrm>
+            <a:off x="3483864" y="3593592"/>
+            <a:ext cx="2386584" cy="658368"/>
+          </a:xfrm>
+          <a:prstGeom prst="rect">
+            <a:avLst/>
+          </a:prstGeom>
+          <a:noFill/>
+          <a:ln/>
+        </p:spPr>
+        <p:txBody>
+          <a:bodyPr wrap="square" rtlCol="0" anchor="ctr"/>
+          <a:lstStyle/>
           <a:p>
             <a:pPr marL="0" indent="0">
               <a:lnSpc>
@@ -7507,169 +6359,18 @@
               <a:buNone/>
             </a:pPr>
             <a:r>
-              <a:rPr lang="en-US" sz="1050" dirty="0">
-                <a:solidFill>
-                  <a:srgbClr val="1A1A2E"/>
-                </a:solidFill>
-                <a:latin typeface="Courier New" pitchFamily="34" charset="0"/>
-                <a:ea typeface="Courier New" pitchFamily="34" charset="-122"/>
-                <a:cs typeface="Courier New" pitchFamily="34" charset="-120"/>
-              </a:rPr>
-              <a:t>+ DateTime? UpdatedAt</a:t>
-            </a:r>
-            <a:endParaRPr lang="en-US" sz="1050" dirty="0"/>
-          </a:p>
-        </p:txBody>
-      </p:sp>
-      <p:sp>
-        <p:nvSpPr>
-          <p:cNvPr id="13" name="Text 5">
-            <a:extLst>
-              <a:ext uri="{FF2B5EF4-FFF2-40B4-BE49-F238E27FC236}">
-                <a16:creationId xmlns:a16="http://schemas.microsoft.com/office/drawing/2014/main" id="{2EC922E6-4AFB-C25E-61F8-11722AF61F99}"/>
-              </a:ext>
-            </a:extLst>
-          </p:cNvPr>
-          <p:cNvSpPr/>
-          <p:nvPr/>
-        </p:nvSpPr>
-        <p:spPr>
-          <a:xfrm>
-            <a:off x="777240" y="2724912"/>
-            <a:ext cx="6217920" cy="274320"/>
-          </a:xfrm>
-          <a:prstGeom prst="rect">
-            <a:avLst/>
-          </a:prstGeom>
-          <a:noFill/>
-          <a:ln/>
-        </p:spPr>
-        <p:txBody>
-          <a:bodyPr wrap="square" rtlCol="0" anchor="ctr"/>
-          <a:lstStyle/>
-          <a:p>
-            <a:pPr marL="0" indent="0">
-              <a:buNone/>
-            </a:pPr>
-            <a:r>
-              <a:rPr lang="en-US" sz="950" i="1" dirty="0">
-                <a:solidFill>
-                  <a:srgbClr val="5B6172"/>
+              <a:rPr lang="en-US" sz="1000" dirty="0">
+                <a:solidFill>
+                  <a:srgbClr val="1A2233"/>
                 </a:solidFill>
                 <a:latin typeface="Calibri" pitchFamily="34" charset="0"/>
                 <a:ea typeface="Calibri" pitchFamily="34" charset="-122"/>
                 <a:cs typeface="Calibri" pitchFamily="34" charset="-120"/>
               </a:rPr>
-              <a:t>Generic base — BaseEntity&lt;int&gt; is the concrete root every domain entity inherits.</a:t>
-            </a:r>
-            <a:endParaRPr lang="en-US" sz="950" dirty="0"/>
-          </a:p>
-        </p:txBody>
-      </p:sp>
-      <p:sp>
-        <p:nvSpPr>
-          <p:cNvPr id="15" name="Shape 6">
-            <a:extLst>
-              <a:ext uri="{FF2B5EF4-FFF2-40B4-BE49-F238E27FC236}">
-                <a16:creationId xmlns:a16="http://schemas.microsoft.com/office/drawing/2014/main" id="{570D3956-9E3D-2CDC-AB54-369E752E4EEB}"/>
-              </a:ext>
-            </a:extLst>
-          </p:cNvPr>
-          <p:cNvSpPr/>
-          <p:nvPr/>
-        </p:nvSpPr>
-        <p:spPr>
-          <a:xfrm>
-            <a:off x="548640" y="3200400"/>
-            <a:ext cx="6675120" cy="1417320"/>
-          </a:xfrm>
-          <a:prstGeom prst="roundRect">
-            <a:avLst>
-              <a:gd name="adj" fmla="val 5161"/>
-            </a:avLst>
-          </a:prstGeom>
-          <a:solidFill>
-            <a:srgbClr val="EEF3FD"/>
-          </a:solidFill>
-          <a:ln w="12700">
-            <a:solidFill>
-              <a:srgbClr val="DCE3F2"/>
-            </a:solidFill>
-            <a:prstDash val="solid"/>
-          </a:ln>
-        </p:spPr>
-      </p:sp>
-      <p:sp>
-        <p:nvSpPr>
-          <p:cNvPr id="17" name="Text 7">
-            <a:extLst>
-              <a:ext uri="{FF2B5EF4-FFF2-40B4-BE49-F238E27FC236}">
-                <a16:creationId xmlns:a16="http://schemas.microsoft.com/office/drawing/2014/main" id="{B5B3968B-0C68-5436-A062-0C6400FEB7FD}"/>
-              </a:ext>
-            </a:extLst>
-          </p:cNvPr>
-          <p:cNvSpPr/>
-          <p:nvPr/>
-        </p:nvSpPr>
-        <p:spPr>
-          <a:xfrm>
-            <a:off x="777240" y="3291840"/>
-            <a:ext cx="6217920" cy="320040"/>
-          </a:xfrm>
-          <a:prstGeom prst="rect">
-            <a:avLst/>
-          </a:prstGeom>
-          <a:noFill/>
-          <a:ln/>
-        </p:spPr>
-        <p:txBody>
-          <a:bodyPr wrap="square" rtlCol="0" anchor="ctr"/>
-          <a:lstStyle/>
-          <a:p>
-            <a:pPr marL="0" indent="0">
-              <a:buNone/>
-            </a:pPr>
-            <a:r>
-              <a:rPr lang="en-US" sz="1450" b="1" dirty="0">
-                <a:solidFill>
-                  <a:srgbClr val="1E2761"/>
-                </a:solidFill>
-                <a:latin typeface="Cambria" pitchFamily="34" charset="0"/>
-                <a:ea typeface="Cambria" pitchFamily="34" charset="-122"/>
-                <a:cs typeface="Cambria" pitchFamily="34" charset="-120"/>
-              </a:rPr>
-              <a:t>Security — Password &amp; Tokens</a:t>
-            </a:r>
-            <a:endParaRPr lang="en-US" sz="1450" dirty="0"/>
-          </a:p>
-        </p:txBody>
-      </p:sp>
-      <p:sp>
-        <p:nvSpPr>
-          <p:cNvPr id="19" name="Text 8">
-            <a:extLst>
-              <a:ext uri="{FF2B5EF4-FFF2-40B4-BE49-F238E27FC236}">
-                <a16:creationId xmlns:a16="http://schemas.microsoft.com/office/drawing/2014/main" id="{CDD885AB-FCD7-5E24-1C75-5C27FDDBA459}"/>
-              </a:ext>
-            </a:extLst>
-          </p:cNvPr>
-          <p:cNvSpPr/>
-          <p:nvPr/>
-        </p:nvSpPr>
-        <p:spPr>
-          <a:xfrm>
-            <a:off x="777240" y="3621024"/>
-            <a:ext cx="6217920" cy="640080"/>
-          </a:xfrm>
-          <a:prstGeom prst="rect">
-            <a:avLst/>
-          </a:prstGeom>
-          <a:noFill/>
-          <a:ln/>
-        </p:spPr>
-        <p:txBody>
-          <a:bodyPr wrap="square" rtlCol="0" anchor="ctr"/>
-          <a:lstStyle/>
+              <a:t>Flights, bookings,</a:t>
+            </a:r>
+            <a:endParaRPr lang="en-US" sz="1000" dirty="0"/>
+          </a:p>
           <a:p>
             <a:pPr marL="0" indent="0">
               <a:lnSpc>
@@ -7678,18 +6379,199 @@
               <a:buNone/>
             </a:pPr>
             <a:r>
-              <a:rPr lang="en-US" sz="1050" dirty="0">
-                <a:solidFill>
-                  <a:srgbClr val="1A1A2E"/>
-                </a:solidFill>
-                <a:latin typeface="Courier New" pitchFamily="34" charset="0"/>
-                <a:ea typeface="Courier New" pitchFamily="34" charset="-122"/>
-                <a:cs typeface="Courier New" pitchFamily="34" charset="-120"/>
-              </a:rPr>
-              <a:t>PasswordHasher (static): Hash() / Verify()</a:t>
-            </a:r>
-            <a:endParaRPr lang="en-US" sz="1050" dirty="0"/>
-          </a:p>
+              <a:rPr lang="en-US" sz="1000" dirty="0">
+                <a:solidFill>
+                  <a:srgbClr val="1A2233"/>
+                </a:solidFill>
+                <a:latin typeface="Calibri" pitchFamily="34" charset="0"/>
+                <a:ea typeface="Calibri" pitchFamily="34" charset="-122"/>
+                <a:cs typeface="Calibri" pitchFamily="34" charset="-120"/>
+              </a:rPr>
+              <a:t>seats, check-in</a:t>
+            </a:r>
+            <a:endParaRPr lang="en-US" sz="1000" dirty="0"/>
+          </a:p>
+        </p:txBody>
+      </p:sp>
+      <p:sp>
+        <p:nvSpPr>
+          <p:cNvPr id="45" name="Shape 21">
+            <a:extLst>
+              <a:ext uri="{FF2B5EF4-FFF2-40B4-BE49-F238E27FC236}">
+                <a16:creationId xmlns:a16="http://schemas.microsoft.com/office/drawing/2014/main" id="{335BDFCD-FBAF-21BA-BF6C-C185449D724B}"/>
+              </a:ext>
+            </a:extLst>
+          </p:cNvPr>
+          <p:cNvSpPr/>
+          <p:nvPr/>
+        </p:nvSpPr>
+        <p:spPr>
+          <a:xfrm>
+            <a:off x="4677156" y="4325112"/>
+            <a:ext cx="0" cy="201168"/>
+          </a:xfrm>
+          <a:prstGeom prst="line">
+            <a:avLst/>
+          </a:prstGeom>
+          <a:noFill/>
+          <a:ln w="15875">
+            <a:solidFill>
+              <a:srgbClr val="5B6B85"/>
+            </a:solidFill>
+            <a:prstDash val="solid"/>
+            <a:tailEnd type="triangle"/>
+          </a:ln>
+        </p:spPr>
+      </p:sp>
+      <p:sp>
+        <p:nvSpPr>
+          <p:cNvPr id="47" name="Shape 22">
+            <a:extLst>
+              <a:ext uri="{FF2B5EF4-FFF2-40B4-BE49-F238E27FC236}">
+                <a16:creationId xmlns:a16="http://schemas.microsoft.com/office/drawing/2014/main" id="{559D2F30-59F1-ED60-D471-E4977CC88005}"/>
+              </a:ext>
+            </a:extLst>
+          </p:cNvPr>
+          <p:cNvSpPr/>
+          <p:nvPr/>
+        </p:nvSpPr>
+        <p:spPr>
+          <a:xfrm>
+            <a:off x="6208776" y="2907792"/>
+            <a:ext cx="2606040" cy="1417320"/>
+          </a:xfrm>
+          <a:prstGeom prst="roundRect">
+            <a:avLst>
+              <a:gd name="adj" fmla="val 4516"/>
+            </a:avLst>
+          </a:prstGeom>
+          <a:solidFill>
+            <a:srgbClr val="EEF3FC"/>
+          </a:solidFill>
+          <a:ln w="12700">
+            <a:solidFill>
+              <a:srgbClr val="CADCFC"/>
+            </a:solidFill>
+            <a:prstDash val="solid"/>
+          </a:ln>
+        </p:spPr>
+      </p:sp>
+      <p:sp>
+        <p:nvSpPr>
+          <p:cNvPr id="49" name="Text 23">
+            <a:extLst>
+              <a:ext uri="{FF2B5EF4-FFF2-40B4-BE49-F238E27FC236}">
+                <a16:creationId xmlns:a16="http://schemas.microsoft.com/office/drawing/2014/main" id="{1DBFEA2A-6B09-311D-49D0-D1B2DFB3A61A}"/>
+              </a:ext>
+            </a:extLst>
+          </p:cNvPr>
+          <p:cNvSpPr/>
+          <p:nvPr/>
+        </p:nvSpPr>
+        <p:spPr>
+          <a:xfrm>
+            <a:off x="6318504" y="3017520"/>
+            <a:ext cx="2386584" cy="320040"/>
+          </a:xfrm>
+          <a:prstGeom prst="rect">
+            <a:avLst/>
+          </a:prstGeom>
+          <a:noFill/>
+          <a:ln/>
+        </p:spPr>
+        <p:txBody>
+          <a:bodyPr wrap="square" rtlCol="0" anchor="ctr"/>
+          <a:lstStyle/>
+          <a:p>
+            <a:pPr marL="0" indent="0">
+              <a:buNone/>
+            </a:pPr>
+            <a:r>
+              <a:rPr lang="en-US" sz="1250" b="1" dirty="0">
+                <a:solidFill>
+                  <a:srgbClr val="0B1F3A"/>
+                </a:solidFill>
+                <a:latin typeface="Calibri" pitchFamily="34" charset="0"/>
+                <a:ea typeface="Calibri" pitchFamily="34" charset="-122"/>
+                <a:cs typeface="Calibri" pitchFamily="34" charset="-120"/>
+              </a:rPr>
+              <a:t>PaymentService</a:t>
+            </a:r>
+            <a:endParaRPr lang="en-US" sz="1250" dirty="0"/>
+          </a:p>
+        </p:txBody>
+      </p:sp>
+      <p:sp>
+        <p:nvSpPr>
+          <p:cNvPr id="51" name="Text 24">
+            <a:extLst>
+              <a:ext uri="{FF2B5EF4-FFF2-40B4-BE49-F238E27FC236}">
+                <a16:creationId xmlns:a16="http://schemas.microsoft.com/office/drawing/2014/main" id="{727BE72E-17AC-6122-5056-3F84EEDBAD65}"/>
+              </a:ext>
+            </a:extLst>
+          </p:cNvPr>
+          <p:cNvSpPr/>
+          <p:nvPr/>
+        </p:nvSpPr>
+        <p:spPr>
+          <a:xfrm>
+            <a:off x="6318504" y="3319272"/>
+            <a:ext cx="2386584" cy="228600"/>
+          </a:xfrm>
+          <a:prstGeom prst="rect">
+            <a:avLst/>
+          </a:prstGeom>
+          <a:noFill/>
+          <a:ln/>
+        </p:spPr>
+        <p:txBody>
+          <a:bodyPr wrap="square" rtlCol="0" anchor="ctr"/>
+          <a:lstStyle/>
+          <a:p>
+            <a:pPr marL="0" indent="0">
+              <a:buNone/>
+            </a:pPr>
+            <a:r>
+              <a:rPr lang="en-US" sz="900" b="1">
+                <a:solidFill>
+                  <a:srgbClr val="B8791F"/>
+                </a:solidFill>
+                <a:latin typeface="Calibri" pitchFamily="34" charset="0"/>
+                <a:ea typeface="Calibri" pitchFamily="34" charset="-122"/>
+                <a:cs typeface="Calibri" pitchFamily="34" charset="-120"/>
+              </a:rPr>
+              <a:t>PORT 5005</a:t>
+            </a:r>
+            <a:endParaRPr lang="en-US" sz="900" dirty="0"/>
+          </a:p>
+        </p:txBody>
+      </p:sp>
+      <p:sp>
+        <p:nvSpPr>
+          <p:cNvPr id="53" name="Text 25">
+            <a:extLst>
+              <a:ext uri="{FF2B5EF4-FFF2-40B4-BE49-F238E27FC236}">
+                <a16:creationId xmlns:a16="http://schemas.microsoft.com/office/drawing/2014/main" id="{A01D22C4-BB49-00B1-AFCB-7D2CA553DC8F}"/>
+              </a:ext>
+            </a:extLst>
+          </p:cNvPr>
+          <p:cNvSpPr/>
+          <p:nvPr/>
+        </p:nvSpPr>
+        <p:spPr>
+          <a:xfrm>
+            <a:off x="6318504" y="3593592"/>
+            <a:ext cx="2386584" cy="658368"/>
+          </a:xfrm>
+          <a:prstGeom prst="rect">
+            <a:avLst/>
+          </a:prstGeom>
+          <a:noFill/>
+          <a:ln/>
+        </p:spPr>
+        <p:txBody>
+          <a:bodyPr wrap="square" rtlCol="0" anchor="ctr"/>
+          <a:lstStyle/>
           <a:p>
             <a:pPr marL="0" indent="0">
               <a:lnSpc>
@@ -7698,17 +6580,17 @@
               <a:buNone/>
             </a:pPr>
             <a:r>
-              <a:rPr lang="en-US" sz="1050" dirty="0">
-                <a:solidFill>
-                  <a:srgbClr val="1A1A2E"/>
-                </a:solidFill>
-                <a:latin typeface="Courier New" pitchFamily="34" charset="0"/>
-                <a:ea typeface="Courier New" pitchFamily="34" charset="-122"/>
-                <a:cs typeface="Courier New" pitchFamily="34" charset="-120"/>
-              </a:rPr>
-              <a:t>ITokenService → JwtTokenService</a:t>
-            </a:r>
-            <a:endParaRPr lang="en-US" sz="1050" dirty="0"/>
+              <a:rPr lang="en-US" sz="1000" dirty="0">
+                <a:solidFill>
+                  <a:srgbClr val="1A2233"/>
+                </a:solidFill>
+                <a:latin typeface="Calibri" pitchFamily="34" charset="0"/>
+                <a:ea typeface="Calibri" pitchFamily="34" charset="-122"/>
+                <a:cs typeface="Calibri" pitchFamily="34" charset="-120"/>
+              </a:rPr>
+              <a:t>Razorpay orders,</a:t>
+            </a:r>
+            <a:endParaRPr lang="en-US" sz="1000" dirty="0"/>
           </a:p>
           <a:p>
             <a:pPr marL="0" indent="0">
@@ -7718,93 +6600,78 @@
               <a:buNone/>
             </a:pPr>
             <a:r>
-              <a:rPr lang="en-US" sz="1050" dirty="0">
-                <a:solidFill>
-                  <a:srgbClr val="1A1A2E"/>
-                </a:solidFill>
-                <a:latin typeface="Courier New" pitchFamily="34" charset="0"/>
-                <a:ea typeface="Courier New" pitchFamily="34" charset="-122"/>
-                <a:cs typeface="Courier New" pitchFamily="34" charset="-120"/>
-              </a:rPr>
-              <a:t>+ GenerateToken(userId, email, role)</a:t>
-            </a:r>
-            <a:endParaRPr lang="en-US" sz="1050" dirty="0"/>
-          </a:p>
-        </p:txBody>
-      </p:sp>
-      <p:sp>
-        <p:nvSpPr>
-          <p:cNvPr id="21" name="Text 9">
-            <a:extLst>
-              <a:ext uri="{FF2B5EF4-FFF2-40B4-BE49-F238E27FC236}">
-                <a16:creationId xmlns:a16="http://schemas.microsoft.com/office/drawing/2014/main" id="{8DF99F71-8EF5-D123-D3FD-6C102B3BDBF7}"/>
-              </a:ext>
-            </a:extLst>
-          </p:cNvPr>
-          <p:cNvSpPr/>
-          <p:nvPr/>
-        </p:nvSpPr>
-        <p:spPr>
-          <a:xfrm>
-            <a:off x="777240" y="4325112"/>
-            <a:ext cx="6217920" cy="274320"/>
-          </a:xfrm>
-          <a:prstGeom prst="rect">
-            <a:avLst/>
-          </a:prstGeom>
-          <a:noFill/>
-          <a:ln/>
-        </p:spPr>
-        <p:txBody>
-          <a:bodyPr wrap="square" rtlCol="0" anchor="ctr"/>
-          <a:lstStyle/>
-          <a:p>
-            <a:pPr marL="0" indent="0">
-              <a:buNone/>
-            </a:pPr>
-            <a:r>
-              <a:rPr lang="en-US" sz="950" i="1" dirty="0">
-                <a:solidFill>
-                  <a:srgbClr val="5B6172"/>
+              <a:rPr lang="en-US" sz="1000" dirty="0">
+                <a:solidFill>
+                  <a:srgbClr val="1A2233"/>
                 </a:solidFill>
                 <a:latin typeface="Calibri" pitchFamily="34" charset="0"/>
                 <a:ea typeface="Calibri" pitchFamily="34" charset="-122"/>
                 <a:cs typeface="Calibri" pitchFamily="34" charset="-120"/>
               </a:rPr>
-              <a:t>JwtTokenService reads _key, _issuer, _audience, _expirationMinutes.</a:t>
-            </a:r>
-            <a:endParaRPr lang="en-US" sz="950" dirty="0"/>
-          </a:p>
-        </p:txBody>
-      </p:sp>
-      <p:sp>
-        <p:nvSpPr>
-          <p:cNvPr id="23" name="Shape 10">
-            <a:extLst>
-              <a:ext uri="{FF2B5EF4-FFF2-40B4-BE49-F238E27FC236}">
-                <a16:creationId xmlns:a16="http://schemas.microsoft.com/office/drawing/2014/main" id="{D0358F40-BB26-3544-6379-B2BB399FF320}"/>
-              </a:ext>
-            </a:extLst>
-          </p:cNvPr>
-          <p:cNvSpPr/>
-          <p:nvPr/>
-        </p:nvSpPr>
-        <p:spPr>
-          <a:xfrm>
-            <a:off x="548640" y="4800600"/>
-            <a:ext cx="6675120" cy="1417320"/>
+              <a:t>verification, refunds</a:t>
+            </a:r>
+            <a:endParaRPr lang="en-US" sz="1000" dirty="0"/>
+          </a:p>
+        </p:txBody>
+      </p:sp>
+      <p:sp>
+        <p:nvSpPr>
+          <p:cNvPr id="55" name="Shape 26">
+            <a:extLst>
+              <a:ext uri="{FF2B5EF4-FFF2-40B4-BE49-F238E27FC236}">
+                <a16:creationId xmlns:a16="http://schemas.microsoft.com/office/drawing/2014/main" id="{7A0DCD89-9F85-5218-DB15-79112FF7CB8C}"/>
+              </a:ext>
+            </a:extLst>
+          </p:cNvPr>
+          <p:cNvSpPr/>
+          <p:nvPr/>
+        </p:nvSpPr>
+        <p:spPr>
+          <a:xfrm>
+            <a:off x="7511796" y="4325112"/>
+            <a:ext cx="0" cy="201168"/>
+          </a:xfrm>
+          <a:prstGeom prst="line">
+            <a:avLst/>
+          </a:prstGeom>
+          <a:noFill/>
+          <a:ln w="15875">
+            <a:solidFill>
+              <a:srgbClr val="5B6B85"/>
+            </a:solidFill>
+            <a:prstDash val="solid"/>
+            <a:tailEnd type="triangle"/>
+          </a:ln>
+        </p:spPr>
+      </p:sp>
+      <p:sp>
+        <p:nvSpPr>
+          <p:cNvPr id="57" name="Shape 27">
+            <a:extLst>
+              <a:ext uri="{FF2B5EF4-FFF2-40B4-BE49-F238E27FC236}">
+                <a16:creationId xmlns:a16="http://schemas.microsoft.com/office/drawing/2014/main" id="{CEA2B53E-5AA1-9530-8893-C2C9FB742FB1}"/>
+              </a:ext>
+            </a:extLst>
+          </p:cNvPr>
+          <p:cNvSpPr/>
+          <p:nvPr/>
+        </p:nvSpPr>
+        <p:spPr>
+          <a:xfrm>
+            <a:off x="9043416" y="2907792"/>
+            <a:ext cx="2606040" cy="1417320"/>
           </a:xfrm>
           <a:prstGeom prst="roundRect">
             <a:avLst>
-              <a:gd name="adj" fmla="val 5161"/>
+              <a:gd name="adj" fmla="val 4516"/>
             </a:avLst>
           </a:prstGeom>
           <a:solidFill>
-            <a:srgbClr val="EEF3FD"/>
+            <a:srgbClr val="EEF3FC"/>
           </a:solidFill>
           <a:ln w="12700">
             <a:solidFill>
-              <a:srgbClr val="DCE3F2"/>
+              <a:srgbClr val="CADCFC"/>
             </a:solidFill>
             <a:prstDash val="solid"/>
           </a:ln>
@@ -7812,20 +6679,20 @@
       </p:sp>
       <p:sp>
         <p:nvSpPr>
-          <p:cNvPr id="25" name="Text 11">
-            <a:extLst>
-              <a:ext uri="{FF2B5EF4-FFF2-40B4-BE49-F238E27FC236}">
-                <a16:creationId xmlns:a16="http://schemas.microsoft.com/office/drawing/2014/main" id="{9EF36E21-77E3-5295-AA0F-33C80DB663D3}"/>
-              </a:ext>
-            </a:extLst>
-          </p:cNvPr>
-          <p:cNvSpPr/>
-          <p:nvPr/>
-        </p:nvSpPr>
-        <p:spPr>
-          <a:xfrm>
-            <a:off x="777240" y="4892040"/>
-            <a:ext cx="6217920" cy="320040"/>
+          <p:cNvPr id="59" name="Text 28">
+            <a:extLst>
+              <a:ext uri="{FF2B5EF4-FFF2-40B4-BE49-F238E27FC236}">
+                <a16:creationId xmlns:a16="http://schemas.microsoft.com/office/drawing/2014/main" id="{FD75E54F-417F-3C96-1520-71F8107DB278}"/>
+              </a:ext>
+            </a:extLst>
+          </p:cNvPr>
+          <p:cNvSpPr/>
+          <p:nvPr/>
+        </p:nvSpPr>
+        <p:spPr>
+          <a:xfrm>
+            <a:off x="9153144" y="3017520"/>
+            <a:ext cx="2386584" cy="320040"/>
           </a:xfrm>
           <a:prstGeom prst="rect">
             <a:avLst/>
@@ -7841,36 +6708,81 @@
               <a:buNone/>
             </a:pPr>
             <a:r>
-              <a:rPr lang="en-US" sz="1450" b="1" dirty="0">
-                <a:solidFill>
-                  <a:srgbClr val="1E2761"/>
-                </a:solidFill>
-                <a:latin typeface="Cambria" pitchFamily="34" charset="0"/>
-                <a:ea typeface="Cambria" pitchFamily="34" charset="-122"/>
-                <a:cs typeface="Cambria" pitchFamily="34" charset="-120"/>
-              </a:rPr>
-              <a:t>JwtSettings</a:t>
-            </a:r>
-            <a:endParaRPr lang="en-US" sz="1450" dirty="0"/>
-          </a:p>
-        </p:txBody>
-      </p:sp>
-      <p:sp>
-        <p:nvSpPr>
-          <p:cNvPr id="27" name="Text 12">
-            <a:extLst>
-              <a:ext uri="{FF2B5EF4-FFF2-40B4-BE49-F238E27FC236}">
-                <a16:creationId xmlns:a16="http://schemas.microsoft.com/office/drawing/2014/main" id="{B923C0CA-F2ED-7920-4861-5BB5D0D0B9BD}"/>
-              </a:ext>
-            </a:extLst>
-          </p:cNvPr>
-          <p:cNvSpPr/>
-          <p:nvPr/>
-        </p:nvSpPr>
-        <p:spPr>
-          <a:xfrm>
-            <a:off x="777240" y="5221224"/>
-            <a:ext cx="6217920" cy="640080"/>
+              <a:rPr lang="en-US" sz="1250" b="1" dirty="0">
+                <a:solidFill>
+                  <a:srgbClr val="0B1F3A"/>
+                </a:solidFill>
+                <a:latin typeface="Calibri" pitchFamily="34" charset="0"/>
+                <a:ea typeface="Calibri" pitchFamily="34" charset="-122"/>
+                <a:cs typeface="Calibri" pitchFamily="34" charset="-120"/>
+              </a:rPr>
+              <a:t>PassengerService</a:t>
+            </a:r>
+            <a:endParaRPr lang="en-US" sz="1250" dirty="0"/>
+          </a:p>
+        </p:txBody>
+      </p:sp>
+      <p:sp>
+        <p:nvSpPr>
+          <p:cNvPr id="61" name="Text 29">
+            <a:extLst>
+              <a:ext uri="{FF2B5EF4-FFF2-40B4-BE49-F238E27FC236}">
+                <a16:creationId xmlns:a16="http://schemas.microsoft.com/office/drawing/2014/main" id="{E62B0F33-4572-2C45-7D18-97DECC3F10C5}"/>
+              </a:ext>
+            </a:extLst>
+          </p:cNvPr>
+          <p:cNvSpPr/>
+          <p:nvPr/>
+        </p:nvSpPr>
+        <p:spPr>
+          <a:xfrm>
+            <a:off x="9153144" y="3319272"/>
+            <a:ext cx="2386584" cy="228600"/>
+          </a:xfrm>
+          <a:prstGeom prst="rect">
+            <a:avLst/>
+          </a:prstGeom>
+          <a:noFill/>
+          <a:ln/>
+        </p:spPr>
+        <p:txBody>
+          <a:bodyPr wrap="square" rtlCol="0" anchor="ctr"/>
+          <a:lstStyle/>
+          <a:p>
+            <a:pPr marL="0" indent="0">
+              <a:buNone/>
+            </a:pPr>
+            <a:r>
+              <a:rPr lang="en-US" sz="900" b="1" dirty="0">
+                <a:solidFill>
+                  <a:srgbClr val="B8791F"/>
+                </a:solidFill>
+                <a:latin typeface="Calibri" pitchFamily="34" charset="0"/>
+                <a:ea typeface="Calibri" pitchFamily="34" charset="-122"/>
+                <a:cs typeface="Calibri" pitchFamily="34" charset="-120"/>
+              </a:rPr>
+              <a:t>PORT 5007</a:t>
+            </a:r>
+            <a:endParaRPr lang="en-US" sz="900" dirty="0"/>
+          </a:p>
+        </p:txBody>
+      </p:sp>
+      <p:sp>
+        <p:nvSpPr>
+          <p:cNvPr id="63" name="Text 30">
+            <a:extLst>
+              <a:ext uri="{FF2B5EF4-FFF2-40B4-BE49-F238E27FC236}">
+                <a16:creationId xmlns:a16="http://schemas.microsoft.com/office/drawing/2014/main" id="{07CDE8E5-A321-70F5-5C27-E9E37D5AEFB4}"/>
+              </a:ext>
+            </a:extLst>
+          </p:cNvPr>
+          <p:cNvSpPr/>
+          <p:nvPr/>
+        </p:nvSpPr>
+        <p:spPr>
+          <a:xfrm>
+            <a:off x="9153144" y="3593592"/>
+            <a:ext cx="2386584" cy="658368"/>
           </a:xfrm>
           <a:prstGeom prst="rect">
             <a:avLst/>
@@ -7889,17 +6801,17 @@
               <a:buNone/>
             </a:pPr>
             <a:r>
-              <a:rPr lang="en-US" sz="1050" dirty="0">
-                <a:solidFill>
-                  <a:srgbClr val="1A1A2E"/>
-                </a:solidFill>
-                <a:latin typeface="Courier New" pitchFamily="34" charset="0"/>
-                <a:ea typeface="Courier New" pitchFamily="34" charset="-122"/>
-                <a:cs typeface="Courier New" pitchFamily="34" charset="-120"/>
-              </a:rPr>
-              <a:t>+ string Key</a:t>
-            </a:r>
-            <a:endParaRPr lang="en-US" sz="1050" dirty="0"/>
+              <a:rPr lang="en-US" sz="1000" dirty="0">
+                <a:solidFill>
+                  <a:srgbClr val="1A2233"/>
+                </a:solidFill>
+                <a:latin typeface="Calibri" pitchFamily="34" charset="0"/>
+                <a:ea typeface="Calibri" pitchFamily="34" charset="-122"/>
+                <a:cs typeface="Calibri" pitchFamily="34" charset="-120"/>
+              </a:rPr>
+              <a:t>Identity, OTP,</a:t>
+            </a:r>
+            <a:endParaRPr lang="en-US" sz="1000" dirty="0"/>
           </a:p>
           <a:p>
             <a:pPr marL="0" indent="0">
@@ -7909,199 +6821,101 @@
               <a:buNone/>
             </a:pPr>
             <a:r>
-              <a:rPr lang="en-US" sz="1050" dirty="0">
-                <a:solidFill>
-                  <a:srgbClr val="1A1A2E"/>
-                </a:solidFill>
-                <a:latin typeface="Courier New" pitchFamily="34" charset="0"/>
-                <a:ea typeface="Courier New" pitchFamily="34" charset="-122"/>
-                <a:cs typeface="Courier New" pitchFamily="34" charset="-120"/>
-              </a:rPr>
-              <a:t>+ string Issuer</a:t>
-            </a:r>
-            <a:endParaRPr lang="en-US" sz="1050" dirty="0"/>
-          </a:p>
-          <a:p>
-            <a:pPr marL="0" indent="0">
-              <a:lnSpc>
-                <a:spcPct val="115000"/>
-              </a:lnSpc>
-              <a:buNone/>
-            </a:pPr>
-            <a:r>
-              <a:rPr lang="en-US" sz="1050" dirty="0">
-                <a:solidFill>
-                  <a:srgbClr val="1A1A2E"/>
-                </a:solidFill>
-                <a:latin typeface="Courier New" pitchFamily="34" charset="0"/>
-                <a:ea typeface="Courier New" pitchFamily="34" charset="-122"/>
-                <a:cs typeface="Courier New" pitchFamily="34" charset="-120"/>
-              </a:rPr>
-              <a:t>+ string Audience</a:t>
-            </a:r>
-            <a:endParaRPr lang="en-US" sz="1050" dirty="0"/>
-          </a:p>
-          <a:p>
-            <a:pPr marL="0" indent="0">
-              <a:lnSpc>
-                <a:spcPct val="115000"/>
-              </a:lnSpc>
-              <a:buNone/>
-            </a:pPr>
-            <a:r>
-              <a:rPr lang="en-US" sz="1050" dirty="0">
-                <a:solidFill>
-                  <a:srgbClr val="1A1A2E"/>
-                </a:solidFill>
-                <a:latin typeface="Courier New" pitchFamily="34" charset="0"/>
-                <a:ea typeface="Courier New" pitchFamily="34" charset="-122"/>
-                <a:cs typeface="Courier New" pitchFamily="34" charset="-120"/>
-              </a:rPr>
-              <a:t>+ int ExpirationMinutes</a:t>
-            </a:r>
-            <a:endParaRPr lang="en-US" sz="1050" dirty="0"/>
-          </a:p>
-        </p:txBody>
-      </p:sp>
-      <p:sp>
-        <p:nvSpPr>
-          <p:cNvPr id="29" name="Text 13">
-            <a:extLst>
-              <a:ext uri="{FF2B5EF4-FFF2-40B4-BE49-F238E27FC236}">
-                <a16:creationId xmlns:a16="http://schemas.microsoft.com/office/drawing/2014/main" id="{227C1DC7-6DE9-9700-8072-696205261673}"/>
-              </a:ext>
-            </a:extLst>
-          </p:cNvPr>
-          <p:cNvSpPr/>
-          <p:nvPr/>
-        </p:nvSpPr>
-        <p:spPr>
-          <a:xfrm>
-            <a:off x="777240" y="5925312"/>
-            <a:ext cx="6217920" cy="274320"/>
-          </a:xfrm>
-          <a:prstGeom prst="rect">
-            <a:avLst/>
-          </a:prstGeom>
-          <a:noFill/>
-          <a:ln/>
-        </p:spPr>
-        <p:txBody>
-          <a:bodyPr wrap="square" rtlCol="0" anchor="ctr"/>
-          <a:lstStyle/>
-          <a:p>
-            <a:pPr marL="0" indent="0">
-              <a:buNone/>
-            </a:pPr>
-            <a:r>
-              <a:rPr lang="en-US" sz="950" i="1" dirty="0">
-                <a:solidFill>
-                  <a:srgbClr val="5B6172"/>
+              <a:rPr lang="en-US" sz="1000" dirty="0">
+                <a:solidFill>
+                  <a:srgbClr val="1A2233"/>
                 </a:solidFill>
                 <a:latin typeface="Calibri" pitchFamily="34" charset="0"/>
                 <a:ea typeface="Calibri" pitchFamily="34" charset="-122"/>
                 <a:cs typeface="Calibri" pitchFamily="34" charset="-120"/>
               </a:rPr>
-              <a:t>Bound from configuration and injected into JwtTokenService.</a:t>
-            </a:r>
-            <a:endParaRPr lang="en-US" sz="950" dirty="0"/>
-          </a:p>
-        </p:txBody>
-      </p:sp>
-      <p:sp>
-        <p:nvSpPr>
-          <p:cNvPr id="31" name="Text 14">
-            <a:extLst>
-              <a:ext uri="{FF2B5EF4-FFF2-40B4-BE49-F238E27FC236}">
-                <a16:creationId xmlns:a16="http://schemas.microsoft.com/office/drawing/2014/main" id="{6000C593-20F4-0AB7-259F-049A3DFB9683}"/>
-              </a:ext>
-            </a:extLst>
-          </p:cNvPr>
-          <p:cNvSpPr/>
-          <p:nvPr/>
-        </p:nvSpPr>
-        <p:spPr>
-          <a:xfrm>
-            <a:off x="7498080" y="1600200"/>
-            <a:ext cx="4114800" cy="320040"/>
-          </a:xfrm>
-          <a:prstGeom prst="rect">
+              <a:t>companion profiles</a:t>
+            </a:r>
+            <a:endParaRPr lang="en-US" sz="1000" dirty="0"/>
+          </a:p>
+        </p:txBody>
+      </p:sp>
+      <p:sp>
+        <p:nvSpPr>
+          <p:cNvPr id="65" name="Shape 31">
+            <a:extLst>
+              <a:ext uri="{FF2B5EF4-FFF2-40B4-BE49-F238E27FC236}">
+                <a16:creationId xmlns:a16="http://schemas.microsoft.com/office/drawing/2014/main" id="{657F8075-8798-24F1-F8B7-2E9B4128033B}"/>
+              </a:ext>
+            </a:extLst>
+          </p:cNvPr>
+          <p:cNvSpPr/>
+          <p:nvPr/>
+        </p:nvSpPr>
+        <p:spPr>
+          <a:xfrm>
+            <a:off x="10346436" y="4325112"/>
+            <a:ext cx="0" cy="201168"/>
+          </a:xfrm>
+          <a:prstGeom prst="line">
             <a:avLst/>
           </a:prstGeom>
           <a:noFill/>
-          <a:ln/>
-        </p:spPr>
-        <p:txBody>
-          <a:bodyPr wrap="square" rtlCol="0" anchor="ctr"/>
-          <a:lstStyle/>
-          <a:p>
-            <a:pPr marL="0" indent="0">
-              <a:buNone/>
-            </a:pPr>
-            <a:r>
-              <a:rPr lang="en-US" sz="1500" b="1" dirty="0">
-                <a:solidFill>
-                  <a:srgbClr val="1E2761"/>
-                </a:solidFill>
-                <a:latin typeface="Cambria" pitchFamily="34" charset="0"/>
-                <a:ea typeface="Cambria" pitchFamily="34" charset="-122"/>
-                <a:cs typeface="Cambria" pitchFamily="34" charset="-120"/>
-              </a:rPr>
-              <a:t>Domain Enums</a:t>
-            </a:r>
-            <a:endParaRPr lang="en-US" sz="1500" dirty="0"/>
-          </a:p>
-        </p:txBody>
-      </p:sp>
-      <p:sp>
-        <p:nvSpPr>
-          <p:cNvPr id="33" name="Shape 15">
-            <a:extLst>
-              <a:ext uri="{FF2B5EF4-FFF2-40B4-BE49-F238E27FC236}">
-                <a16:creationId xmlns:a16="http://schemas.microsoft.com/office/drawing/2014/main" id="{A64B8022-B40D-569E-D1CB-2306230EACA9}"/>
-              </a:ext>
-            </a:extLst>
-          </p:cNvPr>
-          <p:cNvSpPr/>
-          <p:nvPr/>
-        </p:nvSpPr>
-        <p:spPr>
-          <a:xfrm>
-            <a:off x="7498080" y="2011680"/>
-            <a:ext cx="4114800" cy="841248"/>
+          <a:ln w="15875">
+            <a:solidFill>
+              <a:srgbClr val="5B6B85"/>
+            </a:solidFill>
+            <a:prstDash val="solid"/>
+            <a:tailEnd type="triangle"/>
+          </a:ln>
+        </p:spPr>
+      </p:sp>
+      <p:sp>
+        <p:nvSpPr>
+          <p:cNvPr id="67" name="Shape 32">
+            <a:extLst>
+              <a:ext uri="{FF2B5EF4-FFF2-40B4-BE49-F238E27FC236}">
+                <a16:creationId xmlns:a16="http://schemas.microsoft.com/office/drawing/2014/main" id="{1F8EF186-A39E-1BF9-E92D-6C62C287BF09}"/>
+              </a:ext>
+            </a:extLst>
+          </p:cNvPr>
+          <p:cNvSpPr/>
+          <p:nvPr/>
+        </p:nvSpPr>
+        <p:spPr>
+          <a:xfrm>
+            <a:off x="539496" y="4526280"/>
+            <a:ext cx="2606040" cy="457200"/>
           </a:xfrm>
           <a:prstGeom prst="roundRect">
             <a:avLst>
-              <a:gd name="adj" fmla="val 7609"/>
+              <a:gd name="adj" fmla="val 70000"/>
             </a:avLst>
           </a:prstGeom>
           <a:solidFill>
-            <a:srgbClr val="FFFFFF"/>
+            <a:schemeClr val="accent2"/>
           </a:solidFill>
-          <a:ln w="12700">
-            <a:solidFill>
-              <a:srgbClr val="1E2761"/>
-            </a:solidFill>
-            <a:prstDash val="solid"/>
-          </a:ln>
-        </p:spPr>
-      </p:sp>
-      <p:sp>
-        <p:nvSpPr>
-          <p:cNvPr id="35" name="Text 16">
-            <a:extLst>
-              <a:ext uri="{FF2B5EF4-FFF2-40B4-BE49-F238E27FC236}">
-                <a16:creationId xmlns:a16="http://schemas.microsoft.com/office/drawing/2014/main" id="{DCE28993-E211-5B32-7E1A-CD23599E6135}"/>
-              </a:ext>
-            </a:extLst>
-          </p:cNvPr>
-          <p:cNvSpPr/>
-          <p:nvPr/>
-        </p:nvSpPr>
-        <p:spPr>
-          <a:xfrm>
-            <a:off x="7680960" y="2066544"/>
-            <a:ext cx="3749040" cy="274320"/>
+          <a:ln/>
+        </p:spPr>
+        <p:txBody>
+          <a:bodyPr/>
+          <a:lstStyle/>
+          <a:p>
+            <a:endParaRPr lang="en-IN"/>
+          </a:p>
+        </p:txBody>
+      </p:sp>
+      <p:sp>
+        <p:nvSpPr>
+          <p:cNvPr id="69" name="Text 33">
+            <a:extLst>
+              <a:ext uri="{FF2B5EF4-FFF2-40B4-BE49-F238E27FC236}">
+                <a16:creationId xmlns:a16="http://schemas.microsoft.com/office/drawing/2014/main" id="{1FB87219-6B02-1699-405B-34F706B5A0FF}"/>
+              </a:ext>
+            </a:extLst>
+          </p:cNvPr>
+          <p:cNvSpPr/>
+          <p:nvPr/>
+        </p:nvSpPr>
+        <p:spPr>
+          <a:xfrm>
+            <a:off x="612648" y="4526280"/>
+            <a:ext cx="2459736" cy="457200"/>
           </a:xfrm>
           <a:prstGeom prst="rect">
             <a:avLst/>
@@ -8113,40 +6927,68 @@
           <a:bodyPr wrap="square" rtlCol="0" anchor="ctr"/>
           <a:lstStyle/>
           <a:p>
-            <a:pPr marL="0" indent="0">
-              <a:buNone/>
-            </a:pPr>
-            <a:r>
-              <a:rPr lang="en-US" sz="1200" b="1" dirty="0">
-                <a:solidFill>
-                  <a:srgbClr val="E8833A"/>
+            <a:pPr marL="0" indent="0" algn="ctr">
+              <a:buNone/>
+            </a:pPr>
+            <a:r>
+              <a:rPr lang="en-US" sz="950" b="1" dirty="0">
+                <a:solidFill>
+                  <a:srgbClr val="CADCFC"/>
                 </a:solidFill>
                 <a:latin typeface="Calibri" pitchFamily="34" charset="0"/>
                 <a:ea typeface="Calibri" pitchFamily="34" charset="-122"/>
                 <a:cs typeface="Calibri" pitchFamily="34" charset="-120"/>
               </a:rPr>
-              <a:t>UserRole</a:t>
-            </a:r>
-            <a:endParaRPr lang="en-US" sz="1200" dirty="0"/>
-          </a:p>
-        </p:txBody>
-      </p:sp>
-      <p:sp>
-        <p:nvSpPr>
-          <p:cNvPr id="37" name="Text 17">
-            <a:extLst>
-              <a:ext uri="{FF2B5EF4-FFF2-40B4-BE49-F238E27FC236}">
-                <a16:creationId xmlns:a16="http://schemas.microsoft.com/office/drawing/2014/main" id="{B83D82F6-EFD3-166B-DEC9-B50B6F06ECE6}"/>
-              </a:ext>
-            </a:extLst>
-          </p:cNvPr>
-          <p:cNvSpPr/>
-          <p:nvPr/>
-        </p:nvSpPr>
-        <p:spPr>
-          <a:xfrm>
-            <a:off x="7680960" y="2322576"/>
-            <a:ext cx="3749040" cy="475488"/>
+              <a:t>Airline_ BackOfficeDB</a:t>
+            </a:r>
+            <a:endParaRPr lang="en-US" sz="950" dirty="0"/>
+          </a:p>
+        </p:txBody>
+      </p:sp>
+      <p:sp>
+        <p:nvSpPr>
+          <p:cNvPr id="71" name="Shape 34">
+            <a:extLst>
+              <a:ext uri="{FF2B5EF4-FFF2-40B4-BE49-F238E27FC236}">
+                <a16:creationId xmlns:a16="http://schemas.microsoft.com/office/drawing/2014/main" id="{3B9387F3-7B97-4368-FA1A-924B02969144}"/>
+              </a:ext>
+            </a:extLst>
+          </p:cNvPr>
+          <p:cNvSpPr/>
+          <p:nvPr/>
+        </p:nvSpPr>
+        <p:spPr>
+          <a:xfrm>
+            <a:off x="3374136" y="4526280"/>
+            <a:ext cx="2606040" cy="457200"/>
+          </a:xfrm>
+          <a:prstGeom prst="roundRect">
+            <a:avLst>
+              <a:gd name="adj" fmla="val 70000"/>
+            </a:avLst>
+          </a:prstGeom>
+          <a:solidFill>
+            <a:schemeClr val="accent2"/>
+          </a:solidFill>
+          <a:ln/>
+        </p:spPr>
+      </p:sp>
+      <p:sp>
+        <p:nvSpPr>
+          <p:cNvPr id="73" name="Text 35">
+            <a:extLst>
+              <a:ext uri="{FF2B5EF4-FFF2-40B4-BE49-F238E27FC236}">
+                <a16:creationId xmlns:a16="http://schemas.microsoft.com/office/drawing/2014/main" id="{9AF20075-D527-45AB-9D52-4D2D6C4D6BF3}"/>
+              </a:ext>
+            </a:extLst>
+          </p:cNvPr>
+          <p:cNvSpPr/>
+          <p:nvPr/>
+        </p:nvSpPr>
+        <p:spPr>
+          <a:xfrm>
+            <a:off x="3447288" y="4526280"/>
+            <a:ext cx="2459736" cy="457200"/>
           </a:xfrm>
           <a:prstGeom prst="rect">
             <a:avLst/>
@@ -8158,76 +7000,68 @@
           <a:bodyPr wrap="square" rtlCol="0" anchor="ctr"/>
           <a:lstStyle/>
           <a:p>
-            <a:pPr marL="0" indent="0">
-              <a:lnSpc>
-                <a:spcPct val="105000"/>
-              </a:lnSpc>
-              <a:buNone/>
-            </a:pPr>
-            <a:r>
-              <a:rPr lang="en-US" sz="880" dirty="0">
-                <a:solidFill>
-                  <a:srgbClr val="1A1A2E"/>
+            <a:pPr marL="0" indent="0" algn="ctr">
+              <a:buNone/>
+            </a:pPr>
+            <a:r>
+              <a:rPr lang="en-US" sz="950" b="1" dirty="0">
+                <a:solidFill>
+                  <a:srgbClr val="CADCFC"/>
                 </a:solidFill>
                 <a:latin typeface="Calibri" pitchFamily="34" charset="0"/>
                 <a:ea typeface="Calibri" pitchFamily="34" charset="-122"/>
                 <a:cs typeface="Calibri" pitchFamily="34" charset="-120"/>
               </a:rPr>
-              <a:t>SuperAdmin, Admin, HR, FinancialAdmin, Staff, Dealer, Passenger</a:t>
-            </a:r>
-            <a:endParaRPr lang="en-US" sz="880" dirty="0"/>
-          </a:p>
-        </p:txBody>
-      </p:sp>
-      <p:sp>
-        <p:nvSpPr>
-          <p:cNvPr id="39" name="Shape 18">
-            <a:extLst>
-              <a:ext uri="{FF2B5EF4-FFF2-40B4-BE49-F238E27FC236}">
-                <a16:creationId xmlns:a16="http://schemas.microsoft.com/office/drawing/2014/main" id="{79302783-DF29-9EDC-1C6C-4427C16FD6CB}"/>
-              </a:ext>
-            </a:extLst>
-          </p:cNvPr>
-          <p:cNvSpPr/>
-          <p:nvPr/>
-        </p:nvSpPr>
-        <p:spPr>
-          <a:xfrm>
-            <a:off x="7498080" y="2962656"/>
-            <a:ext cx="4114800" cy="841248"/>
+              <a:t>Airline_ FlightOpsDB</a:t>
+            </a:r>
+            <a:endParaRPr lang="en-US" sz="950" dirty="0"/>
+          </a:p>
+        </p:txBody>
+      </p:sp>
+      <p:sp>
+        <p:nvSpPr>
+          <p:cNvPr id="75" name="Shape 36">
+            <a:extLst>
+              <a:ext uri="{FF2B5EF4-FFF2-40B4-BE49-F238E27FC236}">
+                <a16:creationId xmlns:a16="http://schemas.microsoft.com/office/drawing/2014/main" id="{9B103F5E-DF8F-82DE-B49D-E9BFDCF69ED4}"/>
+              </a:ext>
+            </a:extLst>
+          </p:cNvPr>
+          <p:cNvSpPr/>
+          <p:nvPr/>
+        </p:nvSpPr>
+        <p:spPr>
+          <a:xfrm>
+            <a:off x="6208776" y="4526280"/>
+            <a:ext cx="2606040" cy="457200"/>
           </a:xfrm>
           <a:prstGeom prst="roundRect">
             <a:avLst>
-              <a:gd name="adj" fmla="val 7609"/>
+              <a:gd name="adj" fmla="val 70000"/>
             </a:avLst>
           </a:prstGeom>
           <a:solidFill>
-            <a:srgbClr val="FFFFFF"/>
+            <a:schemeClr val="accent2"/>
           </a:solidFill>
-          <a:ln w="12700">
-            <a:solidFill>
-              <a:srgbClr val="1E2761"/>
-            </a:solidFill>
-            <a:prstDash val="solid"/>
-          </a:ln>
-        </p:spPr>
-      </p:sp>
-      <p:sp>
-        <p:nvSpPr>
-          <p:cNvPr id="41" name="Text 19">
-            <a:extLst>
-              <a:ext uri="{FF2B5EF4-FFF2-40B4-BE49-F238E27FC236}">
-                <a16:creationId xmlns:a16="http://schemas.microsoft.com/office/drawing/2014/main" id="{3E2CA9D1-13C6-5EB1-1BED-37508B3C54DE}"/>
-              </a:ext>
-            </a:extLst>
-          </p:cNvPr>
-          <p:cNvSpPr/>
-          <p:nvPr/>
-        </p:nvSpPr>
-        <p:spPr>
-          <a:xfrm>
-            <a:off x="7680960" y="3017520"/>
-            <a:ext cx="3749040" cy="274320"/>
+          <a:ln/>
+        </p:spPr>
+      </p:sp>
+      <p:sp>
+        <p:nvSpPr>
+          <p:cNvPr id="77" name="Text 37">
+            <a:extLst>
+              <a:ext uri="{FF2B5EF4-FFF2-40B4-BE49-F238E27FC236}">
+                <a16:creationId xmlns:a16="http://schemas.microsoft.com/office/drawing/2014/main" id="{716BD4E6-A3AC-8AEE-2C3F-0B39B6B7F4E3}"/>
+              </a:ext>
+            </a:extLst>
+          </p:cNvPr>
+          <p:cNvSpPr/>
+          <p:nvPr/>
+        </p:nvSpPr>
+        <p:spPr>
+          <a:xfrm>
+            <a:off x="6281928" y="4526280"/>
+            <a:ext cx="2459736" cy="457200"/>
           </a:xfrm>
           <a:prstGeom prst="rect">
             <a:avLst/>
@@ -8239,40 +7073,68 @@
           <a:bodyPr wrap="square" rtlCol="0" anchor="ctr"/>
           <a:lstStyle/>
           <a:p>
-            <a:pPr marL="0" indent="0">
-              <a:buNone/>
-            </a:pPr>
-            <a:r>
-              <a:rPr lang="en-US" sz="1200" b="1" dirty="0">
-                <a:solidFill>
-                  <a:srgbClr val="E8833A"/>
+            <a:pPr marL="0" indent="0" algn="ctr">
+              <a:buNone/>
+            </a:pPr>
+            <a:r>
+              <a:rPr lang="en-US" sz="950" b="1" dirty="0">
+                <a:solidFill>
+                  <a:srgbClr val="CADCFC"/>
                 </a:solidFill>
                 <a:latin typeface="Calibri" pitchFamily="34" charset="0"/>
                 <a:ea typeface="Calibri" pitchFamily="34" charset="-122"/>
                 <a:cs typeface="Calibri" pitchFamily="34" charset="-120"/>
               </a:rPr>
-              <a:t>BookingStatus</a:t>
-            </a:r>
-            <a:endParaRPr lang="en-US" sz="1200" dirty="0"/>
-          </a:p>
-        </p:txBody>
-      </p:sp>
-      <p:sp>
-        <p:nvSpPr>
-          <p:cNvPr id="43" name="Text 20">
-            <a:extLst>
-              <a:ext uri="{FF2B5EF4-FFF2-40B4-BE49-F238E27FC236}">
-                <a16:creationId xmlns:a16="http://schemas.microsoft.com/office/drawing/2014/main" id="{CF040221-F43B-0E91-5D26-F16305CCA55E}"/>
-              </a:ext>
-            </a:extLst>
-          </p:cNvPr>
-          <p:cNvSpPr/>
-          <p:nvPr/>
-        </p:nvSpPr>
-        <p:spPr>
-          <a:xfrm>
-            <a:off x="7680960" y="3273552"/>
-            <a:ext cx="3749040" cy="475488"/>
+              <a:t>Airline_ PaymentDB</a:t>
+            </a:r>
+            <a:endParaRPr lang="en-US" sz="950" dirty="0"/>
+          </a:p>
+        </p:txBody>
+      </p:sp>
+      <p:sp>
+        <p:nvSpPr>
+          <p:cNvPr id="79" name="Shape 38">
+            <a:extLst>
+              <a:ext uri="{FF2B5EF4-FFF2-40B4-BE49-F238E27FC236}">
+                <a16:creationId xmlns:a16="http://schemas.microsoft.com/office/drawing/2014/main" id="{843DD914-70FC-A0C6-72B6-21682EBC0DDE}"/>
+              </a:ext>
+            </a:extLst>
+          </p:cNvPr>
+          <p:cNvSpPr/>
+          <p:nvPr/>
+        </p:nvSpPr>
+        <p:spPr>
+          <a:xfrm>
+            <a:off x="9043416" y="4526280"/>
+            <a:ext cx="2606040" cy="457200"/>
+          </a:xfrm>
+          <a:prstGeom prst="roundRect">
+            <a:avLst>
+              <a:gd name="adj" fmla="val 70000"/>
+            </a:avLst>
+          </a:prstGeom>
+          <a:solidFill>
+            <a:schemeClr val="accent2"/>
+          </a:solidFill>
+          <a:ln/>
+        </p:spPr>
+      </p:sp>
+      <p:sp>
+        <p:nvSpPr>
+          <p:cNvPr id="81" name="Text 39">
+            <a:extLst>
+              <a:ext uri="{FF2B5EF4-FFF2-40B4-BE49-F238E27FC236}">
+                <a16:creationId xmlns:a16="http://schemas.microsoft.com/office/drawing/2014/main" id="{4D3797B6-47B3-BF7B-3FC7-5EBAF1E091B2}"/>
+              </a:ext>
+            </a:extLst>
+          </p:cNvPr>
+          <p:cNvSpPr/>
+          <p:nvPr/>
+        </p:nvSpPr>
+        <p:spPr>
+          <a:xfrm>
+            <a:off x="9116568" y="4526280"/>
+            <a:ext cx="2459736" cy="457200"/>
           </a:xfrm>
           <a:prstGeom prst="rect">
             <a:avLst/>
@@ -8284,409 +7146,28 @@
           <a:bodyPr wrap="square" rtlCol="0" anchor="ctr"/>
           <a:lstStyle/>
           <a:p>
-            <a:pPr marL="0" indent="0">
-              <a:lnSpc>
-                <a:spcPct val="105000"/>
-              </a:lnSpc>
-              <a:buNone/>
-            </a:pPr>
-            <a:r>
-              <a:rPr lang="en-US" sz="880" dirty="0">
-                <a:solidFill>
-                  <a:srgbClr val="1A1A2E"/>
+            <a:pPr marL="0" indent="0" algn="ctr">
+              <a:buNone/>
+            </a:pPr>
+            <a:r>
+              <a:rPr lang="en-US" sz="950" b="1" dirty="0">
+                <a:solidFill>
+                  <a:srgbClr val="CADCFC"/>
                 </a:solidFill>
                 <a:latin typeface="Calibri" pitchFamily="34" charset="0"/>
                 <a:ea typeface="Calibri" pitchFamily="34" charset="-122"/>
                 <a:cs typeface="Calibri" pitchFamily="34" charset="-120"/>
               </a:rPr>
-              <a:t>Pending, Confirmed, CheckedIn, Completed, Cancelled, PartiallyCancelled, PaymentFailed</a:t>
-            </a:r>
-            <a:endParaRPr lang="en-US" sz="880" dirty="0"/>
-          </a:p>
-        </p:txBody>
-      </p:sp>
-      <p:sp>
-        <p:nvSpPr>
-          <p:cNvPr id="45" name="Shape 21">
-            <a:extLst>
-              <a:ext uri="{FF2B5EF4-FFF2-40B4-BE49-F238E27FC236}">
-                <a16:creationId xmlns:a16="http://schemas.microsoft.com/office/drawing/2014/main" id="{A1509DF8-3CD2-E52C-349B-8645DBD4E781}"/>
-              </a:ext>
-            </a:extLst>
-          </p:cNvPr>
-          <p:cNvSpPr/>
-          <p:nvPr/>
-        </p:nvSpPr>
-        <p:spPr>
-          <a:xfrm>
-            <a:off x="7498080" y="3913632"/>
-            <a:ext cx="4114800" cy="841248"/>
-          </a:xfrm>
-          <a:prstGeom prst="roundRect">
-            <a:avLst>
-              <a:gd name="adj" fmla="val 7609"/>
-            </a:avLst>
-          </a:prstGeom>
-          <a:solidFill>
-            <a:srgbClr val="FFFFFF"/>
-          </a:solidFill>
-          <a:ln w="12700">
-            <a:solidFill>
-              <a:srgbClr val="1E2761"/>
-            </a:solidFill>
-            <a:prstDash val="solid"/>
-          </a:ln>
-        </p:spPr>
-      </p:sp>
-      <p:sp>
-        <p:nvSpPr>
-          <p:cNvPr id="47" name="Text 22">
-            <a:extLst>
-              <a:ext uri="{FF2B5EF4-FFF2-40B4-BE49-F238E27FC236}">
-                <a16:creationId xmlns:a16="http://schemas.microsoft.com/office/drawing/2014/main" id="{9E3D8D94-7A81-D805-0BAA-C8F2F68CEE81}"/>
-              </a:ext>
-            </a:extLst>
-          </p:cNvPr>
-          <p:cNvSpPr/>
-          <p:nvPr/>
-        </p:nvSpPr>
-        <p:spPr>
-          <a:xfrm>
-            <a:off x="7680960" y="3968496"/>
-            <a:ext cx="3749040" cy="274320"/>
-          </a:xfrm>
-          <a:prstGeom prst="rect">
-            <a:avLst/>
-          </a:prstGeom>
-          <a:noFill/>
-          <a:ln/>
-        </p:spPr>
-        <p:txBody>
-          <a:bodyPr wrap="square" rtlCol="0" anchor="ctr"/>
-          <a:lstStyle/>
-          <a:p>
-            <a:pPr marL="0" indent="0">
-              <a:buNone/>
-            </a:pPr>
-            <a:r>
-              <a:rPr lang="en-US" sz="1200" b="1" dirty="0">
-                <a:solidFill>
-                  <a:srgbClr val="E8833A"/>
-                </a:solidFill>
-                <a:latin typeface="Calibri" pitchFamily="34" charset="0"/>
-                <a:ea typeface="Calibri" pitchFamily="34" charset="-122"/>
-                <a:cs typeface="Calibri" pitchFamily="34" charset="-120"/>
-              </a:rPr>
-              <a:t>PaymentStatus</a:t>
-            </a:r>
-            <a:endParaRPr lang="en-US" sz="1200" dirty="0"/>
-          </a:p>
-        </p:txBody>
-      </p:sp>
-      <p:sp>
-        <p:nvSpPr>
-          <p:cNvPr id="49" name="Text 23">
-            <a:extLst>
-              <a:ext uri="{FF2B5EF4-FFF2-40B4-BE49-F238E27FC236}">
-                <a16:creationId xmlns:a16="http://schemas.microsoft.com/office/drawing/2014/main" id="{60E2A914-91A8-1A86-9847-FD2785E42707}"/>
-              </a:ext>
-            </a:extLst>
-          </p:cNvPr>
-          <p:cNvSpPr/>
-          <p:nvPr/>
-        </p:nvSpPr>
-        <p:spPr>
-          <a:xfrm>
-            <a:off x="7680960" y="4224528"/>
-            <a:ext cx="3749040" cy="475488"/>
-          </a:xfrm>
-          <a:prstGeom prst="rect">
-            <a:avLst/>
-          </a:prstGeom>
-          <a:noFill/>
-          <a:ln/>
-        </p:spPr>
-        <p:txBody>
-          <a:bodyPr wrap="square" rtlCol="0" anchor="ctr"/>
-          <a:lstStyle/>
-          <a:p>
-            <a:pPr marL="0" indent="0">
-              <a:lnSpc>
-                <a:spcPct val="105000"/>
-              </a:lnSpc>
-              <a:buNone/>
-            </a:pPr>
-            <a:r>
-              <a:rPr lang="en-US" sz="880" dirty="0">
-                <a:solidFill>
-                  <a:srgbClr val="1A1A2E"/>
-                </a:solidFill>
-                <a:latin typeface="Calibri" pitchFamily="34" charset="0"/>
-                <a:ea typeface="Calibri" pitchFamily="34" charset="-122"/>
-                <a:cs typeface="Calibri" pitchFamily="34" charset="-120"/>
-              </a:rPr>
-              <a:t>Pending, Success, Failed, Refunded</a:t>
-            </a:r>
-            <a:endParaRPr lang="en-US" sz="880" dirty="0"/>
-          </a:p>
-        </p:txBody>
-      </p:sp>
-      <p:sp>
-        <p:nvSpPr>
-          <p:cNvPr id="51" name="Shape 24">
-            <a:extLst>
-              <a:ext uri="{FF2B5EF4-FFF2-40B4-BE49-F238E27FC236}">
-                <a16:creationId xmlns:a16="http://schemas.microsoft.com/office/drawing/2014/main" id="{6A4361D2-F165-D579-0F59-C1143F38433A}"/>
-              </a:ext>
-            </a:extLst>
-          </p:cNvPr>
-          <p:cNvSpPr/>
-          <p:nvPr/>
-        </p:nvSpPr>
-        <p:spPr>
-          <a:xfrm>
-            <a:off x="7498080" y="4864608"/>
-            <a:ext cx="4114800" cy="841248"/>
-          </a:xfrm>
-          <a:prstGeom prst="roundRect">
-            <a:avLst>
-              <a:gd name="adj" fmla="val 7609"/>
-            </a:avLst>
-          </a:prstGeom>
-          <a:solidFill>
-            <a:srgbClr val="FFFFFF"/>
-          </a:solidFill>
-          <a:ln w="12700">
-            <a:solidFill>
-              <a:srgbClr val="1E2761"/>
-            </a:solidFill>
-            <a:prstDash val="solid"/>
-          </a:ln>
-        </p:spPr>
-      </p:sp>
-      <p:sp>
-        <p:nvSpPr>
-          <p:cNvPr id="53" name="Text 25">
-            <a:extLst>
-              <a:ext uri="{FF2B5EF4-FFF2-40B4-BE49-F238E27FC236}">
-                <a16:creationId xmlns:a16="http://schemas.microsoft.com/office/drawing/2014/main" id="{77860B1C-E620-C037-1459-5E1326B27471}"/>
-              </a:ext>
-            </a:extLst>
-          </p:cNvPr>
-          <p:cNvSpPr/>
-          <p:nvPr/>
-        </p:nvSpPr>
-        <p:spPr>
-          <a:xfrm>
-            <a:off x="7680960" y="4919472"/>
-            <a:ext cx="3749040" cy="274320"/>
-          </a:xfrm>
-          <a:prstGeom prst="rect">
-            <a:avLst/>
-          </a:prstGeom>
-          <a:noFill/>
-          <a:ln/>
-        </p:spPr>
-        <p:txBody>
-          <a:bodyPr wrap="square" rtlCol="0" anchor="ctr"/>
-          <a:lstStyle/>
-          <a:p>
-            <a:pPr marL="0" indent="0">
-              <a:buNone/>
-            </a:pPr>
-            <a:r>
-              <a:rPr lang="en-US" sz="1200" b="1" dirty="0">
-                <a:solidFill>
-                  <a:srgbClr val="E8833A"/>
-                </a:solidFill>
-                <a:latin typeface="Calibri" pitchFamily="34" charset="0"/>
-                <a:ea typeface="Calibri" pitchFamily="34" charset="-122"/>
-                <a:cs typeface="Calibri" pitchFamily="34" charset="-120"/>
-              </a:rPr>
-              <a:t>FlightStatus</a:t>
-            </a:r>
-            <a:endParaRPr lang="en-US" sz="1200" dirty="0"/>
-          </a:p>
-        </p:txBody>
-      </p:sp>
-      <p:sp>
-        <p:nvSpPr>
-          <p:cNvPr id="55" name="Text 26">
-            <a:extLst>
-              <a:ext uri="{FF2B5EF4-FFF2-40B4-BE49-F238E27FC236}">
-                <a16:creationId xmlns:a16="http://schemas.microsoft.com/office/drawing/2014/main" id="{2EFEDB9A-824C-349D-250A-5A30FB58CE6B}"/>
-              </a:ext>
-            </a:extLst>
-          </p:cNvPr>
-          <p:cNvSpPr/>
-          <p:nvPr/>
-        </p:nvSpPr>
-        <p:spPr>
-          <a:xfrm>
-            <a:off x="7680960" y="5175504"/>
-            <a:ext cx="3749040" cy="475488"/>
-          </a:xfrm>
-          <a:prstGeom prst="rect">
-            <a:avLst/>
-          </a:prstGeom>
-          <a:noFill/>
-          <a:ln/>
-        </p:spPr>
-        <p:txBody>
-          <a:bodyPr wrap="square" rtlCol="0" anchor="ctr"/>
-          <a:lstStyle/>
-          <a:p>
-            <a:pPr marL="0" indent="0">
-              <a:lnSpc>
-                <a:spcPct val="105000"/>
-              </a:lnSpc>
-              <a:buNone/>
-            </a:pPr>
-            <a:r>
-              <a:rPr lang="en-US" sz="880" dirty="0">
-                <a:solidFill>
-                  <a:srgbClr val="1A1A2E"/>
-                </a:solidFill>
-                <a:latin typeface="Calibri" pitchFamily="34" charset="0"/>
-                <a:ea typeface="Calibri" pitchFamily="34" charset="-122"/>
-                <a:cs typeface="Calibri" pitchFamily="34" charset="-120"/>
-              </a:rPr>
-              <a:t>Scheduled, Boarding, Departed, InFlight, Landed, Delayed, Cancelled, Completed</a:t>
-            </a:r>
-            <a:endParaRPr lang="en-US" sz="880" dirty="0"/>
-          </a:p>
-        </p:txBody>
-      </p:sp>
-      <p:sp>
-        <p:nvSpPr>
-          <p:cNvPr id="57" name="Shape 27">
-            <a:extLst>
-              <a:ext uri="{FF2B5EF4-FFF2-40B4-BE49-F238E27FC236}">
-                <a16:creationId xmlns:a16="http://schemas.microsoft.com/office/drawing/2014/main" id="{3837FFD6-137F-7460-5F0E-12ED9EDF4C3E}"/>
-              </a:ext>
-            </a:extLst>
-          </p:cNvPr>
-          <p:cNvSpPr/>
-          <p:nvPr/>
-        </p:nvSpPr>
-        <p:spPr>
-          <a:xfrm>
-            <a:off x="7498080" y="5815584"/>
-            <a:ext cx="4114800" cy="841248"/>
-          </a:xfrm>
-          <a:prstGeom prst="roundRect">
-            <a:avLst>
-              <a:gd name="adj" fmla="val 7609"/>
-            </a:avLst>
-          </a:prstGeom>
-          <a:solidFill>
-            <a:srgbClr val="FFFFFF"/>
-          </a:solidFill>
-          <a:ln w="12700">
-            <a:solidFill>
-              <a:srgbClr val="1E2761"/>
-            </a:solidFill>
-            <a:prstDash val="solid"/>
-          </a:ln>
-        </p:spPr>
-      </p:sp>
-      <p:sp>
-        <p:nvSpPr>
-          <p:cNvPr id="59" name="Text 28">
-            <a:extLst>
-              <a:ext uri="{FF2B5EF4-FFF2-40B4-BE49-F238E27FC236}">
-                <a16:creationId xmlns:a16="http://schemas.microsoft.com/office/drawing/2014/main" id="{43A7FD88-8493-8610-03DC-5E46C4F6585E}"/>
-              </a:ext>
-            </a:extLst>
-          </p:cNvPr>
-          <p:cNvSpPr/>
-          <p:nvPr/>
-        </p:nvSpPr>
-        <p:spPr>
-          <a:xfrm>
-            <a:off x="7680960" y="5870448"/>
-            <a:ext cx="3749040" cy="274320"/>
-          </a:xfrm>
-          <a:prstGeom prst="rect">
-            <a:avLst/>
-          </a:prstGeom>
-          <a:noFill/>
-          <a:ln/>
-        </p:spPr>
-        <p:txBody>
-          <a:bodyPr wrap="square" rtlCol="0" anchor="ctr"/>
-          <a:lstStyle/>
-          <a:p>
-            <a:pPr marL="0" indent="0">
-              <a:buNone/>
-            </a:pPr>
-            <a:r>
-              <a:rPr lang="en-US" sz="1200" b="1" dirty="0">
-                <a:solidFill>
-                  <a:srgbClr val="E8833A"/>
-                </a:solidFill>
-                <a:latin typeface="Calibri" pitchFamily="34" charset="0"/>
-                <a:ea typeface="Calibri" pitchFamily="34" charset="-122"/>
-                <a:cs typeface="Calibri" pitchFamily="34" charset="-120"/>
-              </a:rPr>
-              <a:t>SeatClass</a:t>
-            </a:r>
-            <a:endParaRPr lang="en-US" sz="1200" dirty="0"/>
-          </a:p>
-        </p:txBody>
-      </p:sp>
-      <p:sp>
-        <p:nvSpPr>
-          <p:cNvPr id="61" name="Text 29">
-            <a:extLst>
-              <a:ext uri="{FF2B5EF4-FFF2-40B4-BE49-F238E27FC236}">
-                <a16:creationId xmlns:a16="http://schemas.microsoft.com/office/drawing/2014/main" id="{E996EA33-405E-AD28-C6F4-8ED6BEA468DC}"/>
-              </a:ext>
-            </a:extLst>
-          </p:cNvPr>
-          <p:cNvSpPr/>
-          <p:nvPr/>
-        </p:nvSpPr>
-        <p:spPr>
-          <a:xfrm>
-            <a:off x="7680960" y="6126480"/>
-            <a:ext cx="3749040" cy="475488"/>
-          </a:xfrm>
-          <a:prstGeom prst="rect">
-            <a:avLst/>
-          </a:prstGeom>
-          <a:noFill/>
-          <a:ln/>
-        </p:spPr>
-        <p:txBody>
-          <a:bodyPr wrap="square" rtlCol="0" anchor="ctr"/>
-          <a:lstStyle/>
-          <a:p>
-            <a:pPr marL="0" indent="0">
-              <a:lnSpc>
-                <a:spcPct val="105000"/>
-              </a:lnSpc>
-              <a:buNone/>
-            </a:pPr>
-            <a:r>
-              <a:rPr lang="en-US" sz="880" dirty="0">
-                <a:solidFill>
-                  <a:srgbClr val="1A1A2E"/>
-                </a:solidFill>
-                <a:latin typeface="Calibri" pitchFamily="34" charset="0"/>
-                <a:ea typeface="Calibri" pitchFamily="34" charset="-122"/>
-                <a:cs typeface="Calibri" pitchFamily="34" charset="-120"/>
-              </a:rPr>
-              <a:t>Economy, Business, First</a:t>
-            </a:r>
-            <a:endParaRPr lang="en-US" sz="880" dirty="0"/>
+              <a:t>Airline_ PassengerDB</a:t>
+            </a:r>
+            <a:endParaRPr lang="en-US" sz="950" dirty="0"/>
           </a:p>
         </p:txBody>
       </p:sp>
     </p:spTree>
     <p:extLst>
       <p:ext uri="{BB962C8B-B14F-4D97-AF65-F5344CB8AC3E}">
-        <p14:creationId xmlns:p14="http://schemas.microsoft.com/office/powerpoint/2010/main" val="2764574286"/>
+        <p14:creationId xmlns:p14="http://schemas.microsoft.com/office/powerpoint/2010/main" val="2970446841"/>
       </p:ext>
     </p:extLst>
   </p:cSld>
@@ -8718,6 +7199,1454 @@
           <p:cNvPr id="3" name="Text 0">
             <a:extLst>
               <a:ext uri="{FF2B5EF4-FFF2-40B4-BE49-F238E27FC236}">
+                <a16:creationId xmlns:a16="http://schemas.microsoft.com/office/drawing/2014/main" id="{ABA8438D-DD4C-7B22-44F4-28A28416205E}"/>
+              </a:ext>
+            </a:extLst>
+          </p:cNvPr>
+          <p:cNvSpPr/>
+          <p:nvPr/>
+        </p:nvSpPr>
+        <p:spPr>
+          <a:xfrm>
+            <a:off x="548640" y="365760"/>
+            <a:ext cx="11064240" cy="640080"/>
+          </a:xfrm>
+          <a:prstGeom prst="rect">
+            <a:avLst/>
+          </a:prstGeom>
+          <a:noFill/>
+          <a:ln/>
+        </p:spPr>
+        <p:txBody>
+          <a:bodyPr wrap="square" rtlCol="0" anchor="ctr"/>
+          <a:lstStyle/>
+          <a:p>
+            <a:pPr marL="0" indent="0" algn="l">
+              <a:buNone/>
+            </a:pPr>
+            <a:r>
+              <a:rPr lang="en-US" sz="3000" b="1" dirty="0">
+                <a:solidFill>
+                  <a:srgbClr val="1E2761"/>
+                </a:solidFill>
+                <a:latin typeface="Cambria" pitchFamily="34" charset="0"/>
+                <a:ea typeface="Cambria" pitchFamily="34" charset="-122"/>
+                <a:cs typeface="Cambria" pitchFamily="34" charset="-120"/>
+              </a:rPr>
+              <a:t>Shared Common Infrastructure</a:t>
+            </a:r>
+            <a:endParaRPr lang="en-US" sz="3000" dirty="0"/>
+          </a:p>
+        </p:txBody>
+      </p:sp>
+      <p:sp>
+        <p:nvSpPr>
+          <p:cNvPr id="5" name="Text 1">
+            <a:extLst>
+              <a:ext uri="{FF2B5EF4-FFF2-40B4-BE49-F238E27FC236}">
+                <a16:creationId xmlns:a16="http://schemas.microsoft.com/office/drawing/2014/main" id="{B2886291-7C6B-49F2-DBAC-449710161ABE}"/>
+              </a:ext>
+            </a:extLst>
+          </p:cNvPr>
+          <p:cNvSpPr/>
+          <p:nvPr/>
+        </p:nvSpPr>
+        <p:spPr>
+          <a:xfrm>
+            <a:off x="548640" y="932688"/>
+            <a:ext cx="11064240" cy="365760"/>
+          </a:xfrm>
+          <a:prstGeom prst="rect">
+            <a:avLst/>
+          </a:prstGeom>
+          <a:noFill/>
+          <a:ln/>
+        </p:spPr>
+        <p:txBody>
+          <a:bodyPr wrap="square" rtlCol="0" anchor="ctr"/>
+          <a:lstStyle/>
+          <a:p>
+            <a:pPr marL="0" indent="0" algn="l">
+              <a:buNone/>
+            </a:pPr>
+            <a:r>
+              <a:rPr lang="en-US" sz="1350" i="1" dirty="0">
+                <a:solidFill>
+                  <a:srgbClr val="5B6172"/>
+                </a:solidFill>
+                <a:latin typeface="Calibri" pitchFamily="34" charset="0"/>
+                <a:ea typeface="Calibri" pitchFamily="34" charset="-122"/>
+                <a:cs typeface="Calibri" pitchFamily="34" charset="-120"/>
+              </a:rPr>
+              <a:t>Reusable base entities, security helpers &amp; domain enums used across all four services</a:t>
+            </a:r>
+            <a:endParaRPr lang="en-US" sz="1350" dirty="0"/>
+          </a:p>
+        </p:txBody>
+      </p:sp>
+      <p:sp>
+        <p:nvSpPr>
+          <p:cNvPr id="7" name="Shape 2">
+            <a:extLst>
+              <a:ext uri="{FF2B5EF4-FFF2-40B4-BE49-F238E27FC236}">
+                <a16:creationId xmlns:a16="http://schemas.microsoft.com/office/drawing/2014/main" id="{08109F90-7D7B-B1F3-C506-115ED8795C4C}"/>
+              </a:ext>
+            </a:extLst>
+          </p:cNvPr>
+          <p:cNvSpPr/>
+          <p:nvPr/>
+        </p:nvSpPr>
+        <p:spPr>
+          <a:xfrm>
+            <a:off x="548640" y="1600200"/>
+            <a:ext cx="6675120" cy="1417320"/>
+          </a:xfrm>
+          <a:prstGeom prst="roundRect">
+            <a:avLst>
+              <a:gd name="adj" fmla="val 5161"/>
+            </a:avLst>
+          </a:prstGeom>
+          <a:solidFill>
+            <a:srgbClr val="EEF3FD"/>
+          </a:solidFill>
+          <a:ln w="12700">
+            <a:solidFill>
+              <a:srgbClr val="DCE3F2"/>
+            </a:solidFill>
+            <a:prstDash val="solid"/>
+          </a:ln>
+        </p:spPr>
+      </p:sp>
+      <p:sp>
+        <p:nvSpPr>
+          <p:cNvPr id="9" name="Text 3">
+            <a:extLst>
+              <a:ext uri="{FF2B5EF4-FFF2-40B4-BE49-F238E27FC236}">
+                <a16:creationId xmlns:a16="http://schemas.microsoft.com/office/drawing/2014/main" id="{EC55E18F-C395-1ECC-CD30-4F64F4D00FD9}"/>
+              </a:ext>
+            </a:extLst>
+          </p:cNvPr>
+          <p:cNvSpPr/>
+          <p:nvPr/>
+        </p:nvSpPr>
+        <p:spPr>
+          <a:xfrm>
+            <a:off x="777240" y="1691640"/>
+            <a:ext cx="6217920" cy="320040"/>
+          </a:xfrm>
+          <a:prstGeom prst="rect">
+            <a:avLst/>
+          </a:prstGeom>
+          <a:noFill/>
+          <a:ln/>
+        </p:spPr>
+        <p:txBody>
+          <a:bodyPr wrap="square" rtlCol="0" anchor="ctr"/>
+          <a:lstStyle/>
+          <a:p>
+            <a:pPr marL="0" indent="0">
+              <a:buNone/>
+            </a:pPr>
+            <a:r>
+              <a:rPr lang="en-US" sz="1450" b="1" dirty="0">
+                <a:solidFill>
+                  <a:srgbClr val="1E2761"/>
+                </a:solidFill>
+                <a:latin typeface="Cambria" pitchFamily="34" charset="0"/>
+                <a:ea typeface="Cambria" pitchFamily="34" charset="-122"/>
+                <a:cs typeface="Cambria" pitchFamily="34" charset="-120"/>
+              </a:rPr>
+              <a:t>BaseEntity&lt;TId&gt;</a:t>
+            </a:r>
+            <a:endParaRPr lang="en-US" sz="1450" dirty="0"/>
+          </a:p>
+        </p:txBody>
+      </p:sp>
+      <p:sp>
+        <p:nvSpPr>
+          <p:cNvPr id="11" name="Text 4">
+            <a:extLst>
+              <a:ext uri="{FF2B5EF4-FFF2-40B4-BE49-F238E27FC236}">
+                <a16:creationId xmlns:a16="http://schemas.microsoft.com/office/drawing/2014/main" id="{1EF53BC6-11E9-C7C7-52B0-9A9288CB2828}"/>
+              </a:ext>
+            </a:extLst>
+          </p:cNvPr>
+          <p:cNvSpPr/>
+          <p:nvPr/>
+        </p:nvSpPr>
+        <p:spPr>
+          <a:xfrm>
+            <a:off x="777240" y="2020824"/>
+            <a:ext cx="6217920" cy="640080"/>
+          </a:xfrm>
+          <a:prstGeom prst="rect">
+            <a:avLst/>
+          </a:prstGeom>
+          <a:noFill/>
+          <a:ln/>
+        </p:spPr>
+        <p:txBody>
+          <a:bodyPr wrap="square" rtlCol="0" anchor="ctr"/>
+          <a:lstStyle/>
+          <a:p>
+            <a:pPr marL="0" indent="0">
+              <a:lnSpc>
+                <a:spcPct val="115000"/>
+              </a:lnSpc>
+              <a:buNone/>
+            </a:pPr>
+            <a:r>
+              <a:rPr lang="en-US" sz="1050" dirty="0">
+                <a:solidFill>
+                  <a:srgbClr val="1A1A2E"/>
+                </a:solidFill>
+                <a:latin typeface="Courier New" pitchFamily="34" charset="0"/>
+                <a:ea typeface="Courier New" pitchFamily="34" charset="-122"/>
+                <a:cs typeface="Courier New" pitchFamily="34" charset="-120"/>
+              </a:rPr>
+              <a:t>+ TId Id</a:t>
+            </a:r>
+            <a:endParaRPr lang="en-US" sz="1050" dirty="0"/>
+          </a:p>
+          <a:p>
+            <a:pPr marL="0" indent="0">
+              <a:lnSpc>
+                <a:spcPct val="115000"/>
+              </a:lnSpc>
+              <a:buNone/>
+            </a:pPr>
+            <a:r>
+              <a:rPr lang="en-US" sz="1050" dirty="0">
+                <a:solidFill>
+                  <a:srgbClr val="1A1A2E"/>
+                </a:solidFill>
+                <a:latin typeface="Courier New" pitchFamily="34" charset="0"/>
+                <a:ea typeface="Courier New" pitchFamily="34" charset="-122"/>
+                <a:cs typeface="Courier New" pitchFamily="34" charset="-120"/>
+              </a:rPr>
+              <a:t>+ DateTime CreatedAt</a:t>
+            </a:r>
+            <a:endParaRPr lang="en-US" sz="1050" dirty="0"/>
+          </a:p>
+          <a:p>
+            <a:pPr marL="0" indent="0">
+              <a:lnSpc>
+                <a:spcPct val="115000"/>
+              </a:lnSpc>
+              <a:buNone/>
+            </a:pPr>
+            <a:r>
+              <a:rPr lang="en-US" sz="1050" dirty="0">
+                <a:solidFill>
+                  <a:srgbClr val="1A1A2E"/>
+                </a:solidFill>
+                <a:latin typeface="Courier New" pitchFamily="34" charset="0"/>
+                <a:ea typeface="Courier New" pitchFamily="34" charset="-122"/>
+                <a:cs typeface="Courier New" pitchFamily="34" charset="-120"/>
+              </a:rPr>
+              <a:t>+ DateTime? UpdatedAt</a:t>
+            </a:r>
+            <a:endParaRPr lang="en-US" sz="1050" dirty="0"/>
+          </a:p>
+        </p:txBody>
+      </p:sp>
+      <p:sp>
+        <p:nvSpPr>
+          <p:cNvPr id="13" name="Text 5">
+            <a:extLst>
+              <a:ext uri="{FF2B5EF4-FFF2-40B4-BE49-F238E27FC236}">
+                <a16:creationId xmlns:a16="http://schemas.microsoft.com/office/drawing/2014/main" id="{2EC922E6-4AFB-C25E-61F8-11722AF61F99}"/>
+              </a:ext>
+            </a:extLst>
+          </p:cNvPr>
+          <p:cNvSpPr/>
+          <p:nvPr/>
+        </p:nvSpPr>
+        <p:spPr>
+          <a:xfrm>
+            <a:off x="777240" y="2724912"/>
+            <a:ext cx="6217920" cy="274320"/>
+          </a:xfrm>
+          <a:prstGeom prst="rect">
+            <a:avLst/>
+          </a:prstGeom>
+          <a:noFill/>
+          <a:ln/>
+        </p:spPr>
+        <p:txBody>
+          <a:bodyPr wrap="square" rtlCol="0" anchor="ctr"/>
+          <a:lstStyle/>
+          <a:p>
+            <a:pPr marL="0" indent="0">
+              <a:buNone/>
+            </a:pPr>
+            <a:r>
+              <a:rPr lang="en-US" sz="950" i="1" dirty="0">
+                <a:solidFill>
+                  <a:srgbClr val="5B6172"/>
+                </a:solidFill>
+                <a:latin typeface="Calibri" pitchFamily="34" charset="0"/>
+                <a:ea typeface="Calibri" pitchFamily="34" charset="-122"/>
+                <a:cs typeface="Calibri" pitchFamily="34" charset="-120"/>
+              </a:rPr>
+              <a:t>Generic base — BaseEntity&lt;int&gt; is the concrete root every domain entity inherits.</a:t>
+            </a:r>
+            <a:endParaRPr lang="en-US" sz="950" dirty="0"/>
+          </a:p>
+        </p:txBody>
+      </p:sp>
+      <p:sp>
+        <p:nvSpPr>
+          <p:cNvPr id="15" name="Shape 6">
+            <a:extLst>
+              <a:ext uri="{FF2B5EF4-FFF2-40B4-BE49-F238E27FC236}">
+                <a16:creationId xmlns:a16="http://schemas.microsoft.com/office/drawing/2014/main" id="{570D3956-9E3D-2CDC-AB54-369E752E4EEB}"/>
+              </a:ext>
+            </a:extLst>
+          </p:cNvPr>
+          <p:cNvSpPr/>
+          <p:nvPr/>
+        </p:nvSpPr>
+        <p:spPr>
+          <a:xfrm>
+            <a:off x="548640" y="3200400"/>
+            <a:ext cx="6675120" cy="1417320"/>
+          </a:xfrm>
+          <a:prstGeom prst="roundRect">
+            <a:avLst>
+              <a:gd name="adj" fmla="val 5161"/>
+            </a:avLst>
+          </a:prstGeom>
+          <a:solidFill>
+            <a:srgbClr val="EEF3FD"/>
+          </a:solidFill>
+          <a:ln w="12700">
+            <a:solidFill>
+              <a:srgbClr val="DCE3F2"/>
+            </a:solidFill>
+            <a:prstDash val="solid"/>
+          </a:ln>
+        </p:spPr>
+      </p:sp>
+      <p:sp>
+        <p:nvSpPr>
+          <p:cNvPr id="17" name="Text 7">
+            <a:extLst>
+              <a:ext uri="{FF2B5EF4-FFF2-40B4-BE49-F238E27FC236}">
+                <a16:creationId xmlns:a16="http://schemas.microsoft.com/office/drawing/2014/main" id="{B5B3968B-0C68-5436-A062-0C6400FEB7FD}"/>
+              </a:ext>
+            </a:extLst>
+          </p:cNvPr>
+          <p:cNvSpPr/>
+          <p:nvPr/>
+        </p:nvSpPr>
+        <p:spPr>
+          <a:xfrm>
+            <a:off x="777240" y="3291840"/>
+            <a:ext cx="6217920" cy="320040"/>
+          </a:xfrm>
+          <a:prstGeom prst="rect">
+            <a:avLst/>
+          </a:prstGeom>
+          <a:noFill/>
+          <a:ln/>
+        </p:spPr>
+        <p:txBody>
+          <a:bodyPr wrap="square" rtlCol="0" anchor="ctr"/>
+          <a:lstStyle/>
+          <a:p>
+            <a:pPr marL="0" indent="0">
+              <a:buNone/>
+            </a:pPr>
+            <a:r>
+              <a:rPr lang="en-US" sz="1450" b="1" dirty="0">
+                <a:solidFill>
+                  <a:srgbClr val="1E2761"/>
+                </a:solidFill>
+                <a:latin typeface="Cambria" pitchFamily="34" charset="0"/>
+                <a:ea typeface="Cambria" pitchFamily="34" charset="-122"/>
+                <a:cs typeface="Cambria" pitchFamily="34" charset="-120"/>
+              </a:rPr>
+              <a:t>Security — Password &amp; Tokens</a:t>
+            </a:r>
+            <a:endParaRPr lang="en-US" sz="1450" dirty="0"/>
+          </a:p>
+        </p:txBody>
+      </p:sp>
+      <p:sp>
+        <p:nvSpPr>
+          <p:cNvPr id="19" name="Text 8">
+            <a:extLst>
+              <a:ext uri="{FF2B5EF4-FFF2-40B4-BE49-F238E27FC236}">
+                <a16:creationId xmlns:a16="http://schemas.microsoft.com/office/drawing/2014/main" id="{CDD885AB-FCD7-5E24-1C75-5C27FDDBA459}"/>
+              </a:ext>
+            </a:extLst>
+          </p:cNvPr>
+          <p:cNvSpPr/>
+          <p:nvPr/>
+        </p:nvSpPr>
+        <p:spPr>
+          <a:xfrm>
+            <a:off x="777240" y="3621024"/>
+            <a:ext cx="6217920" cy="640080"/>
+          </a:xfrm>
+          <a:prstGeom prst="rect">
+            <a:avLst/>
+          </a:prstGeom>
+          <a:noFill/>
+          <a:ln/>
+        </p:spPr>
+        <p:txBody>
+          <a:bodyPr wrap="square" rtlCol="0" anchor="ctr"/>
+          <a:lstStyle/>
+          <a:p>
+            <a:pPr marL="0" indent="0">
+              <a:lnSpc>
+                <a:spcPct val="115000"/>
+              </a:lnSpc>
+              <a:buNone/>
+            </a:pPr>
+            <a:r>
+              <a:rPr lang="en-US" sz="1050" dirty="0">
+                <a:solidFill>
+                  <a:srgbClr val="1A1A2E"/>
+                </a:solidFill>
+                <a:latin typeface="Courier New" pitchFamily="34" charset="0"/>
+                <a:ea typeface="Courier New" pitchFamily="34" charset="-122"/>
+                <a:cs typeface="Courier New" pitchFamily="34" charset="-120"/>
+              </a:rPr>
+              <a:t>PasswordHasher (static): Hash() / Verify()</a:t>
+            </a:r>
+            <a:endParaRPr lang="en-US" sz="1050" dirty="0"/>
+          </a:p>
+          <a:p>
+            <a:pPr marL="0" indent="0">
+              <a:lnSpc>
+                <a:spcPct val="115000"/>
+              </a:lnSpc>
+              <a:buNone/>
+            </a:pPr>
+            <a:r>
+              <a:rPr lang="en-US" sz="1050" dirty="0">
+                <a:solidFill>
+                  <a:srgbClr val="1A1A2E"/>
+                </a:solidFill>
+                <a:latin typeface="Courier New" pitchFamily="34" charset="0"/>
+                <a:ea typeface="Courier New" pitchFamily="34" charset="-122"/>
+                <a:cs typeface="Courier New" pitchFamily="34" charset="-120"/>
+              </a:rPr>
+              <a:t>ITokenService → JwtTokenService</a:t>
+            </a:r>
+            <a:endParaRPr lang="en-US" sz="1050" dirty="0"/>
+          </a:p>
+          <a:p>
+            <a:pPr marL="0" indent="0">
+              <a:lnSpc>
+                <a:spcPct val="115000"/>
+              </a:lnSpc>
+              <a:buNone/>
+            </a:pPr>
+            <a:r>
+              <a:rPr lang="en-US" sz="1050" dirty="0">
+                <a:solidFill>
+                  <a:srgbClr val="1A1A2E"/>
+                </a:solidFill>
+                <a:latin typeface="Courier New" pitchFamily="34" charset="0"/>
+                <a:ea typeface="Courier New" pitchFamily="34" charset="-122"/>
+                <a:cs typeface="Courier New" pitchFamily="34" charset="-120"/>
+              </a:rPr>
+              <a:t>+ GenerateToken(userId, email, role)</a:t>
+            </a:r>
+            <a:endParaRPr lang="en-US" sz="1050" dirty="0"/>
+          </a:p>
+        </p:txBody>
+      </p:sp>
+      <p:sp>
+        <p:nvSpPr>
+          <p:cNvPr id="21" name="Text 9">
+            <a:extLst>
+              <a:ext uri="{FF2B5EF4-FFF2-40B4-BE49-F238E27FC236}">
+                <a16:creationId xmlns:a16="http://schemas.microsoft.com/office/drawing/2014/main" id="{8DF99F71-8EF5-D123-D3FD-6C102B3BDBF7}"/>
+              </a:ext>
+            </a:extLst>
+          </p:cNvPr>
+          <p:cNvSpPr/>
+          <p:nvPr/>
+        </p:nvSpPr>
+        <p:spPr>
+          <a:xfrm>
+            <a:off x="777240" y="4325112"/>
+            <a:ext cx="6217920" cy="274320"/>
+          </a:xfrm>
+          <a:prstGeom prst="rect">
+            <a:avLst/>
+          </a:prstGeom>
+          <a:noFill/>
+          <a:ln/>
+        </p:spPr>
+        <p:txBody>
+          <a:bodyPr wrap="square" rtlCol="0" anchor="ctr"/>
+          <a:lstStyle/>
+          <a:p>
+            <a:pPr marL="0" indent="0">
+              <a:buNone/>
+            </a:pPr>
+            <a:r>
+              <a:rPr lang="en-US" sz="950" i="1" dirty="0">
+                <a:solidFill>
+                  <a:srgbClr val="5B6172"/>
+                </a:solidFill>
+                <a:latin typeface="Calibri" pitchFamily="34" charset="0"/>
+                <a:ea typeface="Calibri" pitchFamily="34" charset="-122"/>
+                <a:cs typeface="Calibri" pitchFamily="34" charset="-120"/>
+              </a:rPr>
+              <a:t>JwtTokenService reads _key, _issuer, _audience, _expirationMinutes.</a:t>
+            </a:r>
+            <a:endParaRPr lang="en-US" sz="950" dirty="0"/>
+          </a:p>
+        </p:txBody>
+      </p:sp>
+      <p:sp>
+        <p:nvSpPr>
+          <p:cNvPr id="23" name="Shape 10">
+            <a:extLst>
+              <a:ext uri="{FF2B5EF4-FFF2-40B4-BE49-F238E27FC236}">
+                <a16:creationId xmlns:a16="http://schemas.microsoft.com/office/drawing/2014/main" id="{D0358F40-BB26-3544-6379-B2BB399FF320}"/>
+              </a:ext>
+            </a:extLst>
+          </p:cNvPr>
+          <p:cNvSpPr/>
+          <p:nvPr/>
+        </p:nvSpPr>
+        <p:spPr>
+          <a:xfrm>
+            <a:off x="548640" y="4800600"/>
+            <a:ext cx="6675120" cy="1417320"/>
+          </a:xfrm>
+          <a:prstGeom prst="roundRect">
+            <a:avLst>
+              <a:gd name="adj" fmla="val 5161"/>
+            </a:avLst>
+          </a:prstGeom>
+          <a:solidFill>
+            <a:srgbClr val="EEF3FD"/>
+          </a:solidFill>
+          <a:ln w="12700">
+            <a:solidFill>
+              <a:srgbClr val="DCE3F2"/>
+            </a:solidFill>
+            <a:prstDash val="solid"/>
+          </a:ln>
+        </p:spPr>
+      </p:sp>
+      <p:sp>
+        <p:nvSpPr>
+          <p:cNvPr id="25" name="Text 11">
+            <a:extLst>
+              <a:ext uri="{FF2B5EF4-FFF2-40B4-BE49-F238E27FC236}">
+                <a16:creationId xmlns:a16="http://schemas.microsoft.com/office/drawing/2014/main" id="{9EF36E21-77E3-5295-AA0F-33C80DB663D3}"/>
+              </a:ext>
+            </a:extLst>
+          </p:cNvPr>
+          <p:cNvSpPr/>
+          <p:nvPr/>
+        </p:nvSpPr>
+        <p:spPr>
+          <a:xfrm>
+            <a:off x="777240" y="4892040"/>
+            <a:ext cx="6217920" cy="320040"/>
+          </a:xfrm>
+          <a:prstGeom prst="rect">
+            <a:avLst/>
+          </a:prstGeom>
+          <a:noFill/>
+          <a:ln/>
+        </p:spPr>
+        <p:txBody>
+          <a:bodyPr wrap="square" rtlCol="0" anchor="ctr"/>
+          <a:lstStyle/>
+          <a:p>
+            <a:pPr marL="0" indent="0">
+              <a:buNone/>
+            </a:pPr>
+            <a:r>
+              <a:rPr lang="en-US" sz="1450" b="1" dirty="0">
+                <a:solidFill>
+                  <a:srgbClr val="1E2761"/>
+                </a:solidFill>
+                <a:latin typeface="Cambria" pitchFamily="34" charset="0"/>
+                <a:ea typeface="Cambria" pitchFamily="34" charset="-122"/>
+                <a:cs typeface="Cambria" pitchFamily="34" charset="-120"/>
+              </a:rPr>
+              <a:t>JwtSettings</a:t>
+            </a:r>
+            <a:endParaRPr lang="en-US" sz="1450" dirty="0"/>
+          </a:p>
+        </p:txBody>
+      </p:sp>
+      <p:sp>
+        <p:nvSpPr>
+          <p:cNvPr id="27" name="Text 12">
+            <a:extLst>
+              <a:ext uri="{FF2B5EF4-FFF2-40B4-BE49-F238E27FC236}">
+                <a16:creationId xmlns:a16="http://schemas.microsoft.com/office/drawing/2014/main" id="{B923C0CA-F2ED-7920-4861-5BB5D0D0B9BD}"/>
+              </a:ext>
+            </a:extLst>
+          </p:cNvPr>
+          <p:cNvSpPr/>
+          <p:nvPr/>
+        </p:nvSpPr>
+        <p:spPr>
+          <a:xfrm>
+            <a:off x="777240" y="5221224"/>
+            <a:ext cx="6217920" cy="640080"/>
+          </a:xfrm>
+          <a:prstGeom prst="rect">
+            <a:avLst/>
+          </a:prstGeom>
+          <a:noFill/>
+          <a:ln/>
+        </p:spPr>
+        <p:txBody>
+          <a:bodyPr wrap="square" rtlCol="0" anchor="ctr"/>
+          <a:lstStyle/>
+          <a:p>
+            <a:pPr marL="0" indent="0">
+              <a:lnSpc>
+                <a:spcPct val="115000"/>
+              </a:lnSpc>
+              <a:buNone/>
+            </a:pPr>
+            <a:r>
+              <a:rPr lang="en-US" sz="1050" dirty="0">
+                <a:solidFill>
+                  <a:srgbClr val="1A1A2E"/>
+                </a:solidFill>
+                <a:latin typeface="Courier New" pitchFamily="34" charset="0"/>
+                <a:ea typeface="Courier New" pitchFamily="34" charset="-122"/>
+                <a:cs typeface="Courier New" pitchFamily="34" charset="-120"/>
+              </a:rPr>
+              <a:t>+ string Key</a:t>
+            </a:r>
+            <a:endParaRPr lang="en-US" sz="1050" dirty="0"/>
+          </a:p>
+          <a:p>
+            <a:pPr marL="0" indent="0">
+              <a:lnSpc>
+                <a:spcPct val="115000"/>
+              </a:lnSpc>
+              <a:buNone/>
+            </a:pPr>
+            <a:r>
+              <a:rPr lang="en-US" sz="1050" dirty="0">
+                <a:solidFill>
+                  <a:srgbClr val="1A1A2E"/>
+                </a:solidFill>
+                <a:latin typeface="Courier New" pitchFamily="34" charset="0"/>
+                <a:ea typeface="Courier New" pitchFamily="34" charset="-122"/>
+                <a:cs typeface="Courier New" pitchFamily="34" charset="-120"/>
+              </a:rPr>
+              <a:t>+ string Issuer</a:t>
+            </a:r>
+            <a:endParaRPr lang="en-US" sz="1050" dirty="0"/>
+          </a:p>
+          <a:p>
+            <a:pPr marL="0" indent="0">
+              <a:lnSpc>
+                <a:spcPct val="115000"/>
+              </a:lnSpc>
+              <a:buNone/>
+            </a:pPr>
+            <a:r>
+              <a:rPr lang="en-US" sz="1050" dirty="0">
+                <a:solidFill>
+                  <a:srgbClr val="1A1A2E"/>
+                </a:solidFill>
+                <a:latin typeface="Courier New" pitchFamily="34" charset="0"/>
+                <a:ea typeface="Courier New" pitchFamily="34" charset="-122"/>
+                <a:cs typeface="Courier New" pitchFamily="34" charset="-120"/>
+              </a:rPr>
+              <a:t>+ string Audience</a:t>
+            </a:r>
+            <a:endParaRPr lang="en-US" sz="1050" dirty="0"/>
+          </a:p>
+          <a:p>
+            <a:pPr marL="0" indent="0">
+              <a:lnSpc>
+                <a:spcPct val="115000"/>
+              </a:lnSpc>
+              <a:buNone/>
+            </a:pPr>
+            <a:r>
+              <a:rPr lang="en-US" sz="1050" dirty="0">
+                <a:solidFill>
+                  <a:srgbClr val="1A1A2E"/>
+                </a:solidFill>
+                <a:latin typeface="Courier New" pitchFamily="34" charset="0"/>
+                <a:ea typeface="Courier New" pitchFamily="34" charset="-122"/>
+                <a:cs typeface="Courier New" pitchFamily="34" charset="-120"/>
+              </a:rPr>
+              <a:t>+ int ExpirationMinutes</a:t>
+            </a:r>
+            <a:endParaRPr lang="en-US" sz="1050" dirty="0"/>
+          </a:p>
+        </p:txBody>
+      </p:sp>
+      <p:sp>
+        <p:nvSpPr>
+          <p:cNvPr id="29" name="Text 13">
+            <a:extLst>
+              <a:ext uri="{FF2B5EF4-FFF2-40B4-BE49-F238E27FC236}">
+                <a16:creationId xmlns:a16="http://schemas.microsoft.com/office/drawing/2014/main" id="{227C1DC7-6DE9-9700-8072-696205261673}"/>
+              </a:ext>
+            </a:extLst>
+          </p:cNvPr>
+          <p:cNvSpPr/>
+          <p:nvPr/>
+        </p:nvSpPr>
+        <p:spPr>
+          <a:xfrm>
+            <a:off x="777240" y="5925312"/>
+            <a:ext cx="6217920" cy="274320"/>
+          </a:xfrm>
+          <a:prstGeom prst="rect">
+            <a:avLst/>
+          </a:prstGeom>
+          <a:noFill/>
+          <a:ln/>
+        </p:spPr>
+        <p:txBody>
+          <a:bodyPr wrap="square" rtlCol="0" anchor="ctr"/>
+          <a:lstStyle/>
+          <a:p>
+            <a:pPr marL="0" indent="0">
+              <a:buNone/>
+            </a:pPr>
+            <a:r>
+              <a:rPr lang="en-US" sz="950" i="1" dirty="0">
+                <a:solidFill>
+                  <a:srgbClr val="5B6172"/>
+                </a:solidFill>
+                <a:latin typeface="Calibri" pitchFamily="34" charset="0"/>
+                <a:ea typeface="Calibri" pitchFamily="34" charset="-122"/>
+                <a:cs typeface="Calibri" pitchFamily="34" charset="-120"/>
+              </a:rPr>
+              <a:t>Bound from configuration and injected into JwtTokenService.</a:t>
+            </a:r>
+            <a:endParaRPr lang="en-US" sz="950" dirty="0"/>
+          </a:p>
+        </p:txBody>
+      </p:sp>
+      <p:sp>
+        <p:nvSpPr>
+          <p:cNvPr id="31" name="Text 14">
+            <a:extLst>
+              <a:ext uri="{FF2B5EF4-FFF2-40B4-BE49-F238E27FC236}">
+                <a16:creationId xmlns:a16="http://schemas.microsoft.com/office/drawing/2014/main" id="{6000C593-20F4-0AB7-259F-049A3DFB9683}"/>
+              </a:ext>
+            </a:extLst>
+          </p:cNvPr>
+          <p:cNvSpPr/>
+          <p:nvPr/>
+        </p:nvSpPr>
+        <p:spPr>
+          <a:xfrm>
+            <a:off x="7498080" y="1600200"/>
+            <a:ext cx="4114800" cy="320040"/>
+          </a:xfrm>
+          <a:prstGeom prst="rect">
+            <a:avLst/>
+          </a:prstGeom>
+          <a:noFill/>
+          <a:ln/>
+        </p:spPr>
+        <p:txBody>
+          <a:bodyPr wrap="square" rtlCol="0" anchor="ctr"/>
+          <a:lstStyle/>
+          <a:p>
+            <a:pPr marL="0" indent="0">
+              <a:buNone/>
+            </a:pPr>
+            <a:r>
+              <a:rPr lang="en-US" sz="1500" b="1" dirty="0">
+                <a:solidFill>
+                  <a:srgbClr val="1E2761"/>
+                </a:solidFill>
+                <a:latin typeface="Cambria" pitchFamily="34" charset="0"/>
+                <a:ea typeface="Cambria" pitchFamily="34" charset="-122"/>
+                <a:cs typeface="Cambria" pitchFamily="34" charset="-120"/>
+              </a:rPr>
+              <a:t>Domain Enums</a:t>
+            </a:r>
+            <a:endParaRPr lang="en-US" sz="1500" dirty="0"/>
+          </a:p>
+        </p:txBody>
+      </p:sp>
+      <p:sp>
+        <p:nvSpPr>
+          <p:cNvPr id="33" name="Shape 15">
+            <a:extLst>
+              <a:ext uri="{FF2B5EF4-FFF2-40B4-BE49-F238E27FC236}">
+                <a16:creationId xmlns:a16="http://schemas.microsoft.com/office/drawing/2014/main" id="{A64B8022-B40D-569E-D1CB-2306230EACA9}"/>
+              </a:ext>
+            </a:extLst>
+          </p:cNvPr>
+          <p:cNvSpPr/>
+          <p:nvPr/>
+        </p:nvSpPr>
+        <p:spPr>
+          <a:xfrm>
+            <a:off x="7498080" y="2011680"/>
+            <a:ext cx="4114800" cy="841248"/>
+          </a:xfrm>
+          <a:prstGeom prst="roundRect">
+            <a:avLst>
+              <a:gd name="adj" fmla="val 7609"/>
+            </a:avLst>
+          </a:prstGeom>
+          <a:solidFill>
+            <a:srgbClr val="FFFFFF"/>
+          </a:solidFill>
+          <a:ln w="12700">
+            <a:solidFill>
+              <a:srgbClr val="1E2761"/>
+            </a:solidFill>
+            <a:prstDash val="solid"/>
+          </a:ln>
+        </p:spPr>
+      </p:sp>
+      <p:sp>
+        <p:nvSpPr>
+          <p:cNvPr id="35" name="Text 16">
+            <a:extLst>
+              <a:ext uri="{FF2B5EF4-FFF2-40B4-BE49-F238E27FC236}">
+                <a16:creationId xmlns:a16="http://schemas.microsoft.com/office/drawing/2014/main" id="{DCE28993-E211-5B32-7E1A-CD23599E6135}"/>
+              </a:ext>
+            </a:extLst>
+          </p:cNvPr>
+          <p:cNvSpPr/>
+          <p:nvPr/>
+        </p:nvSpPr>
+        <p:spPr>
+          <a:xfrm>
+            <a:off x="7680960" y="2066544"/>
+            <a:ext cx="3749040" cy="274320"/>
+          </a:xfrm>
+          <a:prstGeom prst="rect">
+            <a:avLst/>
+          </a:prstGeom>
+          <a:noFill/>
+          <a:ln/>
+        </p:spPr>
+        <p:txBody>
+          <a:bodyPr wrap="square" rtlCol="0" anchor="ctr"/>
+          <a:lstStyle/>
+          <a:p>
+            <a:pPr marL="0" indent="0">
+              <a:buNone/>
+            </a:pPr>
+            <a:r>
+              <a:rPr lang="en-US" sz="1200" b="1" dirty="0">
+                <a:solidFill>
+                  <a:srgbClr val="E8833A"/>
+                </a:solidFill>
+                <a:latin typeface="Calibri" pitchFamily="34" charset="0"/>
+                <a:ea typeface="Calibri" pitchFamily="34" charset="-122"/>
+                <a:cs typeface="Calibri" pitchFamily="34" charset="-120"/>
+              </a:rPr>
+              <a:t>UserRole</a:t>
+            </a:r>
+            <a:endParaRPr lang="en-US" sz="1200" dirty="0"/>
+          </a:p>
+        </p:txBody>
+      </p:sp>
+      <p:sp>
+        <p:nvSpPr>
+          <p:cNvPr id="37" name="Text 17">
+            <a:extLst>
+              <a:ext uri="{FF2B5EF4-FFF2-40B4-BE49-F238E27FC236}">
+                <a16:creationId xmlns:a16="http://schemas.microsoft.com/office/drawing/2014/main" id="{B83D82F6-EFD3-166B-DEC9-B50B6F06ECE6}"/>
+              </a:ext>
+            </a:extLst>
+          </p:cNvPr>
+          <p:cNvSpPr/>
+          <p:nvPr/>
+        </p:nvSpPr>
+        <p:spPr>
+          <a:xfrm>
+            <a:off x="7680960" y="2322576"/>
+            <a:ext cx="3749040" cy="475488"/>
+          </a:xfrm>
+          <a:prstGeom prst="rect">
+            <a:avLst/>
+          </a:prstGeom>
+          <a:noFill/>
+          <a:ln/>
+        </p:spPr>
+        <p:txBody>
+          <a:bodyPr wrap="square" rtlCol="0" anchor="ctr"/>
+          <a:lstStyle/>
+          <a:p>
+            <a:pPr marL="0" indent="0">
+              <a:lnSpc>
+                <a:spcPct val="105000"/>
+              </a:lnSpc>
+              <a:buNone/>
+            </a:pPr>
+            <a:r>
+              <a:rPr lang="en-US" sz="880" dirty="0">
+                <a:solidFill>
+                  <a:srgbClr val="1A1A2E"/>
+                </a:solidFill>
+                <a:latin typeface="Calibri" pitchFamily="34" charset="0"/>
+                <a:ea typeface="Calibri" pitchFamily="34" charset="-122"/>
+                <a:cs typeface="Calibri" pitchFamily="34" charset="-120"/>
+              </a:rPr>
+              <a:t>SuperAdmin, Admin, HR, FinancialAdmin, Staff, Dealer, Passenger</a:t>
+            </a:r>
+            <a:endParaRPr lang="en-US" sz="880" dirty="0"/>
+          </a:p>
+        </p:txBody>
+      </p:sp>
+      <p:sp>
+        <p:nvSpPr>
+          <p:cNvPr id="39" name="Shape 18">
+            <a:extLst>
+              <a:ext uri="{FF2B5EF4-FFF2-40B4-BE49-F238E27FC236}">
+                <a16:creationId xmlns:a16="http://schemas.microsoft.com/office/drawing/2014/main" id="{79302783-DF29-9EDC-1C6C-4427C16FD6CB}"/>
+              </a:ext>
+            </a:extLst>
+          </p:cNvPr>
+          <p:cNvSpPr/>
+          <p:nvPr/>
+        </p:nvSpPr>
+        <p:spPr>
+          <a:xfrm>
+            <a:off x="7498080" y="2962656"/>
+            <a:ext cx="4114800" cy="841248"/>
+          </a:xfrm>
+          <a:prstGeom prst="roundRect">
+            <a:avLst>
+              <a:gd name="adj" fmla="val 7609"/>
+            </a:avLst>
+          </a:prstGeom>
+          <a:solidFill>
+            <a:srgbClr val="FFFFFF"/>
+          </a:solidFill>
+          <a:ln w="12700">
+            <a:solidFill>
+              <a:srgbClr val="1E2761"/>
+            </a:solidFill>
+            <a:prstDash val="solid"/>
+          </a:ln>
+        </p:spPr>
+      </p:sp>
+      <p:sp>
+        <p:nvSpPr>
+          <p:cNvPr id="41" name="Text 19">
+            <a:extLst>
+              <a:ext uri="{FF2B5EF4-FFF2-40B4-BE49-F238E27FC236}">
+                <a16:creationId xmlns:a16="http://schemas.microsoft.com/office/drawing/2014/main" id="{3E2CA9D1-13C6-5EB1-1BED-37508B3C54DE}"/>
+              </a:ext>
+            </a:extLst>
+          </p:cNvPr>
+          <p:cNvSpPr/>
+          <p:nvPr/>
+        </p:nvSpPr>
+        <p:spPr>
+          <a:xfrm>
+            <a:off x="7680960" y="3017520"/>
+            <a:ext cx="3749040" cy="274320"/>
+          </a:xfrm>
+          <a:prstGeom prst="rect">
+            <a:avLst/>
+          </a:prstGeom>
+          <a:noFill/>
+          <a:ln/>
+        </p:spPr>
+        <p:txBody>
+          <a:bodyPr wrap="square" rtlCol="0" anchor="ctr"/>
+          <a:lstStyle/>
+          <a:p>
+            <a:pPr marL="0" indent="0">
+              <a:buNone/>
+            </a:pPr>
+            <a:r>
+              <a:rPr lang="en-US" sz="1200" b="1" dirty="0">
+                <a:solidFill>
+                  <a:srgbClr val="E8833A"/>
+                </a:solidFill>
+                <a:latin typeface="Calibri" pitchFamily="34" charset="0"/>
+                <a:ea typeface="Calibri" pitchFamily="34" charset="-122"/>
+                <a:cs typeface="Calibri" pitchFamily="34" charset="-120"/>
+              </a:rPr>
+              <a:t>BookingStatus</a:t>
+            </a:r>
+            <a:endParaRPr lang="en-US" sz="1200" dirty="0"/>
+          </a:p>
+        </p:txBody>
+      </p:sp>
+      <p:sp>
+        <p:nvSpPr>
+          <p:cNvPr id="43" name="Text 20">
+            <a:extLst>
+              <a:ext uri="{FF2B5EF4-FFF2-40B4-BE49-F238E27FC236}">
+                <a16:creationId xmlns:a16="http://schemas.microsoft.com/office/drawing/2014/main" id="{CF040221-F43B-0E91-5D26-F16305CCA55E}"/>
+              </a:ext>
+            </a:extLst>
+          </p:cNvPr>
+          <p:cNvSpPr/>
+          <p:nvPr/>
+        </p:nvSpPr>
+        <p:spPr>
+          <a:xfrm>
+            <a:off x="7680960" y="3273552"/>
+            <a:ext cx="3749040" cy="475488"/>
+          </a:xfrm>
+          <a:prstGeom prst="rect">
+            <a:avLst/>
+          </a:prstGeom>
+          <a:noFill/>
+          <a:ln/>
+        </p:spPr>
+        <p:txBody>
+          <a:bodyPr wrap="square" rtlCol="0" anchor="ctr"/>
+          <a:lstStyle/>
+          <a:p>
+            <a:pPr marL="0" indent="0">
+              <a:lnSpc>
+                <a:spcPct val="105000"/>
+              </a:lnSpc>
+              <a:buNone/>
+            </a:pPr>
+            <a:r>
+              <a:rPr lang="en-US" sz="880" dirty="0">
+                <a:solidFill>
+                  <a:srgbClr val="1A1A2E"/>
+                </a:solidFill>
+                <a:latin typeface="Calibri" pitchFamily="34" charset="0"/>
+                <a:ea typeface="Calibri" pitchFamily="34" charset="-122"/>
+                <a:cs typeface="Calibri" pitchFamily="34" charset="-120"/>
+              </a:rPr>
+              <a:t>Pending, Confirmed, CheckedIn, Completed, Cancelled, PartiallyCancelled, PaymentFailed</a:t>
+            </a:r>
+            <a:endParaRPr lang="en-US" sz="880" dirty="0"/>
+          </a:p>
+        </p:txBody>
+      </p:sp>
+      <p:sp>
+        <p:nvSpPr>
+          <p:cNvPr id="45" name="Shape 21">
+            <a:extLst>
+              <a:ext uri="{FF2B5EF4-FFF2-40B4-BE49-F238E27FC236}">
+                <a16:creationId xmlns:a16="http://schemas.microsoft.com/office/drawing/2014/main" id="{A1509DF8-3CD2-E52C-349B-8645DBD4E781}"/>
+              </a:ext>
+            </a:extLst>
+          </p:cNvPr>
+          <p:cNvSpPr/>
+          <p:nvPr/>
+        </p:nvSpPr>
+        <p:spPr>
+          <a:xfrm>
+            <a:off x="7498080" y="3913632"/>
+            <a:ext cx="4114800" cy="841248"/>
+          </a:xfrm>
+          <a:prstGeom prst="roundRect">
+            <a:avLst>
+              <a:gd name="adj" fmla="val 7609"/>
+            </a:avLst>
+          </a:prstGeom>
+          <a:solidFill>
+            <a:srgbClr val="FFFFFF"/>
+          </a:solidFill>
+          <a:ln w="12700">
+            <a:solidFill>
+              <a:srgbClr val="1E2761"/>
+            </a:solidFill>
+            <a:prstDash val="solid"/>
+          </a:ln>
+        </p:spPr>
+      </p:sp>
+      <p:sp>
+        <p:nvSpPr>
+          <p:cNvPr id="47" name="Text 22">
+            <a:extLst>
+              <a:ext uri="{FF2B5EF4-FFF2-40B4-BE49-F238E27FC236}">
+                <a16:creationId xmlns:a16="http://schemas.microsoft.com/office/drawing/2014/main" id="{9E3D8D94-7A81-D805-0BAA-C8F2F68CEE81}"/>
+              </a:ext>
+            </a:extLst>
+          </p:cNvPr>
+          <p:cNvSpPr/>
+          <p:nvPr/>
+        </p:nvSpPr>
+        <p:spPr>
+          <a:xfrm>
+            <a:off x="7680960" y="3968496"/>
+            <a:ext cx="3749040" cy="274320"/>
+          </a:xfrm>
+          <a:prstGeom prst="rect">
+            <a:avLst/>
+          </a:prstGeom>
+          <a:noFill/>
+          <a:ln/>
+        </p:spPr>
+        <p:txBody>
+          <a:bodyPr wrap="square" rtlCol="0" anchor="ctr"/>
+          <a:lstStyle/>
+          <a:p>
+            <a:pPr marL="0" indent="0">
+              <a:buNone/>
+            </a:pPr>
+            <a:r>
+              <a:rPr lang="en-US" sz="1200" b="1" dirty="0">
+                <a:solidFill>
+                  <a:srgbClr val="E8833A"/>
+                </a:solidFill>
+                <a:latin typeface="Calibri" pitchFamily="34" charset="0"/>
+                <a:ea typeface="Calibri" pitchFamily="34" charset="-122"/>
+                <a:cs typeface="Calibri" pitchFamily="34" charset="-120"/>
+              </a:rPr>
+              <a:t>PaymentStatus</a:t>
+            </a:r>
+            <a:endParaRPr lang="en-US" sz="1200" dirty="0"/>
+          </a:p>
+        </p:txBody>
+      </p:sp>
+      <p:sp>
+        <p:nvSpPr>
+          <p:cNvPr id="49" name="Text 23">
+            <a:extLst>
+              <a:ext uri="{FF2B5EF4-FFF2-40B4-BE49-F238E27FC236}">
+                <a16:creationId xmlns:a16="http://schemas.microsoft.com/office/drawing/2014/main" id="{60E2A914-91A8-1A86-9847-FD2785E42707}"/>
+              </a:ext>
+            </a:extLst>
+          </p:cNvPr>
+          <p:cNvSpPr/>
+          <p:nvPr/>
+        </p:nvSpPr>
+        <p:spPr>
+          <a:xfrm>
+            <a:off x="7680960" y="4224528"/>
+            <a:ext cx="3749040" cy="475488"/>
+          </a:xfrm>
+          <a:prstGeom prst="rect">
+            <a:avLst/>
+          </a:prstGeom>
+          <a:noFill/>
+          <a:ln/>
+        </p:spPr>
+        <p:txBody>
+          <a:bodyPr wrap="square" rtlCol="0" anchor="ctr"/>
+          <a:lstStyle/>
+          <a:p>
+            <a:pPr marL="0" indent="0">
+              <a:lnSpc>
+                <a:spcPct val="105000"/>
+              </a:lnSpc>
+              <a:buNone/>
+            </a:pPr>
+            <a:r>
+              <a:rPr lang="en-US" sz="880" dirty="0">
+                <a:solidFill>
+                  <a:srgbClr val="1A1A2E"/>
+                </a:solidFill>
+                <a:latin typeface="Calibri" pitchFamily="34" charset="0"/>
+                <a:ea typeface="Calibri" pitchFamily="34" charset="-122"/>
+                <a:cs typeface="Calibri" pitchFamily="34" charset="-120"/>
+              </a:rPr>
+              <a:t>Pending, Success, Failed, Refunded</a:t>
+            </a:r>
+            <a:endParaRPr lang="en-US" sz="880" dirty="0"/>
+          </a:p>
+        </p:txBody>
+      </p:sp>
+      <p:sp>
+        <p:nvSpPr>
+          <p:cNvPr id="51" name="Shape 24">
+            <a:extLst>
+              <a:ext uri="{FF2B5EF4-FFF2-40B4-BE49-F238E27FC236}">
+                <a16:creationId xmlns:a16="http://schemas.microsoft.com/office/drawing/2014/main" id="{6A4361D2-F165-D579-0F59-C1143F38433A}"/>
+              </a:ext>
+            </a:extLst>
+          </p:cNvPr>
+          <p:cNvSpPr/>
+          <p:nvPr/>
+        </p:nvSpPr>
+        <p:spPr>
+          <a:xfrm>
+            <a:off x="7498080" y="4864608"/>
+            <a:ext cx="4114800" cy="841248"/>
+          </a:xfrm>
+          <a:prstGeom prst="roundRect">
+            <a:avLst>
+              <a:gd name="adj" fmla="val 7609"/>
+            </a:avLst>
+          </a:prstGeom>
+          <a:solidFill>
+            <a:srgbClr val="FFFFFF"/>
+          </a:solidFill>
+          <a:ln w="12700">
+            <a:solidFill>
+              <a:srgbClr val="1E2761"/>
+            </a:solidFill>
+            <a:prstDash val="solid"/>
+          </a:ln>
+        </p:spPr>
+      </p:sp>
+      <p:sp>
+        <p:nvSpPr>
+          <p:cNvPr id="53" name="Text 25">
+            <a:extLst>
+              <a:ext uri="{FF2B5EF4-FFF2-40B4-BE49-F238E27FC236}">
+                <a16:creationId xmlns:a16="http://schemas.microsoft.com/office/drawing/2014/main" id="{77860B1C-E620-C037-1459-5E1326B27471}"/>
+              </a:ext>
+            </a:extLst>
+          </p:cNvPr>
+          <p:cNvSpPr/>
+          <p:nvPr/>
+        </p:nvSpPr>
+        <p:spPr>
+          <a:xfrm>
+            <a:off x="7680960" y="4919472"/>
+            <a:ext cx="3749040" cy="274320"/>
+          </a:xfrm>
+          <a:prstGeom prst="rect">
+            <a:avLst/>
+          </a:prstGeom>
+          <a:noFill/>
+          <a:ln/>
+        </p:spPr>
+        <p:txBody>
+          <a:bodyPr wrap="square" rtlCol="0" anchor="ctr"/>
+          <a:lstStyle/>
+          <a:p>
+            <a:pPr marL="0" indent="0">
+              <a:buNone/>
+            </a:pPr>
+            <a:r>
+              <a:rPr lang="en-US" sz="1200" b="1" dirty="0">
+                <a:solidFill>
+                  <a:srgbClr val="E8833A"/>
+                </a:solidFill>
+                <a:latin typeface="Calibri" pitchFamily="34" charset="0"/>
+                <a:ea typeface="Calibri" pitchFamily="34" charset="-122"/>
+                <a:cs typeface="Calibri" pitchFamily="34" charset="-120"/>
+              </a:rPr>
+              <a:t>FlightStatus</a:t>
+            </a:r>
+            <a:endParaRPr lang="en-US" sz="1200" dirty="0"/>
+          </a:p>
+        </p:txBody>
+      </p:sp>
+      <p:sp>
+        <p:nvSpPr>
+          <p:cNvPr id="55" name="Text 26">
+            <a:extLst>
+              <a:ext uri="{FF2B5EF4-FFF2-40B4-BE49-F238E27FC236}">
+                <a16:creationId xmlns:a16="http://schemas.microsoft.com/office/drawing/2014/main" id="{2EFEDB9A-824C-349D-250A-5A30FB58CE6B}"/>
+              </a:ext>
+            </a:extLst>
+          </p:cNvPr>
+          <p:cNvSpPr/>
+          <p:nvPr/>
+        </p:nvSpPr>
+        <p:spPr>
+          <a:xfrm>
+            <a:off x="7680960" y="5175504"/>
+            <a:ext cx="3749040" cy="475488"/>
+          </a:xfrm>
+          <a:prstGeom prst="rect">
+            <a:avLst/>
+          </a:prstGeom>
+          <a:noFill/>
+          <a:ln/>
+        </p:spPr>
+        <p:txBody>
+          <a:bodyPr wrap="square" rtlCol="0" anchor="ctr"/>
+          <a:lstStyle/>
+          <a:p>
+            <a:pPr marL="0" indent="0">
+              <a:lnSpc>
+                <a:spcPct val="105000"/>
+              </a:lnSpc>
+              <a:buNone/>
+            </a:pPr>
+            <a:r>
+              <a:rPr lang="en-US" sz="880" dirty="0">
+                <a:solidFill>
+                  <a:srgbClr val="1A1A2E"/>
+                </a:solidFill>
+                <a:latin typeface="Calibri" pitchFamily="34" charset="0"/>
+                <a:ea typeface="Calibri" pitchFamily="34" charset="-122"/>
+                <a:cs typeface="Calibri" pitchFamily="34" charset="-120"/>
+              </a:rPr>
+              <a:t>Scheduled, Boarding, Departed, InFlight, Landed, Delayed, Cancelled, Completed</a:t>
+            </a:r>
+            <a:endParaRPr lang="en-US" sz="880" dirty="0"/>
+          </a:p>
+        </p:txBody>
+      </p:sp>
+      <p:sp>
+        <p:nvSpPr>
+          <p:cNvPr id="57" name="Shape 27">
+            <a:extLst>
+              <a:ext uri="{FF2B5EF4-FFF2-40B4-BE49-F238E27FC236}">
+                <a16:creationId xmlns:a16="http://schemas.microsoft.com/office/drawing/2014/main" id="{3837FFD6-137F-7460-5F0E-12ED9EDF4C3E}"/>
+              </a:ext>
+            </a:extLst>
+          </p:cNvPr>
+          <p:cNvSpPr/>
+          <p:nvPr/>
+        </p:nvSpPr>
+        <p:spPr>
+          <a:xfrm>
+            <a:off x="7498080" y="5815584"/>
+            <a:ext cx="4114800" cy="841248"/>
+          </a:xfrm>
+          <a:prstGeom prst="roundRect">
+            <a:avLst>
+              <a:gd name="adj" fmla="val 7609"/>
+            </a:avLst>
+          </a:prstGeom>
+          <a:solidFill>
+            <a:srgbClr val="FFFFFF"/>
+          </a:solidFill>
+          <a:ln w="12700">
+            <a:solidFill>
+              <a:srgbClr val="1E2761"/>
+            </a:solidFill>
+            <a:prstDash val="solid"/>
+          </a:ln>
+        </p:spPr>
+      </p:sp>
+      <p:sp>
+        <p:nvSpPr>
+          <p:cNvPr id="59" name="Text 28">
+            <a:extLst>
+              <a:ext uri="{FF2B5EF4-FFF2-40B4-BE49-F238E27FC236}">
+                <a16:creationId xmlns:a16="http://schemas.microsoft.com/office/drawing/2014/main" id="{43A7FD88-8493-8610-03DC-5E46C4F6585E}"/>
+              </a:ext>
+            </a:extLst>
+          </p:cNvPr>
+          <p:cNvSpPr/>
+          <p:nvPr/>
+        </p:nvSpPr>
+        <p:spPr>
+          <a:xfrm>
+            <a:off x="7680960" y="5870448"/>
+            <a:ext cx="3749040" cy="274320"/>
+          </a:xfrm>
+          <a:prstGeom prst="rect">
+            <a:avLst/>
+          </a:prstGeom>
+          <a:noFill/>
+          <a:ln/>
+        </p:spPr>
+        <p:txBody>
+          <a:bodyPr wrap="square" rtlCol="0" anchor="ctr"/>
+          <a:lstStyle/>
+          <a:p>
+            <a:pPr marL="0" indent="0">
+              <a:buNone/>
+            </a:pPr>
+            <a:r>
+              <a:rPr lang="en-US" sz="1200" b="1" dirty="0">
+                <a:solidFill>
+                  <a:srgbClr val="E8833A"/>
+                </a:solidFill>
+                <a:latin typeface="Calibri" pitchFamily="34" charset="0"/>
+                <a:ea typeface="Calibri" pitchFamily="34" charset="-122"/>
+                <a:cs typeface="Calibri" pitchFamily="34" charset="-120"/>
+              </a:rPr>
+              <a:t>SeatClass</a:t>
+            </a:r>
+            <a:endParaRPr lang="en-US" sz="1200" dirty="0"/>
+          </a:p>
+        </p:txBody>
+      </p:sp>
+      <p:sp>
+        <p:nvSpPr>
+          <p:cNvPr id="61" name="Text 29">
+            <a:extLst>
+              <a:ext uri="{FF2B5EF4-FFF2-40B4-BE49-F238E27FC236}">
+                <a16:creationId xmlns:a16="http://schemas.microsoft.com/office/drawing/2014/main" id="{E996EA33-405E-AD28-C6F4-8ED6BEA468DC}"/>
+              </a:ext>
+            </a:extLst>
+          </p:cNvPr>
+          <p:cNvSpPr/>
+          <p:nvPr/>
+        </p:nvSpPr>
+        <p:spPr>
+          <a:xfrm>
+            <a:off x="7680960" y="6126480"/>
+            <a:ext cx="3749040" cy="475488"/>
+          </a:xfrm>
+          <a:prstGeom prst="rect">
+            <a:avLst/>
+          </a:prstGeom>
+          <a:noFill/>
+          <a:ln/>
+        </p:spPr>
+        <p:txBody>
+          <a:bodyPr wrap="square" rtlCol="0" anchor="ctr"/>
+          <a:lstStyle/>
+          <a:p>
+            <a:pPr marL="0" indent="0">
+              <a:lnSpc>
+                <a:spcPct val="105000"/>
+              </a:lnSpc>
+              <a:buNone/>
+            </a:pPr>
+            <a:r>
+              <a:rPr lang="en-US" sz="880" dirty="0">
+                <a:solidFill>
+                  <a:srgbClr val="1A1A2E"/>
+                </a:solidFill>
+                <a:latin typeface="Calibri" pitchFamily="34" charset="0"/>
+                <a:ea typeface="Calibri" pitchFamily="34" charset="-122"/>
+                <a:cs typeface="Calibri" pitchFamily="34" charset="-120"/>
+              </a:rPr>
+              <a:t>Economy, Business, First</a:t>
+            </a:r>
+            <a:endParaRPr lang="en-US" sz="880" dirty="0"/>
+          </a:p>
+        </p:txBody>
+      </p:sp>
+    </p:spTree>
+    <p:extLst>
+      <p:ext uri="{BB962C8B-B14F-4D97-AF65-F5344CB8AC3E}">
+        <p14:creationId xmlns:p14="http://schemas.microsoft.com/office/powerpoint/2010/main" val="2764574286"/>
+      </p:ext>
+    </p:extLst>
+  </p:cSld>
+  <p:clrMapOvr>
+    <a:masterClrMapping/>
+  </p:clrMapOvr>
+</p:sld>
+</file>
+
+<file path=ppt/slides/slide7.xml><?xml version="1.0" encoding="utf-8"?>
+<p:sld xmlns:a="http://schemas.openxmlformats.org/drawingml/2006/main" xmlns:r="http://schemas.openxmlformats.org/officeDocument/2006/relationships" xmlns:p="http://schemas.openxmlformats.org/presentationml/2006/main">
+  <p:cSld>
+    <p:spTree>
+      <p:nvGrpSpPr>
+        <p:cNvPr id="1" name=""/>
+        <p:cNvGrpSpPr/>
+        <p:nvPr/>
+      </p:nvGrpSpPr>
+      <p:grpSpPr>
+        <a:xfrm>
+          <a:off x="0" y="0"/>
+          <a:ext cx="0" cy="0"/>
+          <a:chOff x="0" y="0"/>
+          <a:chExt cx="0" cy="0"/>
+        </a:xfrm>
+      </p:grpSpPr>
+      <p:sp>
+        <p:nvSpPr>
+          <p:cNvPr id="3" name="Text 0">
+            <a:extLst>
+              <a:ext uri="{FF2B5EF4-FFF2-40B4-BE49-F238E27FC236}">
                 <a16:creationId xmlns:a16="http://schemas.microsoft.com/office/drawing/2014/main" id="{F7AA7452-BF57-076C-080F-6A30D2AF0BC6}"/>
               </a:ext>
             </a:extLst>
@@ -9878,7 +9807,7 @@
 </p:sld>
 </file>
 
-<file path=ppt/slides/slide7.xml><?xml version="1.0" encoding="utf-8"?>
+<file path=ppt/slides/slide8.xml><?xml version="1.0" encoding="utf-8"?>
 <p:sld xmlns:a="http://schemas.openxmlformats.org/drawingml/2006/main" xmlns:r="http://schemas.openxmlformats.org/officeDocument/2006/relationships" xmlns:p="http://schemas.openxmlformats.org/presentationml/2006/main">
   <p:cSld>
     <p:spTree>
@@ -11409,7 +11338,7 @@
 </p:sld>
 </file>
 
-<file path=ppt/slides/slide8.xml><?xml version="1.0" encoding="utf-8"?>
+<file path=ppt/slides/slide9.xml><?xml version="1.0" encoding="utf-8"?>
 <p:sld xmlns:a="http://schemas.openxmlformats.org/drawingml/2006/main" xmlns:r="http://schemas.openxmlformats.org/officeDocument/2006/relationships" xmlns:p="http://schemas.openxmlformats.org/presentationml/2006/main">
   <p:cSld>
     <p:spTree>
